--- a/docs/result-report/etch-hmi-result-report.pptx
+++ b/docs/result-report/etch-hmi-result-report.pptx
@@ -2,20 +2,22 @@
 <file path=ppt/presentation.xml><?xml version="1.0" encoding="utf-8"?>
 <p:presentation xmlns:p="http://schemas.openxmlformats.org/presentationml/2006/main">
   <p:sldMasterIdLst>
-    <p:sldMasterId xmlns:r="http://schemas.openxmlformats.org/officeDocument/2006/relationships" id="2147483648" r:id="Rd0b5337df683467c"/>
+    <p:sldMasterId xmlns:r="http://schemas.openxmlformats.org/officeDocument/2006/relationships" id="2147483648" r:id="R5734ac496d9a4ce4"/>
   </p:sldMasterIdLst>
   <p:notesMasterIdLst>
-    <p:notesMasterId xmlns:r="http://schemas.openxmlformats.org/officeDocument/2006/relationships" r:id="R944d6e3be5d64590"/>
+    <p:notesMasterId xmlns:r="http://schemas.openxmlformats.org/officeDocument/2006/relationships" r:id="R6587e887d5714f19"/>
   </p:notesMasterIdLst>
   <p:sldIdLst>
-    <p:sldId xmlns:r="http://schemas.openxmlformats.org/officeDocument/2006/relationships" id="256" r:id="R290a540f61184d07"/>
-    <p:sldId xmlns:r="http://schemas.openxmlformats.org/officeDocument/2006/relationships" id="257" r:id="Re9f2002960ba46cf"/>
-    <p:sldId xmlns:r="http://schemas.openxmlformats.org/officeDocument/2006/relationships" id="258" r:id="R2714f1fa657a4ce3"/>
-    <p:sldId xmlns:r="http://schemas.openxmlformats.org/officeDocument/2006/relationships" id="259" r:id="R72a37bac64354f82"/>
-    <p:sldId xmlns:r="http://schemas.openxmlformats.org/officeDocument/2006/relationships" id="260" r:id="R293c08443a8d4f91"/>
-    <p:sldId xmlns:r="http://schemas.openxmlformats.org/officeDocument/2006/relationships" id="261" r:id="Rb8a2a19dfbdd469b"/>
-    <p:sldId xmlns:r="http://schemas.openxmlformats.org/officeDocument/2006/relationships" id="262" r:id="Rcfa61e42182240bb"/>
-    <p:sldId xmlns:r="http://schemas.openxmlformats.org/officeDocument/2006/relationships" id="263" r:id="Ra50d6a5a211547ac"/>
+    <p:sldId xmlns:r="http://schemas.openxmlformats.org/officeDocument/2006/relationships" id="256" r:id="R923d58d75743445d"/>
+    <p:sldId xmlns:r="http://schemas.openxmlformats.org/officeDocument/2006/relationships" id="257" r:id="Rf158c5b622e14b52"/>
+    <p:sldId xmlns:r="http://schemas.openxmlformats.org/officeDocument/2006/relationships" id="258" r:id="Re0b204a1cda94529"/>
+    <p:sldId xmlns:r="http://schemas.openxmlformats.org/officeDocument/2006/relationships" id="259" r:id="R19d3091072324208"/>
+    <p:sldId xmlns:r="http://schemas.openxmlformats.org/officeDocument/2006/relationships" id="260" r:id="R25b7355b42214a02"/>
+    <p:sldId xmlns:r="http://schemas.openxmlformats.org/officeDocument/2006/relationships" id="261" r:id="R8e9d1994c4bd4b08"/>
+    <p:sldId xmlns:r="http://schemas.openxmlformats.org/officeDocument/2006/relationships" id="262" r:id="Ra5246b90d44e4176"/>
+    <p:sldId xmlns:r="http://schemas.openxmlformats.org/officeDocument/2006/relationships" id="263" r:id="Rac8786be5f9d47af"/>
+    <p:sldId xmlns:r="http://schemas.openxmlformats.org/officeDocument/2006/relationships" id="264" r:id="R23a1453af31e4b2b"/>
+    <p:sldId xmlns:r="http://schemas.openxmlformats.org/officeDocument/2006/relationships" id="265" r:id="R2e125fb0349a44a9"/>
   </p:sldIdLst>
   <p:sldSz cx="12192000" cy="6858000"/>
   <p:notesSz cx="6858000" cy="9144000"/>
@@ -524,6 +526,72 @@
 </p:notes>
 </file>
 
+<file path=ppt/notesSlides/notesSlide10.xml><?xml version="1.0" encoding="utf-8"?>
+<p:notes xmlns:p="http://schemas.openxmlformats.org/presentationml/2006/main">
+  <p:cSld>
+    <p:spTree>
+      <p:nvGrpSpPr>
+        <p:cNvPr id="1" name=""/>
+        <p:cNvGrpSpPr/>
+        <p:nvPr/>
+      </p:nvGrpSpPr>
+      <p:grpSpPr>
+        <a:xfrm xmlns:a="http://schemas.openxmlformats.org/drawingml/2006/main"/>
+      </p:grpSpPr>
+      <p:sp>
+        <p:nvSpPr>
+          <p:cNvPr id="2" name="Slide Image Placeholder 1"/>
+          <p:cNvSpPr>
+            <a:spLocks xmlns:a="http://schemas.openxmlformats.org/drawingml/2006/main" noGrp="1"/>
+          </p:cNvSpPr>
+          <p:nvPr>
+            <p:ph type="sldImg" idx="0"/>
+          </p:nvPr>
+        </p:nvSpPr>
+        <p:spPr/>
+      </p:sp>
+      <p:sp>
+        <p:nvSpPr>
+          <p:cNvPr id="3" name="Notes Placeholder 2"/>
+          <p:cNvSpPr>
+            <a:spLocks xmlns:a="http://schemas.openxmlformats.org/drawingml/2006/main" noGrp="1"/>
+          </p:cNvSpPr>
+          <p:nvPr>
+            <p:ph type="body" idx="1"/>
+          </p:nvPr>
+        </p:nvSpPr>
+        <p:spPr/>
+        <p:txBody>
+          <a:bodyPr xmlns:a="http://schemas.openxmlformats.org/drawingml/2006/main"/>
+          <a:lstStyle xmlns:a="http://schemas.openxmlformats.org/drawingml/2006/main"/>
+          <a:p xmlns:a="http://schemas.openxmlformats.org/drawingml/2006/main"/>
+        </p:txBody>
+      </p:sp>
+      <p:sp>
+        <p:nvSpPr>
+          <p:cNvPr id="4" name="Slide Number Placeholder 3"/>
+          <p:cNvSpPr>
+            <a:spLocks xmlns:a="http://schemas.openxmlformats.org/drawingml/2006/main" noGrp="1"/>
+          </p:cNvSpPr>
+          <p:nvPr>
+            <p:ph type="sldNum" idx="5"/>
+          </p:nvPr>
+        </p:nvSpPr>
+        <p:spPr/>
+        <p:txBody>
+          <a:bodyPr xmlns:a="http://schemas.openxmlformats.org/drawingml/2006/main"/>
+          <a:lstStyle xmlns:a="http://schemas.openxmlformats.org/drawingml/2006/main"/>
+          <a:p xmlns:a="http://schemas.openxmlformats.org/drawingml/2006/main"/>
+        </p:txBody>
+      </p:sp>
+    </p:spTree>
+  </p:cSld>
+  <p:clrMapOvr>
+    <a:masterClrMapping xmlns:a="http://schemas.openxmlformats.org/drawingml/2006/main"/>
+  </p:clrMapOvr>
+</p:notes>
+</file>
+
 <file path=ppt/notesSlides/notesSlide2.xml><?xml version="1.0" encoding="utf-8"?>
 <p:notes xmlns:p="http://schemas.openxmlformats.org/presentationml/2006/main">
   <p:cSld>
@@ -921,6 +989,72 @@
 </file>
 
 <file path=ppt/notesSlides/notesSlide8.xml><?xml version="1.0" encoding="utf-8"?>
+<p:notes xmlns:p="http://schemas.openxmlformats.org/presentationml/2006/main">
+  <p:cSld>
+    <p:spTree>
+      <p:nvGrpSpPr>
+        <p:cNvPr id="1" name=""/>
+        <p:cNvGrpSpPr/>
+        <p:nvPr/>
+      </p:nvGrpSpPr>
+      <p:grpSpPr>
+        <a:xfrm xmlns:a="http://schemas.openxmlformats.org/drawingml/2006/main"/>
+      </p:grpSpPr>
+      <p:sp>
+        <p:nvSpPr>
+          <p:cNvPr id="2" name="Slide Image Placeholder 1"/>
+          <p:cNvSpPr>
+            <a:spLocks xmlns:a="http://schemas.openxmlformats.org/drawingml/2006/main" noGrp="1"/>
+          </p:cNvSpPr>
+          <p:nvPr>
+            <p:ph type="sldImg" idx="0"/>
+          </p:nvPr>
+        </p:nvSpPr>
+        <p:spPr/>
+      </p:sp>
+      <p:sp>
+        <p:nvSpPr>
+          <p:cNvPr id="3" name="Notes Placeholder 2"/>
+          <p:cNvSpPr>
+            <a:spLocks xmlns:a="http://schemas.openxmlformats.org/drawingml/2006/main" noGrp="1"/>
+          </p:cNvSpPr>
+          <p:nvPr>
+            <p:ph type="body" idx="1"/>
+          </p:nvPr>
+        </p:nvSpPr>
+        <p:spPr/>
+        <p:txBody>
+          <a:bodyPr xmlns:a="http://schemas.openxmlformats.org/drawingml/2006/main"/>
+          <a:lstStyle xmlns:a="http://schemas.openxmlformats.org/drawingml/2006/main"/>
+          <a:p xmlns:a="http://schemas.openxmlformats.org/drawingml/2006/main"/>
+        </p:txBody>
+      </p:sp>
+      <p:sp>
+        <p:nvSpPr>
+          <p:cNvPr id="4" name="Slide Number Placeholder 3"/>
+          <p:cNvSpPr>
+            <a:spLocks xmlns:a="http://schemas.openxmlformats.org/drawingml/2006/main" noGrp="1"/>
+          </p:cNvSpPr>
+          <p:nvPr>
+            <p:ph type="sldNum" idx="5"/>
+          </p:nvPr>
+        </p:nvSpPr>
+        <p:spPr/>
+        <p:txBody>
+          <a:bodyPr xmlns:a="http://schemas.openxmlformats.org/drawingml/2006/main"/>
+          <a:lstStyle xmlns:a="http://schemas.openxmlformats.org/drawingml/2006/main"/>
+          <a:p xmlns:a="http://schemas.openxmlformats.org/drawingml/2006/main"/>
+        </p:txBody>
+      </p:sp>
+    </p:spTree>
+  </p:cSld>
+  <p:clrMapOvr>
+    <a:masterClrMapping xmlns:a="http://schemas.openxmlformats.org/drawingml/2006/main"/>
+  </p:clrMapOvr>
+</p:notes>
+</file>
+
+<file path=ppt/notesSlides/notesSlide9.xml><?xml version="1.0" encoding="utf-8"?>
 <p:notes xmlns:p="http://schemas.openxmlformats.org/presentationml/2006/main">
   <p:cSld>
     <p:spTree>
@@ -1024,7 +1158,7 @@
   </p:cSld>
   <p:clrMap bg1="lt1" tx1="dk1" bg2="lt2" tx2="dk2" accent1="accent1" accent2="accent2" accent3="accent3" accent4="accent4" accent5="accent5" accent6="accent6" hlink="hlink" folHlink="folHlink"/>
   <p:sldLayoutIdLst>
-    <p:sldLayoutId xmlns:r="http://schemas.openxmlformats.org/officeDocument/2006/relationships" id="2147483649" r:id="R139df2ecfb1f42e6"/>
+    <p:sldLayoutId xmlns:r="http://schemas.openxmlformats.org/officeDocument/2006/relationships" id="2147483649" r:id="R4fe0ca1f230e4b77"/>
   </p:sldLayoutIdLst>
   <p:txStyles>
     <p:titleStyle>
@@ -1522,7 +1656,7 @@
           <p:cNvPr id="1" name="">
             <a:extLst xmlns:a="http://schemas.openxmlformats.org/drawingml/2006/main">
               <a:ext uri="{FF2B5EF4-FFF2-40B4-BE49-F238E27FC236}">
-                <a16:creationId xmlns:a16="http://schemas.microsoft.com/office/drawing/2014/main" id="{6472CFAA-AA23-4EA4-BC43-92B8372B1FBB}"/>
+                <a16:creationId xmlns:a16="http://schemas.microsoft.com/office/drawing/2014/main" id="{9780E3D3-05DB-40CA-9D4E-91E3DA3A9CB9}"/>
               </a:ext>
             </a:extLst>
           </p:cNvPr>
@@ -1557,7 +1691,7 @@
           <p:cNvPr id="2" name="">
             <a:extLst xmlns:a="http://schemas.openxmlformats.org/drawingml/2006/main">
               <a:ext uri="{FF2B5EF4-FFF2-40B4-BE49-F238E27FC236}">
-                <a16:creationId xmlns:a16="http://schemas.microsoft.com/office/drawing/2014/main" id="{E1F077B7-32C4-4956-A378-D1CD355E7E7C}"/>
+                <a16:creationId xmlns:a16="http://schemas.microsoft.com/office/drawing/2014/main" id="{C1B9A1D5-BD16-4733-A25B-0998DD7DB5C8}"/>
               </a:ext>
             </a:extLst>
           </p:cNvPr>
@@ -1621,7 +1755,7 @@
           <p:cNvPr id="3" name="">
             <a:extLst xmlns:a="http://schemas.openxmlformats.org/drawingml/2006/main">
               <a:ext uri="{FF2B5EF4-FFF2-40B4-BE49-F238E27FC236}">
-                <a16:creationId xmlns:a16="http://schemas.microsoft.com/office/drawing/2014/main" id="{DC5852EE-D3FF-4A03-AA1E-16A813172A2B}"/>
+                <a16:creationId xmlns:a16="http://schemas.microsoft.com/office/drawing/2014/main" id="{50089BFF-49D1-47E0-A1C6-47FB1FE3E093}"/>
               </a:ext>
             </a:extLst>
           </p:cNvPr>
@@ -1708,7 +1842,7 @@
           <p:cNvPr id="4" name="">
             <a:extLst xmlns:a="http://schemas.openxmlformats.org/drawingml/2006/main">
               <a:ext uri="{FF2B5EF4-FFF2-40B4-BE49-F238E27FC236}">
-                <a16:creationId xmlns:a16="http://schemas.microsoft.com/office/drawing/2014/main" id="{86594483-3C4C-4A2D-B090-463266D1C27C}"/>
+                <a16:creationId xmlns:a16="http://schemas.microsoft.com/office/drawing/2014/main" id="{D6906D6A-108E-44C6-8651-3A481346066B}"/>
               </a:ext>
             </a:extLst>
           </p:cNvPr>
@@ -1772,7 +1906,7 @@
           <p:cNvPr id="5" name="">
             <a:extLst xmlns:a="http://schemas.openxmlformats.org/drawingml/2006/main">
               <a:ext uri="{FF2B5EF4-FFF2-40B4-BE49-F238E27FC236}">
-                <a16:creationId xmlns:a16="http://schemas.microsoft.com/office/drawing/2014/main" id="{FEA09BAF-F10B-4956-A231-DC9239C1B17E}"/>
+                <a16:creationId xmlns:a16="http://schemas.microsoft.com/office/drawing/2014/main" id="{FC22796A-0BC0-4CEC-9B96-34030DEEE783}"/>
               </a:ext>
             </a:extLst>
           </p:cNvPr>
@@ -1807,7 +1941,7 @@
           <p:cNvPr id="6" name="">
             <a:extLst xmlns:a="http://schemas.openxmlformats.org/drawingml/2006/main">
               <a:ext uri="{FF2B5EF4-FFF2-40B4-BE49-F238E27FC236}">
-                <a16:creationId xmlns:a16="http://schemas.microsoft.com/office/drawing/2014/main" id="{9E9A4C55-6A73-4255-97F9-0B92D9C6BFF2}"/>
+                <a16:creationId xmlns:a16="http://schemas.microsoft.com/office/drawing/2014/main" id="{3E2E68B1-2ECF-4588-8DC7-9A37ED1CD275}"/>
               </a:ext>
             </a:extLst>
           </p:cNvPr>
@@ -1871,7 +2005,7 @@
           <p:cNvPr id="7" name="">
             <a:extLst xmlns:a="http://schemas.openxmlformats.org/drawingml/2006/main">
               <a:ext uri="{FF2B5EF4-FFF2-40B4-BE49-F238E27FC236}">
-                <a16:creationId xmlns:a16="http://schemas.microsoft.com/office/drawing/2014/main" id="{DB22C152-C020-4099-83B1-09B68EB9281B}"/>
+                <a16:creationId xmlns:a16="http://schemas.microsoft.com/office/drawing/2014/main" id="{79A55414-26A3-4521-A876-747374DABC98}"/>
               </a:ext>
             </a:extLst>
           </p:cNvPr>
@@ -1906,7 +2040,7 @@
           <p:cNvPr id="8" name="">
             <a:extLst xmlns:a="http://schemas.openxmlformats.org/drawingml/2006/main">
               <a:ext uri="{FF2B5EF4-FFF2-40B4-BE49-F238E27FC236}">
-                <a16:creationId xmlns:a16="http://schemas.microsoft.com/office/drawing/2014/main" id="{2C41BD2D-6445-4026-AF10-B6FC4DF91978}"/>
+                <a16:creationId xmlns:a16="http://schemas.microsoft.com/office/drawing/2014/main" id="{D9496530-55BB-4BFA-BF9E-E5BE952B1CEA}"/>
               </a:ext>
             </a:extLst>
           </p:cNvPr>
@@ -1970,7 +2104,7 @@
           <p:cNvPr id="9" name="">
             <a:extLst xmlns:a="http://schemas.openxmlformats.org/drawingml/2006/main">
               <a:ext uri="{FF2B5EF4-FFF2-40B4-BE49-F238E27FC236}">
-                <a16:creationId xmlns:a16="http://schemas.microsoft.com/office/drawing/2014/main" id="{5F4B060B-AFF9-4DB5-ADCD-79317D230CDC}"/>
+                <a16:creationId xmlns:a16="http://schemas.microsoft.com/office/drawing/2014/main" id="{5812D515-673C-4F11-AAF1-81FDB950D391}"/>
               </a:ext>
             </a:extLst>
           </p:cNvPr>
@@ -2005,7 +2139,7 @@
           <p:cNvPr id="10" name="">
             <a:extLst xmlns:a="http://schemas.openxmlformats.org/drawingml/2006/main">
               <a:ext uri="{FF2B5EF4-FFF2-40B4-BE49-F238E27FC236}">
-                <a16:creationId xmlns:a16="http://schemas.microsoft.com/office/drawing/2014/main" id="{103C678C-EB5A-4537-BC17-15B01A48183E}"/>
+                <a16:creationId xmlns:a16="http://schemas.microsoft.com/office/drawing/2014/main" id="{2E91D591-C6BF-45C0-BFBC-5F35011C4695}"/>
               </a:ext>
             </a:extLst>
           </p:cNvPr>
@@ -2069,7 +2203,7 @@
           <p:cNvPr id="11" name="">
             <a:extLst xmlns:a="http://schemas.openxmlformats.org/drawingml/2006/main">
               <a:ext uri="{FF2B5EF4-FFF2-40B4-BE49-F238E27FC236}">
-                <a16:creationId xmlns:a16="http://schemas.microsoft.com/office/drawing/2014/main" id="{7ED1AE07-1AAF-4CB0-A881-AF3CB46E99DB}"/>
+                <a16:creationId xmlns:a16="http://schemas.microsoft.com/office/drawing/2014/main" id="{38E87F8A-704C-4449-B910-39BC1758F37A}"/>
               </a:ext>
             </a:extLst>
           </p:cNvPr>
@@ -2104,7 +2238,7 @@
           <p:cNvPr id="12" name="">
             <a:extLst xmlns:a="http://schemas.openxmlformats.org/drawingml/2006/main">
               <a:ext uri="{FF2B5EF4-FFF2-40B4-BE49-F238E27FC236}">
-                <a16:creationId xmlns:a16="http://schemas.microsoft.com/office/drawing/2014/main" id="{9F3F31B3-4AF5-45D9-8F30-AEDE62C8942E}"/>
+                <a16:creationId xmlns:a16="http://schemas.microsoft.com/office/drawing/2014/main" id="{2CA02A3D-6D89-4C6F-A070-5CB1658E5E27}"/>
               </a:ext>
             </a:extLst>
           </p:cNvPr>
@@ -2172,7 +2306,7 @@
           <p:nvPr/>
         </p:nvPicPr>
         <p:blipFill>
-          <a:blip xmlns:r="http://schemas.openxmlformats.org/officeDocument/2006/relationships" xmlns:a="http://schemas.openxmlformats.org/drawingml/2006/main" r:embed="R6131ea8312134b5b"/>
+          <a:blip xmlns:r="http://schemas.openxmlformats.org/officeDocument/2006/relationships" xmlns:a="http://schemas.openxmlformats.org/drawingml/2006/main" r:embed="R071fab02f1684c0b"/>
           <a:srcRect xmlns:a="http://schemas.openxmlformats.org/drawingml/2006/main" l="0" t="85" r="0" b="85"/>
           <a:stretch xmlns:a="http://schemas.openxmlformats.org/drawingml/2006/main">
             <a:fillRect l="0" t="0" r="0" b="0"/>
@@ -2197,7 +2331,7 @@
           <p:nvPr/>
         </p:nvPicPr>
         <p:blipFill>
-          <a:blip xmlns:r="http://schemas.openxmlformats.org/officeDocument/2006/relationships" xmlns:a="http://schemas.openxmlformats.org/drawingml/2006/main" r:embed="Rca5ac4290bbd414c"/>
+          <a:blip xmlns:r="http://schemas.openxmlformats.org/officeDocument/2006/relationships" xmlns:a="http://schemas.openxmlformats.org/drawingml/2006/main" r:embed="R2375dd1d29474c33"/>
           <a:srcRect xmlns:a="http://schemas.openxmlformats.org/drawingml/2006/main" l="1172" t="0" r="1172" b="0"/>
           <a:stretch xmlns:a="http://schemas.openxmlformats.org/drawingml/2006/main">
             <a:fillRect l="0" t="0" r="0" b="0"/>
@@ -2222,7 +2356,7 @@
           <p:nvPr/>
         </p:nvPicPr>
         <p:blipFill>
-          <a:blip xmlns:r="http://schemas.openxmlformats.org/officeDocument/2006/relationships" xmlns:a="http://schemas.openxmlformats.org/drawingml/2006/main" r:embed="R6dd0199c18014ef4"/>
+          <a:blip xmlns:r="http://schemas.openxmlformats.org/officeDocument/2006/relationships" xmlns:a="http://schemas.openxmlformats.org/drawingml/2006/main" r:embed="R05d84a8343bb48c6"/>
           <a:srcRect xmlns:a="http://schemas.openxmlformats.org/drawingml/2006/main" l="1172" t="0" r="1172" b="0"/>
           <a:stretch xmlns:a="http://schemas.openxmlformats.org/drawingml/2006/main">
             <a:fillRect l="0" t="0" r="0" b="0"/>
@@ -2243,7 +2377,7 @@
           <p:cNvPr id="16" name="">
             <a:extLst xmlns:a="http://schemas.openxmlformats.org/drawingml/2006/main">
               <a:ext uri="{FF2B5EF4-FFF2-40B4-BE49-F238E27FC236}">
-                <a16:creationId xmlns:a16="http://schemas.microsoft.com/office/drawing/2014/main" id="{2199BC84-7138-4255-A8EB-B0A83B1EDE3C}"/>
+                <a16:creationId xmlns:a16="http://schemas.microsoft.com/office/drawing/2014/main" id="{03CE6D44-341C-4676-ADF6-86535C19BAE7}"/>
               </a:ext>
             </a:extLst>
           </p:cNvPr>
@@ -2278,7 +2412,7 @@
           <p:cNvPr id="17" name="">
             <a:extLst xmlns:a="http://schemas.openxmlformats.org/drawingml/2006/main">
               <a:ext uri="{FF2B5EF4-FFF2-40B4-BE49-F238E27FC236}">
-                <a16:creationId xmlns:a16="http://schemas.microsoft.com/office/drawing/2014/main" id="{77B35C42-FCB7-4A90-BC11-45E4ED0B64E5}"/>
+                <a16:creationId xmlns:a16="http://schemas.microsoft.com/office/drawing/2014/main" id="{D7B08542-8E4B-4CA9-8D21-5C54057DA1AD}"/>
               </a:ext>
             </a:extLst>
           </p:cNvPr>
@@ -2342,7 +2476,7 @@
           <p:cNvPr id="18" name="">
             <a:extLst xmlns:a="http://schemas.openxmlformats.org/drawingml/2006/main">
               <a:ext uri="{FF2B5EF4-FFF2-40B4-BE49-F238E27FC236}">
-                <a16:creationId xmlns:a16="http://schemas.microsoft.com/office/drawing/2014/main" id="{989134E2-7CEE-4222-B163-081BC08C5FDE}"/>
+                <a16:creationId xmlns:a16="http://schemas.microsoft.com/office/drawing/2014/main" id="{D09C45DB-D6CF-4200-9331-6F11A61BF652}"/>
               </a:ext>
             </a:extLst>
           </p:cNvPr>
@@ -2404,7 +2538,1181 @@
     </p:spTree>
     <p:extLst>
       <p:ext uri="{BB962C8B-B14F-4D97-AF65-F5344CB8AC3E}">
-        <p14:creationId xmlns:p14="http://schemas.microsoft.com/office/powerpoint/2010/main" val="1065210615"/>
+        <p14:creationId xmlns:p14="http://schemas.microsoft.com/office/powerpoint/2010/main" val="31943611"/>
+      </p:ext>
+    </p:extLst>
+  </p:cSld>
+</p:sld>
+</file>
+
+<file path=ppt/slides/slide10.xml><?xml version="1.0" encoding="utf-8"?>
+<p:sld xmlns:p="http://schemas.openxmlformats.org/presentationml/2006/main">
+  <p:cSld>
+    <p:spTree>
+      <p:nvGrpSpPr>
+        <p:cNvPr id="1" name=""/>
+        <p:cNvGrpSpPr/>
+        <p:nvPr/>
+      </p:nvGrpSpPr>
+      <p:grpSpPr>
+        <a:xfrm xmlns:a="http://schemas.openxmlformats.org/drawingml/2006/main"/>
+      </p:grpSpPr>
+      <p:sp>
+        <p:nvSpPr>
+          <p:cNvPr id="1" name="">
+            <a:extLst xmlns:a="http://schemas.openxmlformats.org/drawingml/2006/main">
+              <a:ext uri="{FF2B5EF4-FFF2-40B4-BE49-F238E27FC236}">
+                <a16:creationId xmlns:a16="http://schemas.microsoft.com/office/drawing/2014/main" id="{2E8FE5A6-F449-40B5-A67D-4C19F5F634BE}"/>
+              </a:ext>
+            </a:extLst>
+          </p:cNvPr>
+          <p:cNvSpPr>
+            <a:spLocks xmlns:a="http://schemas.openxmlformats.org/drawingml/2006/main" noGrp="1"/>
+          </p:cNvSpPr>
+          <p:nvPr/>
+        </p:nvSpPr>
+        <p:spPr>
+          <a:xfrm xmlns:a="http://schemas.openxmlformats.org/drawingml/2006/main">
+            <a:off x="0" y="0"/>
+            <a:ext cx="12192000" cy="6858000"/>
+          </a:xfrm>
+          <a:prstGeom xmlns:a="http://schemas.openxmlformats.org/drawingml/2006/main" prst="rect">
+            <a:avLst/>
+          </a:prstGeom>
+          <a:solidFill xmlns:a="http://schemas.openxmlformats.org/drawingml/2006/main">
+            <a:srgbClr val="FFFFFF"/>
+          </a:solidFill>
+          <a:ln xmlns:a="http://schemas.openxmlformats.org/drawingml/2006/main" w="0">
+            <a:solidFill>
+              <a:srgbClr val="000000">
+                <a:alpha val="0"/>
+              </a:srgbClr>
+            </a:solidFill>
+            <a:prstDash val="solid"/>
+          </a:ln>
+        </p:spPr>
+      </p:sp>
+      <p:sp>
+        <p:nvSpPr>
+          <p:cNvPr id="2" name="">
+            <a:extLst xmlns:a="http://schemas.openxmlformats.org/drawingml/2006/main">
+              <a:ext uri="{FF2B5EF4-FFF2-40B4-BE49-F238E27FC236}">
+                <a16:creationId xmlns:a16="http://schemas.microsoft.com/office/drawing/2014/main" id="{6BABC4D7-B422-4154-A667-EAE367D6BBA5}"/>
+              </a:ext>
+            </a:extLst>
+          </p:cNvPr>
+          <p:cNvSpPr>
+            <a:spLocks xmlns:a="http://schemas.openxmlformats.org/drawingml/2006/main" noGrp="1"/>
+          </p:cNvSpPr>
+          <p:nvPr/>
+        </p:nvSpPr>
+        <p:spPr>
+          <a:xfrm xmlns:a="http://schemas.openxmlformats.org/drawingml/2006/main">
+            <a:off x="533400" y="361950"/>
+            <a:ext cx="7810500" cy="419100"/>
+          </a:xfrm>
+          <a:prstGeom xmlns:a="http://schemas.openxmlformats.org/drawingml/2006/main" prst="rect">
+            <a:avLst/>
+          </a:prstGeom>
+          <a:solidFill xmlns:a="http://schemas.openxmlformats.org/drawingml/2006/main">
+            <a:srgbClr val="000000">
+              <a:alpha val="0"/>
+            </a:srgbClr>
+          </a:solidFill>
+          <a:ln xmlns:a="http://schemas.openxmlformats.org/drawingml/2006/main" w="0">
+            <a:solidFill>
+              <a:srgbClr val="000000">
+                <a:alpha val="0"/>
+              </a:srgbClr>
+            </a:solidFill>
+            <a:prstDash val="solid"/>
+          </a:ln>
+        </p:spPr>
+        <p:txBody>
+          <a:bodyPr xmlns:a="http://schemas.openxmlformats.org/drawingml/2006/main" lIns="0" tIns="0" rIns="0" bIns="0" anchor="t"/>
+          <a:lstStyle xmlns:a="http://schemas.openxmlformats.org/drawingml/2006/main"/>
+          <a:p xmlns:a="http://schemas.openxmlformats.org/drawingml/2006/main">
+            <a:pPr algn="l">
+              <a:defRPr sz="2175" b="1">
+                <a:solidFill>
+                  <a:srgbClr val="111827"/>
+                </a:solidFill>
+                <a:latin typeface="Aptos"/>
+                <a:ea typeface="Aptos"/>
+                <a:cs typeface="Aptos"/>
+              </a:defRPr>
+            </a:pPr>
+            <a:r>
+              <a:rPr sz="2175" b="1">
+                <a:solidFill>
+                  <a:srgbClr val="111827"/>
+                </a:solidFill>
+                <a:latin typeface="Aptos"/>
+                <a:ea typeface="Aptos"/>
+                <a:cs typeface="Aptos"/>
+              </a:rPr>
+              <a:t>최종 결론</a:t>
+            </a:r>
+          </a:p>
+        </p:txBody>
+      </p:sp>
+      <p:sp>
+        <p:nvSpPr>
+          <p:cNvPr id="3" name="">
+            <a:extLst xmlns:a="http://schemas.openxmlformats.org/drawingml/2006/main">
+              <a:ext uri="{FF2B5EF4-FFF2-40B4-BE49-F238E27FC236}">
+                <a16:creationId xmlns:a16="http://schemas.microsoft.com/office/drawing/2014/main" id="{8D95C05E-319F-43E4-B840-5D14EEAB0F8F}"/>
+              </a:ext>
+            </a:extLst>
+          </p:cNvPr>
+          <p:cNvSpPr>
+            <a:spLocks xmlns:a="http://schemas.openxmlformats.org/drawingml/2006/main" noGrp="1"/>
+          </p:cNvSpPr>
+          <p:nvPr/>
+        </p:nvSpPr>
+        <p:spPr>
+          <a:xfrm xmlns:a="http://schemas.openxmlformats.org/drawingml/2006/main">
+            <a:off x="552450" y="781050"/>
+            <a:ext cx="7810500" cy="285750"/>
+          </a:xfrm>
+          <a:prstGeom xmlns:a="http://schemas.openxmlformats.org/drawingml/2006/main" prst="rect">
+            <a:avLst/>
+          </a:prstGeom>
+          <a:solidFill xmlns:a="http://schemas.openxmlformats.org/drawingml/2006/main">
+            <a:srgbClr val="000000">
+              <a:alpha val="0"/>
+            </a:srgbClr>
+          </a:solidFill>
+          <a:ln xmlns:a="http://schemas.openxmlformats.org/drawingml/2006/main" w="0">
+            <a:solidFill>
+              <a:srgbClr val="000000">
+                <a:alpha val="0"/>
+              </a:srgbClr>
+            </a:solidFill>
+            <a:prstDash val="solid"/>
+          </a:ln>
+        </p:spPr>
+        <p:txBody>
+          <a:bodyPr xmlns:a="http://schemas.openxmlformats.org/drawingml/2006/main" lIns="0" tIns="0" rIns="0" bIns="0" anchor="t"/>
+          <a:lstStyle xmlns:a="http://schemas.openxmlformats.org/drawingml/2006/main"/>
+          <a:p xmlns:a="http://schemas.openxmlformats.org/drawingml/2006/main">
+            <a:pPr algn="l">
+              <a:defRPr sz="975" b="0">
+                <a:solidFill>
+                  <a:srgbClr val="64748B"/>
+                </a:solidFill>
+                <a:latin typeface="Aptos"/>
+                <a:ea typeface="Aptos"/>
+                <a:cs typeface="Aptos"/>
+              </a:defRPr>
+            </a:pPr>
+            <a:r>
+              <a:rPr sz="975" b="0">
+                <a:solidFill>
+                  <a:srgbClr val="64748B"/>
+                </a:solidFill>
+                <a:latin typeface="Aptos"/>
+                <a:ea typeface="Aptos"/>
+                <a:cs typeface="Aptos"/>
+              </a:rPr>
+              <a:t>데모 가능한 장비 HMI와 원격 모니터링 체계를 구현했고, 실장비 검증 단계로 확장 가능</a:t>
+            </a:r>
+          </a:p>
+        </p:txBody>
+      </p:sp>
+      <p:sp>
+        <p:nvSpPr>
+          <p:cNvPr id="4" name="">
+            <a:extLst xmlns:a="http://schemas.openxmlformats.org/drawingml/2006/main">
+              <a:ext uri="{FF2B5EF4-FFF2-40B4-BE49-F238E27FC236}">
+                <a16:creationId xmlns:a16="http://schemas.microsoft.com/office/drawing/2014/main" id="{BC0D47DE-1627-43EE-BE7D-A2FC8CD2B647}"/>
+              </a:ext>
+            </a:extLst>
+          </p:cNvPr>
+          <p:cNvSpPr>
+            <a:spLocks xmlns:a="http://schemas.openxmlformats.org/drawingml/2006/main" noGrp="1"/>
+          </p:cNvSpPr>
+          <p:nvPr/>
+        </p:nvSpPr>
+        <p:spPr>
+          <a:xfrm xmlns:a="http://schemas.openxmlformats.org/drawingml/2006/main">
+            <a:off x="533400" y="1123950"/>
+            <a:ext cx="11125200" cy="19050"/>
+          </a:xfrm>
+          <a:prstGeom xmlns:a="http://schemas.openxmlformats.org/drawingml/2006/main" prst="rect">
+            <a:avLst/>
+          </a:prstGeom>
+          <a:solidFill xmlns:a="http://schemas.openxmlformats.org/drawingml/2006/main">
+            <a:srgbClr val="2563EB"/>
+          </a:solidFill>
+          <a:ln xmlns:a="http://schemas.openxmlformats.org/drawingml/2006/main" w="0">
+            <a:solidFill>
+              <a:srgbClr val="000000">
+                <a:alpha val="0"/>
+              </a:srgbClr>
+            </a:solidFill>
+            <a:prstDash val="solid"/>
+          </a:ln>
+        </p:spPr>
+      </p:sp>
+      <p:sp>
+        <p:nvSpPr>
+          <p:cNvPr id="5" name="">
+            <a:extLst xmlns:a="http://schemas.openxmlformats.org/drawingml/2006/main">
+              <a:ext uri="{FF2B5EF4-FFF2-40B4-BE49-F238E27FC236}">
+                <a16:creationId xmlns:a16="http://schemas.microsoft.com/office/drawing/2014/main" id="{CE88E728-DE81-4BD2-9655-8384B4204EEE}"/>
+              </a:ext>
+            </a:extLst>
+          </p:cNvPr>
+          <p:cNvSpPr>
+            <a:spLocks xmlns:a="http://schemas.openxmlformats.org/drawingml/2006/main" noGrp="1"/>
+          </p:cNvSpPr>
+          <p:nvPr/>
+        </p:nvSpPr>
+        <p:spPr>
+          <a:xfrm xmlns:a="http://schemas.openxmlformats.org/drawingml/2006/main">
+            <a:off x="666750" y="1428750"/>
+            <a:ext cx="10287000" cy="1047750"/>
+          </a:xfrm>
+          <a:prstGeom xmlns:a="http://schemas.openxmlformats.org/drawingml/2006/main" prst="rect">
+            <a:avLst/>
+          </a:prstGeom>
+          <a:solidFill xmlns:a="http://schemas.openxmlformats.org/drawingml/2006/main">
+            <a:srgbClr val="0B1220"/>
+          </a:solidFill>
+          <a:ln xmlns:a="http://schemas.openxmlformats.org/drawingml/2006/main" w="0">
+            <a:solidFill>
+              <a:srgbClr val="000000">
+                <a:alpha val="0"/>
+              </a:srgbClr>
+            </a:solidFill>
+            <a:prstDash val="solid"/>
+          </a:ln>
+        </p:spPr>
+      </p:sp>
+      <p:sp>
+        <p:nvSpPr>
+          <p:cNvPr id="6" name="">
+            <a:extLst xmlns:a="http://schemas.openxmlformats.org/drawingml/2006/main">
+              <a:ext uri="{FF2B5EF4-FFF2-40B4-BE49-F238E27FC236}">
+                <a16:creationId xmlns:a16="http://schemas.microsoft.com/office/drawing/2014/main" id="{99D35614-3351-4359-94EF-7FD1D9EDDD55}"/>
+              </a:ext>
+            </a:extLst>
+          </p:cNvPr>
+          <p:cNvSpPr>
+            <a:spLocks xmlns:a="http://schemas.openxmlformats.org/drawingml/2006/main" noGrp="1"/>
+          </p:cNvSpPr>
+          <p:nvPr/>
+        </p:nvSpPr>
+        <p:spPr>
+          <a:xfrm xmlns:a="http://schemas.openxmlformats.org/drawingml/2006/main">
+            <a:off x="971550" y="1695450"/>
+            <a:ext cx="9677400" cy="476250"/>
+          </a:xfrm>
+          <a:prstGeom xmlns:a="http://schemas.openxmlformats.org/drawingml/2006/main" prst="rect">
+            <a:avLst/>
+          </a:prstGeom>
+          <a:solidFill xmlns:a="http://schemas.openxmlformats.org/drawingml/2006/main">
+            <a:srgbClr val="000000">
+              <a:alpha val="0"/>
+            </a:srgbClr>
+          </a:solidFill>
+          <a:ln xmlns:a="http://schemas.openxmlformats.org/drawingml/2006/main" w="0">
+            <a:solidFill>
+              <a:srgbClr val="000000">
+                <a:alpha val="0"/>
+              </a:srgbClr>
+            </a:solidFill>
+            <a:prstDash val="solid"/>
+          </a:ln>
+        </p:spPr>
+        <p:txBody>
+          <a:bodyPr xmlns:a="http://schemas.openxmlformats.org/drawingml/2006/main" lIns="0" tIns="0" rIns="0" bIns="0" anchor="t"/>
+          <a:lstStyle xmlns:a="http://schemas.openxmlformats.org/drawingml/2006/main"/>
+          <a:p xmlns:a="http://schemas.openxmlformats.org/drawingml/2006/main">
+            <a:pPr algn="ctr">
+              <a:defRPr sz="1650" b="1">
+                <a:solidFill>
+                  <a:srgbClr val="FFFFFF"/>
+                </a:solidFill>
+                <a:latin typeface="Aptos"/>
+                <a:ea typeface="Aptos"/>
+                <a:cs typeface="Aptos"/>
+              </a:defRPr>
+            </a:pPr>
+            <a:r>
+              <a:rPr sz="1650" b="1">
+                <a:solidFill>
+                  <a:srgbClr val="FFFFFF"/>
+                </a:solidFill>
+                <a:latin typeface="Aptos"/>
+                <a:ea typeface="Aptos"/>
+                <a:cs typeface="Aptos"/>
+              </a:rPr>
+              <a:t>이번 프로젝트의 핵심 성과는 장비 제어 화면, 서버 관찰 화면, AI 조언 레이어를 분리해 발표와 검증이 가능한 형태로 연결한 것입니다.</a:t>
+            </a:r>
+          </a:p>
+        </p:txBody>
+      </p:sp>
+      <p:sp>
+        <p:nvSpPr>
+          <p:cNvPr id="7" name="">
+            <a:extLst xmlns:a="http://schemas.openxmlformats.org/drawingml/2006/main">
+              <a:ext uri="{FF2B5EF4-FFF2-40B4-BE49-F238E27FC236}">
+                <a16:creationId xmlns:a16="http://schemas.microsoft.com/office/drawing/2014/main" id="{62CA3C90-D73E-4C0C-8753-D39EE677EAC4}"/>
+              </a:ext>
+            </a:extLst>
+          </p:cNvPr>
+          <p:cNvSpPr>
+            <a:spLocks xmlns:a="http://schemas.openxmlformats.org/drawingml/2006/main" noGrp="1"/>
+          </p:cNvSpPr>
+          <p:nvPr/>
+        </p:nvSpPr>
+        <p:spPr>
+          <a:xfrm xmlns:a="http://schemas.openxmlformats.org/drawingml/2006/main">
+            <a:off x="781050" y="3028950"/>
+            <a:ext cx="3238500" cy="1285875"/>
+          </a:xfrm>
+          <a:prstGeom xmlns:a="http://schemas.openxmlformats.org/drawingml/2006/main" prst="rect">
+            <a:avLst/>
+          </a:prstGeom>
+          <a:solidFill xmlns:a="http://schemas.openxmlformats.org/drawingml/2006/main">
+            <a:srgbClr val="F8FAFC"/>
+          </a:solidFill>
+          <a:ln xmlns:a="http://schemas.openxmlformats.org/drawingml/2006/main" w="9525">
+            <a:solidFill>
+              <a:srgbClr val="CBD5E1"/>
+            </a:solidFill>
+            <a:prstDash val="solid"/>
+          </a:ln>
+        </p:spPr>
+      </p:sp>
+      <p:sp>
+        <p:nvSpPr>
+          <p:cNvPr id="8" name="">
+            <a:extLst xmlns:a="http://schemas.openxmlformats.org/drawingml/2006/main">
+              <a:ext uri="{FF2B5EF4-FFF2-40B4-BE49-F238E27FC236}">
+                <a16:creationId xmlns:a16="http://schemas.microsoft.com/office/drawing/2014/main" id="{B3ECF28C-D046-417F-9565-673D1F542B48}"/>
+              </a:ext>
+            </a:extLst>
+          </p:cNvPr>
+          <p:cNvSpPr>
+            <a:spLocks xmlns:a="http://schemas.openxmlformats.org/drawingml/2006/main" noGrp="1"/>
+          </p:cNvSpPr>
+          <p:nvPr/>
+        </p:nvSpPr>
+        <p:spPr>
+          <a:xfrm xmlns:a="http://schemas.openxmlformats.org/drawingml/2006/main">
+            <a:off x="781050" y="3028950"/>
+            <a:ext cx="66675" cy="1285875"/>
+          </a:xfrm>
+          <a:prstGeom xmlns:a="http://schemas.openxmlformats.org/drawingml/2006/main" prst="rect">
+            <a:avLst/>
+          </a:prstGeom>
+          <a:solidFill xmlns:a="http://schemas.openxmlformats.org/drawingml/2006/main">
+            <a:srgbClr val="2563EB"/>
+          </a:solidFill>
+          <a:ln xmlns:a="http://schemas.openxmlformats.org/drawingml/2006/main" w="0">
+            <a:solidFill>
+              <a:srgbClr val="000000">
+                <a:alpha val="0"/>
+              </a:srgbClr>
+            </a:solidFill>
+            <a:prstDash val="solid"/>
+          </a:ln>
+        </p:spPr>
+      </p:sp>
+      <p:sp>
+        <p:nvSpPr>
+          <p:cNvPr id="9" name="">
+            <a:extLst xmlns:a="http://schemas.openxmlformats.org/drawingml/2006/main">
+              <a:ext uri="{FF2B5EF4-FFF2-40B4-BE49-F238E27FC236}">
+                <a16:creationId xmlns:a16="http://schemas.microsoft.com/office/drawing/2014/main" id="{D75AFE90-FA7B-4E52-9AA0-B88808459B72}"/>
+              </a:ext>
+            </a:extLst>
+          </p:cNvPr>
+          <p:cNvSpPr>
+            <a:spLocks xmlns:a="http://schemas.openxmlformats.org/drawingml/2006/main" noGrp="1"/>
+          </p:cNvSpPr>
+          <p:nvPr/>
+        </p:nvSpPr>
+        <p:spPr>
+          <a:xfrm xmlns:a="http://schemas.openxmlformats.org/drawingml/2006/main">
+            <a:off x="1009650" y="3238500"/>
+            <a:ext cx="2781300" cy="228600"/>
+          </a:xfrm>
+          <a:prstGeom xmlns:a="http://schemas.openxmlformats.org/drawingml/2006/main" prst="rect">
+            <a:avLst/>
+          </a:prstGeom>
+          <a:solidFill xmlns:a="http://schemas.openxmlformats.org/drawingml/2006/main">
+            <a:srgbClr val="000000">
+              <a:alpha val="0"/>
+            </a:srgbClr>
+          </a:solidFill>
+          <a:ln xmlns:a="http://schemas.openxmlformats.org/drawingml/2006/main" w="0">
+            <a:solidFill>
+              <a:srgbClr val="000000">
+                <a:alpha val="0"/>
+              </a:srgbClr>
+            </a:solidFill>
+            <a:prstDash val="solid"/>
+          </a:ln>
+        </p:spPr>
+        <p:txBody>
+          <a:bodyPr xmlns:a="http://schemas.openxmlformats.org/drawingml/2006/main" lIns="0" tIns="0" rIns="0" bIns="0" anchor="t"/>
+          <a:lstStyle xmlns:a="http://schemas.openxmlformats.org/drawingml/2006/main"/>
+          <a:p xmlns:a="http://schemas.openxmlformats.org/drawingml/2006/main">
+            <a:pPr algn="l">
+              <a:defRPr sz="1200" b="1">
+                <a:solidFill>
+                  <a:srgbClr val="111827"/>
+                </a:solidFill>
+                <a:latin typeface="Aptos"/>
+                <a:ea typeface="Aptos"/>
+                <a:cs typeface="Aptos"/>
+              </a:defRPr>
+            </a:pPr>
+            <a:r>
+              <a:rPr sz="1200" b="1">
+                <a:solidFill>
+                  <a:srgbClr val="111827"/>
+                </a:solidFill>
+                <a:latin typeface="Aptos"/>
+                <a:ea typeface="Aptos"/>
+                <a:cs typeface="Aptos"/>
+              </a:rPr>
+              <a:t>운영자 화면 완성</a:t>
+            </a:r>
+          </a:p>
+        </p:txBody>
+      </p:sp>
+      <p:sp>
+        <p:nvSpPr>
+          <p:cNvPr id="10" name="">
+            <a:extLst xmlns:a="http://schemas.openxmlformats.org/drawingml/2006/main">
+              <a:ext uri="{FF2B5EF4-FFF2-40B4-BE49-F238E27FC236}">
+                <a16:creationId xmlns:a16="http://schemas.microsoft.com/office/drawing/2014/main" id="{144692BD-EC02-44F6-9A84-07EFC05E3B4F}"/>
+              </a:ext>
+            </a:extLst>
+          </p:cNvPr>
+          <p:cNvSpPr>
+            <a:spLocks xmlns:a="http://schemas.openxmlformats.org/drawingml/2006/main" noGrp="1"/>
+          </p:cNvSpPr>
+          <p:nvPr/>
+        </p:nvSpPr>
+        <p:spPr>
+          <a:xfrm xmlns:a="http://schemas.openxmlformats.org/drawingml/2006/main">
+            <a:off x="1009650" y="3562350"/>
+            <a:ext cx="2781300" cy="495300"/>
+          </a:xfrm>
+          <a:prstGeom xmlns:a="http://schemas.openxmlformats.org/drawingml/2006/main" prst="rect">
+            <a:avLst/>
+          </a:prstGeom>
+          <a:solidFill xmlns:a="http://schemas.openxmlformats.org/drawingml/2006/main">
+            <a:srgbClr val="000000">
+              <a:alpha val="0"/>
+            </a:srgbClr>
+          </a:solidFill>
+          <a:ln xmlns:a="http://schemas.openxmlformats.org/drawingml/2006/main" w="0">
+            <a:solidFill>
+              <a:srgbClr val="000000">
+                <a:alpha val="0"/>
+              </a:srgbClr>
+            </a:solidFill>
+            <a:prstDash val="solid"/>
+          </a:ln>
+        </p:spPr>
+        <p:txBody>
+          <a:bodyPr xmlns:a="http://schemas.openxmlformats.org/drawingml/2006/main" lIns="0" tIns="0" rIns="0" bIns="0" anchor="t"/>
+          <a:lstStyle xmlns:a="http://schemas.openxmlformats.org/drawingml/2006/main"/>
+          <a:p xmlns:a="http://schemas.openxmlformats.org/drawingml/2006/main">
+            <a:pPr algn="l">
+              <a:defRPr sz="825" b="0">
+                <a:solidFill>
+                  <a:srgbClr val="334155"/>
+                </a:solidFill>
+                <a:latin typeface="Aptos"/>
+                <a:ea typeface="Aptos"/>
+                <a:cs typeface="Aptos"/>
+              </a:defRPr>
+            </a:pPr>
+            <a:r>
+              <a:rPr sz="825" b="0">
+                <a:solidFill>
+                  <a:srgbClr val="334155"/>
+                </a:solidFill>
+                <a:latin typeface="Aptos"/>
+                <a:ea typeface="Aptos"/>
+                <a:cs typeface="Aptos"/>
+              </a:rPr>
+              <a:t>WPF에서 장비 도식, 인터락, 램프, 운전 버튼, 관리자 기능을 통합해 실제 HMI 형태를 구성</a:t>
+            </a:r>
+          </a:p>
+        </p:txBody>
+      </p:sp>
+      <p:sp>
+        <p:nvSpPr>
+          <p:cNvPr id="11" name="">
+            <a:extLst xmlns:a="http://schemas.openxmlformats.org/drawingml/2006/main">
+              <a:ext uri="{FF2B5EF4-FFF2-40B4-BE49-F238E27FC236}">
+                <a16:creationId xmlns:a16="http://schemas.microsoft.com/office/drawing/2014/main" id="{4AA08AE9-EA87-4973-A74A-E9BBD611FEB6}"/>
+              </a:ext>
+            </a:extLst>
+          </p:cNvPr>
+          <p:cNvSpPr>
+            <a:spLocks xmlns:a="http://schemas.openxmlformats.org/drawingml/2006/main" noGrp="1"/>
+          </p:cNvSpPr>
+          <p:nvPr/>
+        </p:nvSpPr>
+        <p:spPr>
+          <a:xfrm xmlns:a="http://schemas.openxmlformats.org/drawingml/2006/main">
+            <a:off x="4476750" y="3028950"/>
+            <a:ext cx="3238500" cy="1285875"/>
+          </a:xfrm>
+          <a:prstGeom xmlns:a="http://schemas.openxmlformats.org/drawingml/2006/main" prst="rect">
+            <a:avLst/>
+          </a:prstGeom>
+          <a:solidFill xmlns:a="http://schemas.openxmlformats.org/drawingml/2006/main">
+            <a:srgbClr val="F8FAFC"/>
+          </a:solidFill>
+          <a:ln xmlns:a="http://schemas.openxmlformats.org/drawingml/2006/main" w="9525">
+            <a:solidFill>
+              <a:srgbClr val="CBD5E1"/>
+            </a:solidFill>
+            <a:prstDash val="solid"/>
+          </a:ln>
+        </p:spPr>
+      </p:sp>
+      <p:sp>
+        <p:nvSpPr>
+          <p:cNvPr id="12" name="">
+            <a:extLst xmlns:a="http://schemas.openxmlformats.org/drawingml/2006/main">
+              <a:ext uri="{FF2B5EF4-FFF2-40B4-BE49-F238E27FC236}">
+                <a16:creationId xmlns:a16="http://schemas.microsoft.com/office/drawing/2014/main" id="{C29ACFB2-92C4-4687-BEF5-FAA7AA500FFC}"/>
+              </a:ext>
+            </a:extLst>
+          </p:cNvPr>
+          <p:cNvSpPr>
+            <a:spLocks xmlns:a="http://schemas.openxmlformats.org/drawingml/2006/main" noGrp="1"/>
+          </p:cNvSpPr>
+          <p:nvPr/>
+        </p:nvSpPr>
+        <p:spPr>
+          <a:xfrm xmlns:a="http://schemas.openxmlformats.org/drawingml/2006/main">
+            <a:off x="4476750" y="3028950"/>
+            <a:ext cx="66675" cy="1285875"/>
+          </a:xfrm>
+          <a:prstGeom xmlns:a="http://schemas.openxmlformats.org/drawingml/2006/main" prst="rect">
+            <a:avLst/>
+          </a:prstGeom>
+          <a:solidFill xmlns:a="http://schemas.openxmlformats.org/drawingml/2006/main">
+            <a:srgbClr val="06B6D4"/>
+          </a:solidFill>
+          <a:ln xmlns:a="http://schemas.openxmlformats.org/drawingml/2006/main" w="0">
+            <a:solidFill>
+              <a:srgbClr val="000000">
+                <a:alpha val="0"/>
+              </a:srgbClr>
+            </a:solidFill>
+            <a:prstDash val="solid"/>
+          </a:ln>
+        </p:spPr>
+      </p:sp>
+      <p:sp>
+        <p:nvSpPr>
+          <p:cNvPr id="13" name="">
+            <a:extLst xmlns:a="http://schemas.openxmlformats.org/drawingml/2006/main">
+              <a:ext uri="{FF2B5EF4-FFF2-40B4-BE49-F238E27FC236}">
+                <a16:creationId xmlns:a16="http://schemas.microsoft.com/office/drawing/2014/main" id="{172714B3-82FA-408F-8293-AD5D447AD78D}"/>
+              </a:ext>
+            </a:extLst>
+          </p:cNvPr>
+          <p:cNvSpPr>
+            <a:spLocks xmlns:a="http://schemas.openxmlformats.org/drawingml/2006/main" noGrp="1"/>
+          </p:cNvSpPr>
+          <p:nvPr/>
+        </p:nvSpPr>
+        <p:spPr>
+          <a:xfrm xmlns:a="http://schemas.openxmlformats.org/drawingml/2006/main">
+            <a:off x="4705350" y="3238500"/>
+            <a:ext cx="2781300" cy="228600"/>
+          </a:xfrm>
+          <a:prstGeom xmlns:a="http://schemas.openxmlformats.org/drawingml/2006/main" prst="rect">
+            <a:avLst/>
+          </a:prstGeom>
+          <a:solidFill xmlns:a="http://schemas.openxmlformats.org/drawingml/2006/main">
+            <a:srgbClr val="000000">
+              <a:alpha val="0"/>
+            </a:srgbClr>
+          </a:solidFill>
+          <a:ln xmlns:a="http://schemas.openxmlformats.org/drawingml/2006/main" w="0">
+            <a:solidFill>
+              <a:srgbClr val="000000">
+                <a:alpha val="0"/>
+              </a:srgbClr>
+            </a:solidFill>
+            <a:prstDash val="solid"/>
+          </a:ln>
+        </p:spPr>
+        <p:txBody>
+          <a:bodyPr xmlns:a="http://schemas.openxmlformats.org/drawingml/2006/main" lIns="0" tIns="0" rIns="0" bIns="0" anchor="t"/>
+          <a:lstStyle xmlns:a="http://schemas.openxmlformats.org/drawingml/2006/main"/>
+          <a:p xmlns:a="http://schemas.openxmlformats.org/drawingml/2006/main">
+            <a:pPr algn="l">
+              <a:defRPr sz="1200" b="1">
+                <a:solidFill>
+                  <a:srgbClr val="111827"/>
+                </a:solidFill>
+                <a:latin typeface="Aptos"/>
+                <a:ea typeface="Aptos"/>
+                <a:cs typeface="Aptos"/>
+              </a:defRPr>
+            </a:pPr>
+            <a:r>
+              <a:rPr sz="1200" b="1">
+                <a:solidFill>
+                  <a:srgbClr val="111827"/>
+                </a:solidFill>
+                <a:latin typeface="Aptos"/>
+                <a:ea typeface="Aptos"/>
+                <a:cs typeface="Aptos"/>
+              </a:rPr>
+              <a:t>원격 관찰성 확보</a:t>
+            </a:r>
+          </a:p>
+        </p:txBody>
+      </p:sp>
+      <p:sp>
+        <p:nvSpPr>
+          <p:cNvPr id="14" name="">
+            <a:extLst xmlns:a="http://schemas.openxmlformats.org/drawingml/2006/main">
+              <a:ext uri="{FF2B5EF4-FFF2-40B4-BE49-F238E27FC236}">
+                <a16:creationId xmlns:a16="http://schemas.microsoft.com/office/drawing/2014/main" id="{A3FFB010-CE8D-4CA5-9CA0-2227E75C7221}"/>
+              </a:ext>
+            </a:extLst>
+          </p:cNvPr>
+          <p:cNvSpPr>
+            <a:spLocks xmlns:a="http://schemas.openxmlformats.org/drawingml/2006/main" noGrp="1"/>
+          </p:cNvSpPr>
+          <p:nvPr/>
+        </p:nvSpPr>
+        <p:spPr>
+          <a:xfrm xmlns:a="http://schemas.openxmlformats.org/drawingml/2006/main">
+            <a:off x="4705350" y="3562350"/>
+            <a:ext cx="2781300" cy="495300"/>
+          </a:xfrm>
+          <a:prstGeom xmlns:a="http://schemas.openxmlformats.org/drawingml/2006/main" prst="rect">
+            <a:avLst/>
+          </a:prstGeom>
+          <a:solidFill xmlns:a="http://schemas.openxmlformats.org/drawingml/2006/main">
+            <a:srgbClr val="000000">
+              <a:alpha val="0"/>
+            </a:srgbClr>
+          </a:solidFill>
+          <a:ln xmlns:a="http://schemas.openxmlformats.org/drawingml/2006/main" w="0">
+            <a:solidFill>
+              <a:srgbClr val="000000">
+                <a:alpha val="0"/>
+              </a:srgbClr>
+            </a:solidFill>
+            <a:prstDash val="solid"/>
+          </a:ln>
+        </p:spPr>
+        <p:txBody>
+          <a:bodyPr xmlns:a="http://schemas.openxmlformats.org/drawingml/2006/main" lIns="0" tIns="0" rIns="0" bIns="0" anchor="t"/>
+          <a:lstStyle xmlns:a="http://schemas.openxmlformats.org/drawingml/2006/main"/>
+          <a:p xmlns:a="http://schemas.openxmlformats.org/drawingml/2006/main">
+            <a:pPr algn="l">
+              <a:defRPr sz="825" b="0">
+                <a:solidFill>
+                  <a:srgbClr val="334155"/>
+                </a:solidFill>
+                <a:latin typeface="Aptos"/>
+                <a:ea typeface="Aptos"/>
+                <a:cs typeface="Aptos"/>
+              </a:defRPr>
+            </a:pPr>
+            <a:r>
+              <a:rPr sz="825" b="0">
+                <a:solidFill>
+                  <a:srgbClr val="334155"/>
+                </a:solidFill>
+                <a:latin typeface="Aptos"/>
+                <a:ea typeface="Aptos"/>
+                <a:cs typeface="Aptos"/>
+              </a:rPr>
+              <a:t>Flask 대시보드에서 센서, 이력, 이벤트, 모듈, 레시피, AI 상태를 조회 전용으로 분리</a:t>
+            </a:r>
+          </a:p>
+        </p:txBody>
+      </p:sp>
+      <p:sp>
+        <p:nvSpPr>
+          <p:cNvPr id="15" name="">
+            <a:extLst xmlns:a="http://schemas.openxmlformats.org/drawingml/2006/main">
+              <a:ext uri="{FF2B5EF4-FFF2-40B4-BE49-F238E27FC236}">
+                <a16:creationId xmlns:a16="http://schemas.microsoft.com/office/drawing/2014/main" id="{84C05EFA-8B7C-4D2E-BA3E-6A92448A6B09}"/>
+              </a:ext>
+            </a:extLst>
+          </p:cNvPr>
+          <p:cNvSpPr>
+            <a:spLocks xmlns:a="http://schemas.openxmlformats.org/drawingml/2006/main" noGrp="1"/>
+          </p:cNvSpPr>
+          <p:nvPr/>
+        </p:nvSpPr>
+        <p:spPr>
+          <a:xfrm xmlns:a="http://schemas.openxmlformats.org/drawingml/2006/main">
+            <a:off x="8172450" y="3028950"/>
+            <a:ext cx="3238500" cy="1285875"/>
+          </a:xfrm>
+          <a:prstGeom xmlns:a="http://schemas.openxmlformats.org/drawingml/2006/main" prst="rect">
+            <a:avLst/>
+          </a:prstGeom>
+          <a:solidFill xmlns:a="http://schemas.openxmlformats.org/drawingml/2006/main">
+            <a:srgbClr val="F8FAFC"/>
+          </a:solidFill>
+          <a:ln xmlns:a="http://schemas.openxmlformats.org/drawingml/2006/main" w="9525">
+            <a:solidFill>
+              <a:srgbClr val="CBD5E1"/>
+            </a:solidFill>
+            <a:prstDash val="solid"/>
+          </a:ln>
+        </p:spPr>
+      </p:sp>
+      <p:sp>
+        <p:nvSpPr>
+          <p:cNvPr id="16" name="">
+            <a:extLst xmlns:a="http://schemas.openxmlformats.org/drawingml/2006/main">
+              <a:ext uri="{FF2B5EF4-FFF2-40B4-BE49-F238E27FC236}">
+                <a16:creationId xmlns:a16="http://schemas.microsoft.com/office/drawing/2014/main" id="{78175BA3-3145-41C1-8B27-9361E57BBF42}"/>
+              </a:ext>
+            </a:extLst>
+          </p:cNvPr>
+          <p:cNvSpPr>
+            <a:spLocks xmlns:a="http://schemas.openxmlformats.org/drawingml/2006/main" noGrp="1"/>
+          </p:cNvSpPr>
+          <p:nvPr/>
+        </p:nvSpPr>
+        <p:spPr>
+          <a:xfrm xmlns:a="http://schemas.openxmlformats.org/drawingml/2006/main">
+            <a:off x="8172450" y="3028950"/>
+            <a:ext cx="66675" cy="1285875"/>
+          </a:xfrm>
+          <a:prstGeom xmlns:a="http://schemas.openxmlformats.org/drawingml/2006/main" prst="rect">
+            <a:avLst/>
+          </a:prstGeom>
+          <a:solidFill xmlns:a="http://schemas.openxmlformats.org/drawingml/2006/main">
+            <a:srgbClr val="16A34A"/>
+          </a:solidFill>
+          <a:ln xmlns:a="http://schemas.openxmlformats.org/drawingml/2006/main" w="0">
+            <a:solidFill>
+              <a:srgbClr val="000000">
+                <a:alpha val="0"/>
+              </a:srgbClr>
+            </a:solidFill>
+            <a:prstDash val="solid"/>
+          </a:ln>
+        </p:spPr>
+      </p:sp>
+      <p:sp>
+        <p:nvSpPr>
+          <p:cNvPr id="17" name="">
+            <a:extLst xmlns:a="http://schemas.openxmlformats.org/drawingml/2006/main">
+              <a:ext uri="{FF2B5EF4-FFF2-40B4-BE49-F238E27FC236}">
+                <a16:creationId xmlns:a16="http://schemas.microsoft.com/office/drawing/2014/main" id="{2BAC5782-81EF-44AB-909D-6CDCAAEE19EC}"/>
+              </a:ext>
+            </a:extLst>
+          </p:cNvPr>
+          <p:cNvSpPr>
+            <a:spLocks xmlns:a="http://schemas.openxmlformats.org/drawingml/2006/main" noGrp="1"/>
+          </p:cNvSpPr>
+          <p:nvPr/>
+        </p:nvSpPr>
+        <p:spPr>
+          <a:xfrm xmlns:a="http://schemas.openxmlformats.org/drawingml/2006/main">
+            <a:off x="8401050" y="3238500"/>
+            <a:ext cx="2781300" cy="228600"/>
+          </a:xfrm>
+          <a:prstGeom xmlns:a="http://schemas.openxmlformats.org/drawingml/2006/main" prst="rect">
+            <a:avLst/>
+          </a:prstGeom>
+          <a:solidFill xmlns:a="http://schemas.openxmlformats.org/drawingml/2006/main">
+            <a:srgbClr val="000000">
+              <a:alpha val="0"/>
+            </a:srgbClr>
+          </a:solidFill>
+          <a:ln xmlns:a="http://schemas.openxmlformats.org/drawingml/2006/main" w="0">
+            <a:solidFill>
+              <a:srgbClr val="000000">
+                <a:alpha val="0"/>
+              </a:srgbClr>
+            </a:solidFill>
+            <a:prstDash val="solid"/>
+          </a:ln>
+        </p:spPr>
+        <p:txBody>
+          <a:bodyPr xmlns:a="http://schemas.openxmlformats.org/drawingml/2006/main" lIns="0" tIns="0" rIns="0" bIns="0" anchor="t"/>
+          <a:lstStyle xmlns:a="http://schemas.openxmlformats.org/drawingml/2006/main"/>
+          <a:p xmlns:a="http://schemas.openxmlformats.org/drawingml/2006/main">
+            <a:pPr algn="l">
+              <a:defRPr sz="1200" b="1">
+                <a:solidFill>
+                  <a:srgbClr val="111827"/>
+                </a:solidFill>
+                <a:latin typeface="Aptos"/>
+                <a:ea typeface="Aptos"/>
+                <a:cs typeface="Aptos"/>
+              </a:defRPr>
+            </a:pPr>
+            <a:r>
+              <a:rPr sz="1200" b="1">
+                <a:solidFill>
+                  <a:srgbClr val="111827"/>
+                </a:solidFill>
+                <a:latin typeface="Aptos"/>
+                <a:ea typeface="Aptos"/>
+                <a:cs typeface="Aptos"/>
+              </a:rPr>
+              <a:t>AI 확장 기반 마련</a:t>
+            </a:r>
+          </a:p>
+        </p:txBody>
+      </p:sp>
+      <p:sp>
+        <p:nvSpPr>
+          <p:cNvPr id="18" name="">
+            <a:extLst xmlns:a="http://schemas.openxmlformats.org/drawingml/2006/main">
+              <a:ext uri="{FF2B5EF4-FFF2-40B4-BE49-F238E27FC236}">
+                <a16:creationId xmlns:a16="http://schemas.microsoft.com/office/drawing/2014/main" id="{C2D2E2E8-DAE2-4CBD-9703-BFC352DBBB72}"/>
+              </a:ext>
+            </a:extLst>
+          </p:cNvPr>
+          <p:cNvSpPr>
+            <a:spLocks xmlns:a="http://schemas.openxmlformats.org/drawingml/2006/main" noGrp="1"/>
+          </p:cNvSpPr>
+          <p:nvPr/>
+        </p:nvSpPr>
+        <p:spPr>
+          <a:xfrm xmlns:a="http://schemas.openxmlformats.org/drawingml/2006/main">
+            <a:off x="8401050" y="3562350"/>
+            <a:ext cx="2781300" cy="495300"/>
+          </a:xfrm>
+          <a:prstGeom xmlns:a="http://schemas.openxmlformats.org/drawingml/2006/main" prst="rect">
+            <a:avLst/>
+          </a:prstGeom>
+          <a:solidFill xmlns:a="http://schemas.openxmlformats.org/drawingml/2006/main">
+            <a:srgbClr val="000000">
+              <a:alpha val="0"/>
+            </a:srgbClr>
+          </a:solidFill>
+          <a:ln xmlns:a="http://schemas.openxmlformats.org/drawingml/2006/main" w="0">
+            <a:solidFill>
+              <a:srgbClr val="000000">
+                <a:alpha val="0"/>
+              </a:srgbClr>
+            </a:solidFill>
+            <a:prstDash val="solid"/>
+          </a:ln>
+        </p:spPr>
+        <p:txBody>
+          <a:bodyPr xmlns:a="http://schemas.openxmlformats.org/drawingml/2006/main" lIns="0" tIns="0" rIns="0" bIns="0" anchor="t"/>
+          <a:lstStyle xmlns:a="http://schemas.openxmlformats.org/drawingml/2006/main"/>
+          <a:p xmlns:a="http://schemas.openxmlformats.org/drawingml/2006/main">
+            <a:pPr algn="l">
+              <a:defRPr sz="825" b="0">
+                <a:solidFill>
+                  <a:srgbClr val="334155"/>
+                </a:solidFill>
+                <a:latin typeface="Aptos"/>
+                <a:ea typeface="Aptos"/>
+                <a:cs typeface="Aptos"/>
+              </a:defRPr>
+            </a:pPr>
+            <a:r>
+              <a:rPr sz="825" b="0">
+                <a:solidFill>
+                  <a:srgbClr val="334155"/>
+                </a:solidFill>
+                <a:latin typeface="Aptos"/>
+                <a:ea typeface="Aptos"/>
+                <a:cs typeface="Aptos"/>
+              </a:rPr>
+              <a:t>sklearn 모델과 규칙 fallback 구조를 준비해 실데이터 축적 후 재학습으로 확장 가능</a:t>
+            </a:r>
+          </a:p>
+        </p:txBody>
+      </p:sp>
+      <p:pic>
+        <p:nvPicPr>
+          <p:cNvPr id="19" name=""/>
+          <p:cNvPicPr>
+            <a:picLocks xmlns:a="http://schemas.openxmlformats.org/drawingml/2006/main" noChangeAspect="1"/>
+          </p:cNvPicPr>
+          <p:nvPr/>
+        </p:nvPicPr>
+        <p:blipFill>
+          <a:blip xmlns:r="http://schemas.openxmlformats.org/officeDocument/2006/relationships" xmlns:a="http://schemas.openxmlformats.org/drawingml/2006/main" r:embed="Rfe02566830564647"/>
+          <a:srcRect xmlns:a="http://schemas.openxmlformats.org/drawingml/2006/main" l="0" t="13797" r="0" b="13797"/>
+          <a:stretch xmlns:a="http://schemas.openxmlformats.org/drawingml/2006/main">
+            <a:fillRect l="0" t="0" r="0" b="0"/>
+          </a:stretch>
+        </p:blipFill>
+        <p:spPr>
+          <a:xfrm xmlns:a="http://schemas.openxmlformats.org/drawingml/2006/main">
+            <a:off x="876300" y="4781550"/>
+            <a:ext cx="3105150" cy="1104900"/>
+          </a:xfrm>
+          <a:prstGeom xmlns:a="http://schemas.openxmlformats.org/drawingml/2006/main" prst="rect">
+            <a:avLst/>
+          </a:prstGeom>
+        </p:spPr>
+      </p:pic>
+      <p:pic>
+        <p:nvPicPr>
+          <p:cNvPr id="20" name=""/>
+          <p:cNvPicPr>
+            <a:picLocks xmlns:a="http://schemas.openxmlformats.org/drawingml/2006/main" noChangeAspect="1"/>
+          </p:cNvPicPr>
+          <p:nvPr/>
+        </p:nvPicPr>
+        <p:blipFill>
+          <a:blip xmlns:r="http://schemas.openxmlformats.org/officeDocument/2006/relationships" xmlns:a="http://schemas.openxmlformats.org/drawingml/2006/main" r:embed="Rc33b2023d01e4cc6"/>
+          <a:srcRect xmlns:a="http://schemas.openxmlformats.org/drawingml/2006/main" l="0" t="21534" r="0" b="21534"/>
+          <a:stretch xmlns:a="http://schemas.openxmlformats.org/drawingml/2006/main">
+            <a:fillRect l="0" t="0" r="0" b="0"/>
+          </a:stretch>
+        </p:blipFill>
+        <p:spPr>
+          <a:xfrm xmlns:a="http://schemas.openxmlformats.org/drawingml/2006/main">
+            <a:off x="4552950" y="4781550"/>
+            <a:ext cx="3105150" cy="1104900"/>
+          </a:xfrm>
+          <a:prstGeom xmlns:a="http://schemas.openxmlformats.org/drawingml/2006/main" prst="rect">
+            <a:avLst/>
+          </a:prstGeom>
+        </p:spPr>
+      </p:pic>
+      <p:pic>
+        <p:nvPicPr>
+          <p:cNvPr id="21" name=""/>
+          <p:cNvPicPr>
+            <a:picLocks xmlns:a="http://schemas.openxmlformats.org/drawingml/2006/main" noChangeAspect="1"/>
+          </p:cNvPicPr>
+          <p:nvPr/>
+        </p:nvPicPr>
+        <p:blipFill>
+          <a:blip xmlns:r="http://schemas.openxmlformats.org/officeDocument/2006/relationships" xmlns:a="http://schemas.openxmlformats.org/drawingml/2006/main" r:embed="R39d388664022450d"/>
+          <a:srcRect xmlns:a="http://schemas.openxmlformats.org/drawingml/2006/main" l="0" t="21534" r="0" b="21534"/>
+          <a:stretch xmlns:a="http://schemas.openxmlformats.org/drawingml/2006/main">
+            <a:fillRect l="0" t="0" r="0" b="0"/>
+          </a:stretch>
+        </p:blipFill>
+        <p:spPr>
+          <a:xfrm xmlns:a="http://schemas.openxmlformats.org/drawingml/2006/main">
+            <a:off x="8248650" y="4781550"/>
+            <a:ext cx="3105150" cy="1104900"/>
+          </a:xfrm>
+          <a:prstGeom xmlns:a="http://schemas.openxmlformats.org/drawingml/2006/main" prst="rect">
+            <a:avLst/>
+          </a:prstGeom>
+        </p:spPr>
+      </p:pic>
+      <p:sp>
+        <p:nvSpPr>
+          <p:cNvPr id="22" name="">
+            <a:extLst xmlns:a="http://schemas.openxmlformats.org/drawingml/2006/main">
+              <a:ext uri="{FF2B5EF4-FFF2-40B4-BE49-F238E27FC236}">
+                <a16:creationId xmlns:a16="http://schemas.microsoft.com/office/drawing/2014/main" id="{F48FBCA6-E713-45EB-BB2B-554ADADB6204}"/>
+              </a:ext>
+            </a:extLst>
+          </p:cNvPr>
+          <p:cNvSpPr>
+            <a:spLocks xmlns:a="http://schemas.openxmlformats.org/drawingml/2006/main" noGrp="1"/>
+          </p:cNvSpPr>
+          <p:nvPr/>
+        </p:nvSpPr>
+        <p:spPr>
+          <a:xfrm xmlns:a="http://schemas.openxmlformats.org/drawingml/2006/main">
+            <a:off x="1047750" y="6115050"/>
+            <a:ext cx="9906000" cy="247650"/>
+          </a:xfrm>
+          <a:prstGeom xmlns:a="http://schemas.openxmlformats.org/drawingml/2006/main" prst="rect">
+            <a:avLst/>
+          </a:prstGeom>
+          <a:solidFill xmlns:a="http://schemas.openxmlformats.org/drawingml/2006/main">
+            <a:srgbClr val="000000">
+              <a:alpha val="0"/>
+            </a:srgbClr>
+          </a:solidFill>
+          <a:ln xmlns:a="http://schemas.openxmlformats.org/drawingml/2006/main" w="0">
+            <a:solidFill>
+              <a:srgbClr val="000000">
+                <a:alpha val="0"/>
+              </a:srgbClr>
+            </a:solidFill>
+            <a:prstDash val="solid"/>
+          </a:ln>
+        </p:spPr>
+        <p:txBody>
+          <a:bodyPr xmlns:a="http://schemas.openxmlformats.org/drawingml/2006/main" lIns="0" tIns="0" rIns="0" bIns="0" anchor="t"/>
+          <a:lstStyle xmlns:a="http://schemas.openxmlformats.org/drawingml/2006/main"/>
+          <a:p xmlns:a="http://schemas.openxmlformats.org/drawingml/2006/main">
+            <a:pPr algn="ctr">
+              <a:defRPr sz="1125" b="1">
+                <a:solidFill>
+                  <a:srgbClr val="1E293B"/>
+                </a:solidFill>
+                <a:latin typeface="Aptos"/>
+                <a:ea typeface="Aptos"/>
+                <a:cs typeface="Aptos"/>
+              </a:defRPr>
+            </a:pPr>
+            <a:r>
+              <a:rPr sz="1125" b="1">
+                <a:solidFill>
+                  <a:srgbClr val="1E293B"/>
+                </a:solidFill>
+                <a:latin typeface="Aptos"/>
+                <a:ea typeface="Aptos"/>
+                <a:cs typeface="Aptos"/>
+              </a:rPr>
+              <a:t>향후 보완: EtherCAT 현장 연결 검증, 실제 장비 데이터 기반 AI 재학습, 발표용 자동 시나리오 안정화</a:t>
+            </a:r>
+          </a:p>
+        </p:txBody>
+      </p:sp>
+      <p:sp>
+        <p:nvSpPr>
+          <p:cNvPr id="23" name="">
+            <a:extLst xmlns:a="http://schemas.openxmlformats.org/drawingml/2006/main">
+              <a:ext uri="{FF2B5EF4-FFF2-40B4-BE49-F238E27FC236}">
+                <a16:creationId xmlns:a16="http://schemas.microsoft.com/office/drawing/2014/main" id="{8EE1CAA8-1C6C-4110-BD9E-3C2BBCD78EDA}"/>
+              </a:ext>
+            </a:extLst>
+          </p:cNvPr>
+          <p:cNvSpPr>
+            <a:spLocks xmlns:a="http://schemas.openxmlformats.org/drawingml/2006/main" noGrp="1"/>
+          </p:cNvSpPr>
+          <p:nvPr/>
+        </p:nvSpPr>
+        <p:spPr>
+          <a:xfrm xmlns:a="http://schemas.openxmlformats.org/drawingml/2006/main">
+            <a:off x="533400" y="6572250"/>
+            <a:ext cx="7239000" cy="171450"/>
+          </a:xfrm>
+          <a:prstGeom xmlns:a="http://schemas.openxmlformats.org/drawingml/2006/main" prst="rect">
+            <a:avLst/>
+          </a:prstGeom>
+          <a:solidFill xmlns:a="http://schemas.openxmlformats.org/drawingml/2006/main">
+            <a:srgbClr val="000000">
+              <a:alpha val="0"/>
+            </a:srgbClr>
+          </a:solidFill>
+          <a:ln xmlns:a="http://schemas.openxmlformats.org/drawingml/2006/main" w="0">
+            <a:solidFill>
+              <a:srgbClr val="000000">
+                <a:alpha val="0"/>
+              </a:srgbClr>
+            </a:solidFill>
+            <a:prstDash val="solid"/>
+          </a:ln>
+        </p:spPr>
+        <p:txBody>
+          <a:bodyPr xmlns:a="http://schemas.openxmlformats.org/drawingml/2006/main" lIns="0" tIns="0" rIns="0" bIns="0" anchor="t"/>
+          <a:lstStyle xmlns:a="http://schemas.openxmlformats.org/drawingml/2006/main"/>
+          <a:p xmlns:a="http://schemas.openxmlformats.org/drawingml/2006/main">
+            <a:pPr algn="l">
+              <a:defRPr sz="675" b="0">
+                <a:solidFill>
+                  <a:srgbClr val="94A3B8"/>
+                </a:solidFill>
+                <a:latin typeface="Aptos"/>
+                <a:ea typeface="Aptos"/>
+                <a:cs typeface="Aptos"/>
+              </a:defRPr>
+            </a:pPr>
+            <a:r>
+              <a:rPr sz="675" b="0">
+                <a:solidFill>
+                  <a:srgbClr val="94A3B8"/>
+                </a:solidFill>
+                <a:latin typeface="Aptos"/>
+                <a:ea typeface="Aptos"/>
+                <a:cs typeface="Aptos"/>
+              </a:rPr>
+              <a:t>Etch Load Lock HMI 결과 보고서</a:t>
+            </a:r>
+          </a:p>
+        </p:txBody>
+      </p:sp>
+      <p:sp>
+        <p:nvSpPr>
+          <p:cNvPr id="24" name="">
+            <a:extLst xmlns:a="http://schemas.openxmlformats.org/drawingml/2006/main">
+              <a:ext uri="{FF2B5EF4-FFF2-40B4-BE49-F238E27FC236}">
+                <a16:creationId xmlns:a16="http://schemas.microsoft.com/office/drawing/2014/main" id="{1F8618DE-19C2-4E96-B9BB-E1C52FADE0F5}"/>
+              </a:ext>
+            </a:extLst>
+          </p:cNvPr>
+          <p:cNvSpPr>
+            <a:spLocks xmlns:a="http://schemas.openxmlformats.org/drawingml/2006/main" noGrp="1"/>
+          </p:cNvSpPr>
+          <p:nvPr/>
+        </p:nvSpPr>
+        <p:spPr>
+          <a:xfrm xmlns:a="http://schemas.openxmlformats.org/drawingml/2006/main">
+            <a:off x="11191875" y="6572250"/>
+            <a:ext cx="457200" cy="171450"/>
+          </a:xfrm>
+          <a:prstGeom xmlns:a="http://schemas.openxmlformats.org/drawingml/2006/main" prst="rect">
+            <a:avLst/>
+          </a:prstGeom>
+          <a:solidFill xmlns:a="http://schemas.openxmlformats.org/drawingml/2006/main">
+            <a:srgbClr val="000000">
+              <a:alpha val="0"/>
+            </a:srgbClr>
+          </a:solidFill>
+          <a:ln xmlns:a="http://schemas.openxmlformats.org/drawingml/2006/main" w="0">
+            <a:solidFill>
+              <a:srgbClr val="000000">
+                <a:alpha val="0"/>
+              </a:srgbClr>
+            </a:solidFill>
+            <a:prstDash val="solid"/>
+          </a:ln>
+        </p:spPr>
+        <p:txBody>
+          <a:bodyPr xmlns:a="http://schemas.openxmlformats.org/drawingml/2006/main" lIns="0" tIns="0" rIns="0" bIns="0" anchor="t"/>
+          <a:lstStyle xmlns:a="http://schemas.openxmlformats.org/drawingml/2006/main"/>
+          <a:p xmlns:a="http://schemas.openxmlformats.org/drawingml/2006/main">
+            <a:pPr algn="r">
+              <a:defRPr sz="675" b="0">
+                <a:solidFill>
+                  <a:srgbClr val="94A3B8"/>
+                </a:solidFill>
+                <a:latin typeface="Aptos"/>
+                <a:ea typeface="Aptos"/>
+                <a:cs typeface="Aptos"/>
+              </a:defRPr>
+            </a:pPr>
+            <a:r>
+              <a:rPr sz="675" b="0">
+                <a:solidFill>
+                  <a:srgbClr val="94A3B8"/>
+                </a:solidFill>
+                <a:latin typeface="Aptos"/>
+                <a:ea typeface="Aptos"/>
+                <a:cs typeface="Aptos"/>
+              </a:rPr>
+              <a:t>10</a:t>
+            </a:r>
+          </a:p>
+        </p:txBody>
+      </p:sp>
+    </p:spTree>
+    <p:extLst>
+      <p:ext uri="{BB962C8B-B14F-4D97-AF65-F5344CB8AC3E}">
+        <p14:creationId xmlns:p14="http://schemas.microsoft.com/office/powerpoint/2010/main" val="567868850"/>
       </p:ext>
     </p:extLst>
   </p:cSld>
@@ -2428,7 +3736,7 @@
           <p:cNvPr id="1" name="">
             <a:extLst xmlns:a="http://schemas.openxmlformats.org/drawingml/2006/main">
               <a:ext uri="{FF2B5EF4-FFF2-40B4-BE49-F238E27FC236}">
-                <a16:creationId xmlns:a16="http://schemas.microsoft.com/office/drawing/2014/main" id="{4675888B-A2BD-4342-ACD2-8C2E3BEDF03E}"/>
+                <a16:creationId xmlns:a16="http://schemas.microsoft.com/office/drawing/2014/main" id="{E5B70B54-D522-46D7-93F4-FC45A3914689}"/>
               </a:ext>
             </a:extLst>
           </p:cNvPr>
@@ -2463,7 +3771,7 @@
           <p:cNvPr id="2" name="">
             <a:extLst xmlns:a="http://schemas.openxmlformats.org/drawingml/2006/main">
               <a:ext uri="{FF2B5EF4-FFF2-40B4-BE49-F238E27FC236}">
-                <a16:creationId xmlns:a16="http://schemas.microsoft.com/office/drawing/2014/main" id="{BD06FB2B-7252-47C1-8BF4-C9ECDC22DAA2}"/>
+                <a16:creationId xmlns:a16="http://schemas.microsoft.com/office/drawing/2014/main" id="{4425882B-F742-4412-87F4-5F03F429672E}"/>
               </a:ext>
             </a:extLst>
           </p:cNvPr>
@@ -2527,7 +3835,7 @@
           <p:cNvPr id="3" name="">
             <a:extLst xmlns:a="http://schemas.openxmlformats.org/drawingml/2006/main">
               <a:ext uri="{FF2B5EF4-FFF2-40B4-BE49-F238E27FC236}">
-                <a16:creationId xmlns:a16="http://schemas.microsoft.com/office/drawing/2014/main" id="{5D3A220C-39A1-457F-BDF3-55DFD2B33A10}"/>
+                <a16:creationId xmlns:a16="http://schemas.microsoft.com/office/drawing/2014/main" id="{9BCE2100-B830-4206-BEE8-F40C6A4CEAFC}"/>
               </a:ext>
             </a:extLst>
           </p:cNvPr>
@@ -2591,7 +3899,7 @@
           <p:cNvPr id="4" name="">
             <a:extLst xmlns:a="http://schemas.openxmlformats.org/drawingml/2006/main">
               <a:ext uri="{FF2B5EF4-FFF2-40B4-BE49-F238E27FC236}">
-                <a16:creationId xmlns:a16="http://schemas.microsoft.com/office/drawing/2014/main" id="{35A929C0-A0DF-421C-88DD-59575DB4DCEA}"/>
+                <a16:creationId xmlns:a16="http://schemas.microsoft.com/office/drawing/2014/main" id="{F19334E5-5A18-4800-A9F7-27683155F2F2}"/>
               </a:ext>
             </a:extLst>
           </p:cNvPr>
@@ -2626,7 +3934,7 @@
           <p:cNvPr id="5" name="">
             <a:extLst xmlns:a="http://schemas.openxmlformats.org/drawingml/2006/main">
               <a:ext uri="{FF2B5EF4-FFF2-40B4-BE49-F238E27FC236}">
-                <a16:creationId xmlns:a16="http://schemas.microsoft.com/office/drawing/2014/main" id="{4BCE3B0E-2F29-48A1-83AE-8A43F17495CA}"/>
+                <a16:creationId xmlns:a16="http://schemas.microsoft.com/office/drawing/2014/main" id="{B1EEE696-B31C-47F0-82A7-666039EC7CFA}"/>
               </a:ext>
             </a:extLst>
           </p:cNvPr>
@@ -2659,7 +3967,7 @@
           <p:cNvPr id="6" name="">
             <a:extLst xmlns:a="http://schemas.openxmlformats.org/drawingml/2006/main">
               <a:ext uri="{FF2B5EF4-FFF2-40B4-BE49-F238E27FC236}">
-                <a16:creationId xmlns:a16="http://schemas.microsoft.com/office/drawing/2014/main" id="{940EA01E-6DD2-41F3-B577-755EDAD4EA08}"/>
+                <a16:creationId xmlns:a16="http://schemas.microsoft.com/office/drawing/2014/main" id="{F96D23BA-7F29-4292-98D8-DF647083FD99}"/>
               </a:ext>
             </a:extLst>
           </p:cNvPr>
@@ -2694,7 +4002,7 @@
           <p:cNvPr id="7" name="">
             <a:extLst xmlns:a="http://schemas.openxmlformats.org/drawingml/2006/main">
               <a:ext uri="{FF2B5EF4-FFF2-40B4-BE49-F238E27FC236}">
-                <a16:creationId xmlns:a16="http://schemas.microsoft.com/office/drawing/2014/main" id="{FC0ED9EB-159B-49BE-AC7D-7CD8E5E76E8C}"/>
+                <a16:creationId xmlns:a16="http://schemas.microsoft.com/office/drawing/2014/main" id="{14D5F308-8EF5-4B88-97A0-6409B37E7E66}"/>
               </a:ext>
             </a:extLst>
           </p:cNvPr>
@@ -2758,7 +4066,7 @@
           <p:cNvPr id="8" name="">
             <a:extLst xmlns:a="http://schemas.openxmlformats.org/drawingml/2006/main">
               <a:ext uri="{FF2B5EF4-FFF2-40B4-BE49-F238E27FC236}">
-                <a16:creationId xmlns:a16="http://schemas.microsoft.com/office/drawing/2014/main" id="{E5D08369-46C9-4FB6-9B0B-C121CCBA8C61}"/>
+                <a16:creationId xmlns:a16="http://schemas.microsoft.com/office/drawing/2014/main" id="{6221D6EE-CA22-4179-9FCF-4294CB719966}"/>
               </a:ext>
             </a:extLst>
           </p:cNvPr>
@@ -2822,7 +4130,7 @@
           <p:cNvPr id="9" name="">
             <a:extLst xmlns:a="http://schemas.openxmlformats.org/drawingml/2006/main">
               <a:ext uri="{FF2B5EF4-FFF2-40B4-BE49-F238E27FC236}">
-                <a16:creationId xmlns:a16="http://schemas.microsoft.com/office/drawing/2014/main" id="{20CB494E-2863-459D-85D9-41699D6B6C28}"/>
+                <a16:creationId xmlns:a16="http://schemas.microsoft.com/office/drawing/2014/main" id="{E8270327-2915-4A6C-9AA6-10B1F893B561}"/>
               </a:ext>
             </a:extLst>
           </p:cNvPr>
@@ -2855,7 +4163,7 @@
           <p:cNvPr id="10" name="">
             <a:extLst xmlns:a="http://schemas.openxmlformats.org/drawingml/2006/main">
               <a:ext uri="{FF2B5EF4-FFF2-40B4-BE49-F238E27FC236}">
-                <a16:creationId xmlns:a16="http://schemas.microsoft.com/office/drawing/2014/main" id="{A0ACA8E8-CA53-4734-92AF-F95EBA224635}"/>
+                <a16:creationId xmlns:a16="http://schemas.microsoft.com/office/drawing/2014/main" id="{C7BEE7E2-490F-4C5A-96DB-022F7F4A6517}"/>
               </a:ext>
             </a:extLst>
           </p:cNvPr>
@@ -2890,7 +4198,7 @@
           <p:cNvPr id="11" name="">
             <a:extLst xmlns:a="http://schemas.openxmlformats.org/drawingml/2006/main">
               <a:ext uri="{FF2B5EF4-FFF2-40B4-BE49-F238E27FC236}">
-                <a16:creationId xmlns:a16="http://schemas.microsoft.com/office/drawing/2014/main" id="{07A0525E-39EC-4ACC-B61D-E2026589EA81}"/>
+                <a16:creationId xmlns:a16="http://schemas.microsoft.com/office/drawing/2014/main" id="{B8BFE273-606F-4ED6-B8E6-AA676ECB39D7}"/>
               </a:ext>
             </a:extLst>
           </p:cNvPr>
@@ -2954,7 +4262,7 @@
           <p:cNvPr id="12" name="">
             <a:extLst xmlns:a="http://schemas.openxmlformats.org/drawingml/2006/main">
               <a:ext uri="{FF2B5EF4-FFF2-40B4-BE49-F238E27FC236}">
-                <a16:creationId xmlns:a16="http://schemas.microsoft.com/office/drawing/2014/main" id="{B71079BD-D902-41F7-AF5E-39570725519B}"/>
+                <a16:creationId xmlns:a16="http://schemas.microsoft.com/office/drawing/2014/main" id="{8E4A9FF5-50AE-40FB-9204-C5849919AFF6}"/>
               </a:ext>
             </a:extLst>
           </p:cNvPr>
@@ -3018,7 +4326,7 @@
           <p:cNvPr id="13" name="">
             <a:extLst xmlns:a="http://schemas.openxmlformats.org/drawingml/2006/main">
               <a:ext uri="{FF2B5EF4-FFF2-40B4-BE49-F238E27FC236}">
-                <a16:creationId xmlns:a16="http://schemas.microsoft.com/office/drawing/2014/main" id="{7F436E4B-DC4B-4D79-8840-DD0493D53A7D}"/>
+                <a16:creationId xmlns:a16="http://schemas.microsoft.com/office/drawing/2014/main" id="{03388D1C-4F07-4145-A16E-B11F0BF10B05}"/>
               </a:ext>
             </a:extLst>
           </p:cNvPr>
@@ -3051,7 +4359,7 @@
           <p:cNvPr id="14" name="">
             <a:extLst xmlns:a="http://schemas.openxmlformats.org/drawingml/2006/main">
               <a:ext uri="{FF2B5EF4-FFF2-40B4-BE49-F238E27FC236}">
-                <a16:creationId xmlns:a16="http://schemas.microsoft.com/office/drawing/2014/main" id="{21CCDD80-5E50-4896-BD72-98BACD92040E}"/>
+                <a16:creationId xmlns:a16="http://schemas.microsoft.com/office/drawing/2014/main" id="{DFFB495C-E64D-4859-A660-4C5C45DACD06}"/>
               </a:ext>
             </a:extLst>
           </p:cNvPr>
@@ -3086,7 +4394,7 @@
           <p:cNvPr id="15" name="">
             <a:extLst xmlns:a="http://schemas.openxmlformats.org/drawingml/2006/main">
               <a:ext uri="{FF2B5EF4-FFF2-40B4-BE49-F238E27FC236}">
-                <a16:creationId xmlns:a16="http://schemas.microsoft.com/office/drawing/2014/main" id="{8FF50322-E569-4A27-A78F-3E390FF903E4}"/>
+                <a16:creationId xmlns:a16="http://schemas.microsoft.com/office/drawing/2014/main" id="{1A3AA196-BB77-4A60-842C-25448FC20B58}"/>
               </a:ext>
             </a:extLst>
           </p:cNvPr>
@@ -3150,7 +4458,7 @@
           <p:cNvPr id="16" name="">
             <a:extLst xmlns:a="http://schemas.openxmlformats.org/drawingml/2006/main">
               <a:ext uri="{FF2B5EF4-FFF2-40B4-BE49-F238E27FC236}">
-                <a16:creationId xmlns:a16="http://schemas.microsoft.com/office/drawing/2014/main" id="{A3E7C498-3894-4798-8FD9-52EBCE3BE3AD}"/>
+                <a16:creationId xmlns:a16="http://schemas.microsoft.com/office/drawing/2014/main" id="{C7C12B5A-F986-497A-A95C-AEB223B63741}"/>
               </a:ext>
             </a:extLst>
           </p:cNvPr>
@@ -3214,7 +4522,7 @@
           <p:cNvPr id="17" name="">
             <a:extLst xmlns:a="http://schemas.openxmlformats.org/drawingml/2006/main">
               <a:ext uri="{FF2B5EF4-FFF2-40B4-BE49-F238E27FC236}">
-                <a16:creationId xmlns:a16="http://schemas.microsoft.com/office/drawing/2014/main" id="{75DC4866-3533-4C3A-81A5-55D4171AEC87}"/>
+                <a16:creationId xmlns:a16="http://schemas.microsoft.com/office/drawing/2014/main" id="{4571BF31-58E5-4B5E-8296-7B4F085200DE}"/>
               </a:ext>
             </a:extLst>
           </p:cNvPr>
@@ -3278,7 +4586,7 @@
           <p:cNvPr id="18" name="">
             <a:extLst xmlns:a="http://schemas.openxmlformats.org/drawingml/2006/main">
               <a:ext uri="{FF2B5EF4-FFF2-40B4-BE49-F238E27FC236}">
-                <a16:creationId xmlns:a16="http://schemas.microsoft.com/office/drawing/2014/main" id="{83EF2364-379F-425D-9F31-FCB55825EE6B}"/>
+                <a16:creationId xmlns:a16="http://schemas.microsoft.com/office/drawing/2014/main" id="{30352BED-3E0C-4B49-8B5D-DE291063F90F}"/>
               </a:ext>
             </a:extLst>
           </p:cNvPr>
@@ -3313,7 +4621,7 @@
           <p:cNvPr id="19" name="">
             <a:extLst xmlns:a="http://schemas.openxmlformats.org/drawingml/2006/main">
               <a:ext uri="{FF2B5EF4-FFF2-40B4-BE49-F238E27FC236}">
-                <a16:creationId xmlns:a16="http://schemas.microsoft.com/office/drawing/2014/main" id="{8246E1BB-3FAF-476D-BEC2-6AA723610965}"/>
+                <a16:creationId xmlns:a16="http://schemas.microsoft.com/office/drawing/2014/main" id="{8D1583F2-6F0A-41E3-B6E5-05291C406294}"/>
               </a:ext>
             </a:extLst>
           </p:cNvPr>
@@ -3377,7 +4685,7 @@
           <p:cNvPr id="20" name="">
             <a:extLst xmlns:a="http://schemas.openxmlformats.org/drawingml/2006/main">
               <a:ext uri="{FF2B5EF4-FFF2-40B4-BE49-F238E27FC236}">
-                <a16:creationId xmlns:a16="http://schemas.microsoft.com/office/drawing/2014/main" id="{FCAFED77-7AEF-4B10-BA99-5C4A45D3F291}"/>
+                <a16:creationId xmlns:a16="http://schemas.microsoft.com/office/drawing/2014/main" id="{A68E7FA3-2A40-4435-BF8C-398577B2982B}"/>
               </a:ext>
             </a:extLst>
           </p:cNvPr>
@@ -3412,7 +4720,7 @@
           <p:cNvPr id="21" name="">
             <a:extLst xmlns:a="http://schemas.openxmlformats.org/drawingml/2006/main">
               <a:ext uri="{FF2B5EF4-FFF2-40B4-BE49-F238E27FC236}">
-                <a16:creationId xmlns:a16="http://schemas.microsoft.com/office/drawing/2014/main" id="{671D0AA1-4119-4D76-91D3-CCEDE51B3BA6}"/>
+                <a16:creationId xmlns:a16="http://schemas.microsoft.com/office/drawing/2014/main" id="{D78FFF12-5995-4D42-A560-CC6E58CF43D7}"/>
               </a:ext>
             </a:extLst>
           </p:cNvPr>
@@ -3476,7 +4784,7 @@
           <p:cNvPr id="22" name="">
             <a:extLst xmlns:a="http://schemas.openxmlformats.org/drawingml/2006/main">
               <a:ext uri="{FF2B5EF4-FFF2-40B4-BE49-F238E27FC236}">
-                <a16:creationId xmlns:a16="http://schemas.microsoft.com/office/drawing/2014/main" id="{7FFF3ADD-2BC7-4B9B-B3FA-5E8E6DB910CD}"/>
+                <a16:creationId xmlns:a16="http://schemas.microsoft.com/office/drawing/2014/main" id="{A15147CE-043A-4C1C-BF87-13CC5D1903BA}"/>
               </a:ext>
             </a:extLst>
           </p:cNvPr>
@@ -3511,7 +4819,7 @@
           <p:cNvPr id="23" name="">
             <a:extLst xmlns:a="http://schemas.openxmlformats.org/drawingml/2006/main">
               <a:ext uri="{FF2B5EF4-FFF2-40B4-BE49-F238E27FC236}">
-                <a16:creationId xmlns:a16="http://schemas.microsoft.com/office/drawing/2014/main" id="{13B78ED4-C816-4CA8-BC9D-4BF493198EAD}"/>
+                <a16:creationId xmlns:a16="http://schemas.microsoft.com/office/drawing/2014/main" id="{45436EEC-6C9D-48D9-9CDC-BB013292AF6E}"/>
               </a:ext>
             </a:extLst>
           </p:cNvPr>
@@ -3575,7 +4883,7 @@
           <p:cNvPr id="24" name="">
             <a:extLst xmlns:a="http://schemas.openxmlformats.org/drawingml/2006/main">
               <a:ext uri="{FF2B5EF4-FFF2-40B4-BE49-F238E27FC236}">
-                <a16:creationId xmlns:a16="http://schemas.microsoft.com/office/drawing/2014/main" id="{D0FC4172-4FC5-489A-8536-AAC2B87F6B49}"/>
+                <a16:creationId xmlns:a16="http://schemas.microsoft.com/office/drawing/2014/main" id="{F35A4C26-B4F2-4755-B574-581E58A73198}"/>
               </a:ext>
             </a:extLst>
           </p:cNvPr>
@@ -3610,7 +4918,7 @@
           <p:cNvPr id="25" name="">
             <a:extLst xmlns:a="http://schemas.openxmlformats.org/drawingml/2006/main">
               <a:ext uri="{FF2B5EF4-FFF2-40B4-BE49-F238E27FC236}">
-                <a16:creationId xmlns:a16="http://schemas.microsoft.com/office/drawing/2014/main" id="{A2E4759C-3537-4EEF-9B6D-6742C616BBB2}"/>
+                <a16:creationId xmlns:a16="http://schemas.microsoft.com/office/drawing/2014/main" id="{1A5649B1-E777-4FA8-8A72-0177765529DB}"/>
               </a:ext>
             </a:extLst>
           </p:cNvPr>
@@ -3674,7 +4982,7 @@
           <p:cNvPr id="26" name="">
             <a:extLst xmlns:a="http://schemas.openxmlformats.org/drawingml/2006/main">
               <a:ext uri="{FF2B5EF4-FFF2-40B4-BE49-F238E27FC236}">
-                <a16:creationId xmlns:a16="http://schemas.microsoft.com/office/drawing/2014/main" id="{3796E05B-EE90-439D-95BD-6854C71549F3}"/>
+                <a16:creationId xmlns:a16="http://schemas.microsoft.com/office/drawing/2014/main" id="{E95D434F-9EFE-485B-9041-5F9A480DC4E3}"/>
               </a:ext>
             </a:extLst>
           </p:cNvPr>
@@ -3709,7 +5017,7 @@
           <p:cNvPr id="27" name="">
             <a:extLst xmlns:a="http://schemas.openxmlformats.org/drawingml/2006/main">
               <a:ext uri="{FF2B5EF4-FFF2-40B4-BE49-F238E27FC236}">
-                <a16:creationId xmlns:a16="http://schemas.microsoft.com/office/drawing/2014/main" id="{BD85051D-E9DA-4C1A-AD84-06B4061C6B33}"/>
+                <a16:creationId xmlns:a16="http://schemas.microsoft.com/office/drawing/2014/main" id="{30AADE3D-04A9-4A18-BDE6-235F54C1CB3A}"/>
               </a:ext>
             </a:extLst>
           </p:cNvPr>
@@ -3773,7 +5081,7 @@
           <p:cNvPr id="28" name="">
             <a:extLst xmlns:a="http://schemas.openxmlformats.org/drawingml/2006/main">
               <a:ext uri="{FF2B5EF4-FFF2-40B4-BE49-F238E27FC236}">
-                <a16:creationId xmlns:a16="http://schemas.microsoft.com/office/drawing/2014/main" id="{ECB2CC7A-BFA9-4281-83F2-5E420FE7438F}"/>
+                <a16:creationId xmlns:a16="http://schemas.microsoft.com/office/drawing/2014/main" id="{65D46D90-3FD1-474E-A1A4-ABD726DE9D36}"/>
               </a:ext>
             </a:extLst>
           </p:cNvPr>
@@ -3806,7 +5114,7 @@
           <p:cNvPr id="29" name="">
             <a:extLst xmlns:a="http://schemas.openxmlformats.org/drawingml/2006/main">
               <a:ext uri="{FF2B5EF4-FFF2-40B4-BE49-F238E27FC236}">
-                <a16:creationId xmlns:a16="http://schemas.microsoft.com/office/drawing/2014/main" id="{A7834BA1-A907-4000-840C-BC980E06C737}"/>
+                <a16:creationId xmlns:a16="http://schemas.microsoft.com/office/drawing/2014/main" id="{7EB18EE1-CF7E-4DE4-B9A9-3F0BFAC1A2DC}"/>
               </a:ext>
             </a:extLst>
           </p:cNvPr>
@@ -3870,7 +5178,7 @@
           <p:cNvPr id="30" name="">
             <a:extLst xmlns:a="http://schemas.openxmlformats.org/drawingml/2006/main">
               <a:ext uri="{FF2B5EF4-FFF2-40B4-BE49-F238E27FC236}">
-                <a16:creationId xmlns:a16="http://schemas.microsoft.com/office/drawing/2014/main" id="{9E45DEC1-47D6-4933-9683-2BA53E349726}"/>
+                <a16:creationId xmlns:a16="http://schemas.microsoft.com/office/drawing/2014/main" id="{ECED2E6A-34FB-474D-A317-D19E53996C04}"/>
               </a:ext>
             </a:extLst>
           </p:cNvPr>
@@ -3905,7 +5213,7 @@
           <p:cNvPr id="31" name="">
             <a:extLst xmlns:a="http://schemas.openxmlformats.org/drawingml/2006/main">
               <a:ext uri="{FF2B5EF4-FFF2-40B4-BE49-F238E27FC236}">
-                <a16:creationId xmlns:a16="http://schemas.microsoft.com/office/drawing/2014/main" id="{01B4A33B-3685-42E6-BDDC-A08CDD72343B}"/>
+                <a16:creationId xmlns:a16="http://schemas.microsoft.com/office/drawing/2014/main" id="{5C36DFAA-D7F8-4AD9-B3BC-03A5385734B5}"/>
               </a:ext>
             </a:extLst>
           </p:cNvPr>
@@ -3969,7 +5277,7 @@
           <p:cNvPr id="32" name="">
             <a:extLst xmlns:a="http://schemas.openxmlformats.org/drawingml/2006/main">
               <a:ext uri="{FF2B5EF4-FFF2-40B4-BE49-F238E27FC236}">
-                <a16:creationId xmlns:a16="http://schemas.microsoft.com/office/drawing/2014/main" id="{1F3805CE-F765-4D95-B8C3-B1E14CF45995}"/>
+                <a16:creationId xmlns:a16="http://schemas.microsoft.com/office/drawing/2014/main" id="{3B3F3088-48CD-45EE-AFC5-5BEF6A0A46ED}"/>
               </a:ext>
             </a:extLst>
           </p:cNvPr>
@@ -4004,7 +5312,7 @@
           <p:cNvPr id="33" name="">
             <a:extLst xmlns:a="http://schemas.openxmlformats.org/drawingml/2006/main">
               <a:ext uri="{FF2B5EF4-FFF2-40B4-BE49-F238E27FC236}">
-                <a16:creationId xmlns:a16="http://schemas.microsoft.com/office/drawing/2014/main" id="{B96AA499-4CAE-49E7-B9EE-1558F170D028}"/>
+                <a16:creationId xmlns:a16="http://schemas.microsoft.com/office/drawing/2014/main" id="{247380FE-C904-4CFA-B3AF-ABF505106819}"/>
               </a:ext>
             </a:extLst>
           </p:cNvPr>
@@ -4068,7 +5376,7 @@
           <p:cNvPr id="34" name="">
             <a:extLst xmlns:a="http://schemas.openxmlformats.org/drawingml/2006/main">
               <a:ext uri="{FF2B5EF4-FFF2-40B4-BE49-F238E27FC236}">
-                <a16:creationId xmlns:a16="http://schemas.microsoft.com/office/drawing/2014/main" id="{78969A0D-A377-4D40-9298-C541CF41A291}"/>
+                <a16:creationId xmlns:a16="http://schemas.microsoft.com/office/drawing/2014/main" id="{70A82CAF-C4C4-483E-9DB1-6F74B872D709}"/>
               </a:ext>
             </a:extLst>
           </p:cNvPr>
@@ -4103,7 +5411,7 @@
           <p:cNvPr id="35" name="">
             <a:extLst xmlns:a="http://schemas.openxmlformats.org/drawingml/2006/main">
               <a:ext uri="{FF2B5EF4-FFF2-40B4-BE49-F238E27FC236}">
-                <a16:creationId xmlns:a16="http://schemas.microsoft.com/office/drawing/2014/main" id="{F4F39956-8647-488F-BBD8-BDFF42739864}"/>
+                <a16:creationId xmlns:a16="http://schemas.microsoft.com/office/drawing/2014/main" id="{7A355E0B-6B5A-45FC-AB00-1D1E3B238158}"/>
               </a:ext>
             </a:extLst>
           </p:cNvPr>
@@ -4167,7 +5475,7 @@
           <p:cNvPr id="36" name="">
             <a:extLst xmlns:a="http://schemas.openxmlformats.org/drawingml/2006/main">
               <a:ext uri="{FF2B5EF4-FFF2-40B4-BE49-F238E27FC236}">
-                <a16:creationId xmlns:a16="http://schemas.microsoft.com/office/drawing/2014/main" id="{B7645551-8C6C-4ED8-A733-C4F731B94DB7}"/>
+                <a16:creationId xmlns:a16="http://schemas.microsoft.com/office/drawing/2014/main" id="{939E3715-0B1D-44C9-B862-0C99742E7D9B}"/>
               </a:ext>
             </a:extLst>
           </p:cNvPr>
@@ -4202,7 +5510,7 @@
           <p:cNvPr id="37" name="">
             <a:extLst xmlns:a="http://schemas.openxmlformats.org/drawingml/2006/main">
               <a:ext uri="{FF2B5EF4-FFF2-40B4-BE49-F238E27FC236}">
-                <a16:creationId xmlns:a16="http://schemas.microsoft.com/office/drawing/2014/main" id="{43E6E5B3-DF35-417C-B3EC-12A00DD927A6}"/>
+                <a16:creationId xmlns:a16="http://schemas.microsoft.com/office/drawing/2014/main" id="{E62B3026-1B3F-4FFD-B6E3-0A6FFB837974}"/>
               </a:ext>
             </a:extLst>
           </p:cNvPr>
@@ -4266,7 +5574,7 @@
           <p:cNvPr id="38" name="">
             <a:extLst xmlns:a="http://schemas.openxmlformats.org/drawingml/2006/main">
               <a:ext uri="{FF2B5EF4-FFF2-40B4-BE49-F238E27FC236}">
-                <a16:creationId xmlns:a16="http://schemas.microsoft.com/office/drawing/2014/main" id="{F4C5E821-7F2B-43C1-A9A9-3907ACDBEE31}"/>
+                <a16:creationId xmlns:a16="http://schemas.microsoft.com/office/drawing/2014/main" id="{83BD7187-4EE9-4C64-9ECB-B8BE7D601C94}"/>
               </a:ext>
             </a:extLst>
           </p:cNvPr>
@@ -4330,7 +5638,7 @@
           <p:cNvPr id="39" name="">
             <a:extLst xmlns:a="http://schemas.openxmlformats.org/drawingml/2006/main">
               <a:ext uri="{FF2B5EF4-FFF2-40B4-BE49-F238E27FC236}">
-                <a16:creationId xmlns:a16="http://schemas.microsoft.com/office/drawing/2014/main" id="{BF32FAD5-C733-4B73-9F20-FC956617C611}"/>
+                <a16:creationId xmlns:a16="http://schemas.microsoft.com/office/drawing/2014/main" id="{5EA3C32E-485A-4890-B2D1-F3CC75AD4B81}"/>
               </a:ext>
             </a:extLst>
           </p:cNvPr>
@@ -4392,7 +5700,7 @@
     </p:spTree>
     <p:extLst>
       <p:ext uri="{BB962C8B-B14F-4D97-AF65-F5344CB8AC3E}">
-        <p14:creationId xmlns:p14="http://schemas.microsoft.com/office/powerpoint/2010/main" val="803580499"/>
+        <p14:creationId xmlns:p14="http://schemas.microsoft.com/office/powerpoint/2010/main" val="415868757"/>
       </p:ext>
     </p:extLst>
   </p:cSld>
@@ -4416,7 +5724,7 @@
           <p:cNvPr id="1" name="">
             <a:extLst xmlns:a="http://schemas.openxmlformats.org/drawingml/2006/main">
               <a:ext uri="{FF2B5EF4-FFF2-40B4-BE49-F238E27FC236}">
-                <a16:creationId xmlns:a16="http://schemas.microsoft.com/office/drawing/2014/main" id="{8CB923CE-8496-42C7-A090-C9865D55B3B1}"/>
+                <a16:creationId xmlns:a16="http://schemas.microsoft.com/office/drawing/2014/main" id="{3EB9F0CA-8A03-4FFF-BCD5-32DB4D2B371B}"/>
               </a:ext>
             </a:extLst>
           </p:cNvPr>
@@ -4451,7 +5759,7 @@
           <p:cNvPr id="2" name="">
             <a:extLst xmlns:a="http://schemas.openxmlformats.org/drawingml/2006/main">
               <a:ext uri="{FF2B5EF4-FFF2-40B4-BE49-F238E27FC236}">
-                <a16:creationId xmlns:a16="http://schemas.microsoft.com/office/drawing/2014/main" id="{0B7EA0F2-6533-4CC5-A6D3-7C92B787E059}"/>
+                <a16:creationId xmlns:a16="http://schemas.microsoft.com/office/drawing/2014/main" id="{42E0FE4A-EED4-4334-95B9-DD93A975EDF2}"/>
               </a:ext>
             </a:extLst>
           </p:cNvPr>
@@ -4515,7 +5823,7 @@
           <p:cNvPr id="3" name="">
             <a:extLst xmlns:a="http://schemas.openxmlformats.org/drawingml/2006/main">
               <a:ext uri="{FF2B5EF4-FFF2-40B4-BE49-F238E27FC236}">
-                <a16:creationId xmlns:a16="http://schemas.microsoft.com/office/drawing/2014/main" id="{C2AAD04D-1F65-40D7-B46B-5A2EDEBF8DFD}"/>
+                <a16:creationId xmlns:a16="http://schemas.microsoft.com/office/drawing/2014/main" id="{4BC2C7D0-7538-4212-A985-80862101BA6A}"/>
               </a:ext>
             </a:extLst>
           </p:cNvPr>
@@ -4579,7 +5887,7 @@
           <p:cNvPr id="4" name="">
             <a:extLst xmlns:a="http://schemas.openxmlformats.org/drawingml/2006/main">
               <a:ext uri="{FF2B5EF4-FFF2-40B4-BE49-F238E27FC236}">
-                <a16:creationId xmlns:a16="http://schemas.microsoft.com/office/drawing/2014/main" id="{95A99918-B123-4920-B955-3A6EA8EAA8FF}"/>
+                <a16:creationId xmlns:a16="http://schemas.microsoft.com/office/drawing/2014/main" id="{61782CDE-7936-42DC-8A4D-E5DDBF6C0FF8}"/>
               </a:ext>
             </a:extLst>
           </p:cNvPr>
@@ -4614,7 +5922,7 @@
           <p:cNvPr id="5" name="">
             <a:extLst xmlns:a="http://schemas.openxmlformats.org/drawingml/2006/main">
               <a:ext uri="{FF2B5EF4-FFF2-40B4-BE49-F238E27FC236}">
-                <a16:creationId xmlns:a16="http://schemas.microsoft.com/office/drawing/2014/main" id="{A786B757-0825-4358-B54F-4B787D511A34}"/>
+                <a16:creationId xmlns:a16="http://schemas.microsoft.com/office/drawing/2014/main" id="{C0239C6C-41BD-4197-ABE8-95473F5567C6}"/>
               </a:ext>
             </a:extLst>
           </p:cNvPr>
@@ -4647,7 +5955,7 @@
           <p:cNvPr id="6" name="">
             <a:extLst xmlns:a="http://schemas.openxmlformats.org/drawingml/2006/main">
               <a:ext uri="{FF2B5EF4-FFF2-40B4-BE49-F238E27FC236}">
-                <a16:creationId xmlns:a16="http://schemas.microsoft.com/office/drawing/2014/main" id="{DD7C555A-FBE3-4E56-9E0D-4B0055DB26F8}"/>
+                <a16:creationId xmlns:a16="http://schemas.microsoft.com/office/drawing/2014/main" id="{C0BB7BCE-FB18-4F03-886E-DCC572054C07}"/>
               </a:ext>
             </a:extLst>
           </p:cNvPr>
@@ -4711,7 +6019,7 @@
           <p:cNvPr id="7" name="">
             <a:extLst xmlns:a="http://schemas.openxmlformats.org/drawingml/2006/main">
               <a:ext uri="{FF2B5EF4-FFF2-40B4-BE49-F238E27FC236}">
-                <a16:creationId xmlns:a16="http://schemas.microsoft.com/office/drawing/2014/main" id="{0752D654-586C-46ED-AF95-5FD9634B4EA5}"/>
+                <a16:creationId xmlns:a16="http://schemas.microsoft.com/office/drawing/2014/main" id="{40B2B73F-D0EB-422E-A2D4-449DBCB1D7BB}"/>
               </a:ext>
             </a:extLst>
           </p:cNvPr>
@@ -4775,7 +6083,7 @@
           <p:cNvPr id="8" name="">
             <a:extLst xmlns:a="http://schemas.openxmlformats.org/drawingml/2006/main">
               <a:ext uri="{FF2B5EF4-FFF2-40B4-BE49-F238E27FC236}">
-                <a16:creationId xmlns:a16="http://schemas.microsoft.com/office/drawing/2014/main" id="{762203D1-D683-4D6D-B959-B4ADD1A8986E}"/>
+                <a16:creationId xmlns:a16="http://schemas.microsoft.com/office/drawing/2014/main" id="{12A328E6-140A-4A21-9683-B74422F07212}"/>
               </a:ext>
             </a:extLst>
           </p:cNvPr>
@@ -4808,7 +6116,7 @@
           <p:cNvPr id="9" name="">
             <a:extLst xmlns:a="http://schemas.openxmlformats.org/drawingml/2006/main">
               <a:ext uri="{FF2B5EF4-FFF2-40B4-BE49-F238E27FC236}">
-                <a16:creationId xmlns:a16="http://schemas.microsoft.com/office/drawing/2014/main" id="{D7C9B4FE-A997-4C5C-A620-E88B4FAF1AB4}"/>
+                <a16:creationId xmlns:a16="http://schemas.microsoft.com/office/drawing/2014/main" id="{8B5691D7-F03A-4792-A0DB-8955672E056B}"/>
               </a:ext>
             </a:extLst>
           </p:cNvPr>
@@ -4872,7 +6180,7 @@
           <p:cNvPr id="10" name="">
             <a:extLst xmlns:a="http://schemas.openxmlformats.org/drawingml/2006/main">
               <a:ext uri="{FF2B5EF4-FFF2-40B4-BE49-F238E27FC236}">
-                <a16:creationId xmlns:a16="http://schemas.microsoft.com/office/drawing/2014/main" id="{3B5BD2FB-72BC-4B24-9C72-603C4E2C01F1}"/>
+                <a16:creationId xmlns:a16="http://schemas.microsoft.com/office/drawing/2014/main" id="{D5E83369-45A7-4C27-AF8E-62D7CA694A2E}"/>
               </a:ext>
             </a:extLst>
           </p:cNvPr>
@@ -4936,7 +6244,7 @@
           <p:cNvPr id="11" name="">
             <a:extLst xmlns:a="http://schemas.openxmlformats.org/drawingml/2006/main">
               <a:ext uri="{FF2B5EF4-FFF2-40B4-BE49-F238E27FC236}">
-                <a16:creationId xmlns:a16="http://schemas.microsoft.com/office/drawing/2014/main" id="{72B386E8-9530-4241-9496-BC8AD6C942E7}"/>
+                <a16:creationId xmlns:a16="http://schemas.microsoft.com/office/drawing/2014/main" id="{8BBA7C62-EDE7-4053-9A52-135A9EA749FF}"/>
               </a:ext>
             </a:extLst>
           </p:cNvPr>
@@ -4969,7 +6277,7 @@
           <p:cNvPr id="12" name="">
             <a:extLst xmlns:a="http://schemas.openxmlformats.org/drawingml/2006/main">
               <a:ext uri="{FF2B5EF4-FFF2-40B4-BE49-F238E27FC236}">
-                <a16:creationId xmlns:a16="http://schemas.microsoft.com/office/drawing/2014/main" id="{78F461F4-30A9-4AB8-BC7B-E27E4508781D}"/>
+                <a16:creationId xmlns:a16="http://schemas.microsoft.com/office/drawing/2014/main" id="{0A82F737-D837-4096-87AB-F7A6158D3097}"/>
               </a:ext>
             </a:extLst>
           </p:cNvPr>
@@ -5033,7 +6341,7 @@
           <p:cNvPr id="13" name="">
             <a:extLst xmlns:a="http://schemas.openxmlformats.org/drawingml/2006/main">
               <a:ext uri="{FF2B5EF4-FFF2-40B4-BE49-F238E27FC236}">
-                <a16:creationId xmlns:a16="http://schemas.microsoft.com/office/drawing/2014/main" id="{EE320699-8622-49E3-B285-58FF55A814F5}"/>
+                <a16:creationId xmlns:a16="http://schemas.microsoft.com/office/drawing/2014/main" id="{DA7F8AF9-57AA-477A-B010-DC57B9D0DF1A}"/>
               </a:ext>
             </a:extLst>
           </p:cNvPr>
@@ -5097,7 +6405,7 @@
           <p:cNvPr id="14" name="">
             <a:extLst xmlns:a="http://schemas.openxmlformats.org/drawingml/2006/main">
               <a:ext uri="{FF2B5EF4-FFF2-40B4-BE49-F238E27FC236}">
-                <a16:creationId xmlns:a16="http://schemas.microsoft.com/office/drawing/2014/main" id="{EDF1BDA4-9B06-42E8-9164-3530670F5082}"/>
+                <a16:creationId xmlns:a16="http://schemas.microsoft.com/office/drawing/2014/main" id="{57DF26E6-87CB-48EA-9E8E-A89AA66DFAEA}"/>
               </a:ext>
             </a:extLst>
           </p:cNvPr>
@@ -5132,7 +6440,7 @@
           <p:cNvPr id="15" name="">
             <a:extLst xmlns:a="http://schemas.openxmlformats.org/drawingml/2006/main">
               <a:ext uri="{FF2B5EF4-FFF2-40B4-BE49-F238E27FC236}">
-                <a16:creationId xmlns:a16="http://schemas.microsoft.com/office/drawing/2014/main" id="{6B0B7995-3B9F-4329-A9DF-1639D4395A1C}"/>
+                <a16:creationId xmlns:a16="http://schemas.microsoft.com/office/drawing/2014/main" id="{E9CC89E4-4798-424B-8FAD-9AA2E0792E7D}"/>
               </a:ext>
             </a:extLst>
           </p:cNvPr>
@@ -5167,7 +6475,7 @@
           <p:cNvPr id="16" name="">
             <a:extLst xmlns:a="http://schemas.openxmlformats.org/drawingml/2006/main">
               <a:ext uri="{FF2B5EF4-FFF2-40B4-BE49-F238E27FC236}">
-                <a16:creationId xmlns:a16="http://schemas.microsoft.com/office/drawing/2014/main" id="{8FF55126-0539-47ED-B2F5-87B3D9F273C2}"/>
+                <a16:creationId xmlns:a16="http://schemas.microsoft.com/office/drawing/2014/main" id="{C35820ED-7711-4209-8FD8-787599BC6EB7}"/>
               </a:ext>
             </a:extLst>
           </p:cNvPr>
@@ -5231,7 +6539,7 @@
           <p:cNvPr id="17" name="">
             <a:extLst xmlns:a="http://schemas.openxmlformats.org/drawingml/2006/main">
               <a:ext uri="{FF2B5EF4-FFF2-40B4-BE49-F238E27FC236}">
-                <a16:creationId xmlns:a16="http://schemas.microsoft.com/office/drawing/2014/main" id="{D80D2251-F862-4BD0-A912-6D61AF8F6C81}"/>
+                <a16:creationId xmlns:a16="http://schemas.microsoft.com/office/drawing/2014/main" id="{0C663B4F-2146-4CFB-9A1E-DA0A26B96D07}"/>
               </a:ext>
             </a:extLst>
           </p:cNvPr>
@@ -5266,7 +6574,7 @@
           <p:cNvPr id="18" name="">
             <a:extLst xmlns:a="http://schemas.openxmlformats.org/drawingml/2006/main">
               <a:ext uri="{FF2B5EF4-FFF2-40B4-BE49-F238E27FC236}">
-                <a16:creationId xmlns:a16="http://schemas.microsoft.com/office/drawing/2014/main" id="{4A4B1BF2-19B8-465A-9B1D-FE1C5004E23D}"/>
+                <a16:creationId xmlns:a16="http://schemas.microsoft.com/office/drawing/2014/main" id="{E77ED1ED-25E9-4D83-9E46-4358F859639B}"/>
               </a:ext>
             </a:extLst>
           </p:cNvPr>
@@ -5301,7 +6609,7 @@
           <p:cNvPr id="19" name="">
             <a:extLst xmlns:a="http://schemas.openxmlformats.org/drawingml/2006/main">
               <a:ext uri="{FF2B5EF4-FFF2-40B4-BE49-F238E27FC236}">
-                <a16:creationId xmlns:a16="http://schemas.microsoft.com/office/drawing/2014/main" id="{A97ED35C-4938-4299-9D22-6E819B4436D8}"/>
+                <a16:creationId xmlns:a16="http://schemas.microsoft.com/office/drawing/2014/main" id="{DFBDBA57-FC54-45DF-881B-04A1834AD179}"/>
               </a:ext>
             </a:extLst>
           </p:cNvPr>
@@ -5365,7 +6673,7 @@
           <p:cNvPr id="20" name="">
             <a:extLst xmlns:a="http://schemas.openxmlformats.org/drawingml/2006/main">
               <a:ext uri="{FF2B5EF4-FFF2-40B4-BE49-F238E27FC236}">
-                <a16:creationId xmlns:a16="http://schemas.microsoft.com/office/drawing/2014/main" id="{60233051-CF0F-429C-8E20-5F5CA57E3FCA}"/>
+                <a16:creationId xmlns:a16="http://schemas.microsoft.com/office/drawing/2014/main" id="{B1A02388-E0E1-4A13-8A44-76579E53F295}"/>
               </a:ext>
             </a:extLst>
           </p:cNvPr>
@@ -5398,7 +6706,7 @@
           <p:cNvPr id="21" name="">
             <a:extLst xmlns:a="http://schemas.openxmlformats.org/drawingml/2006/main">
               <a:ext uri="{FF2B5EF4-FFF2-40B4-BE49-F238E27FC236}">
-                <a16:creationId xmlns:a16="http://schemas.microsoft.com/office/drawing/2014/main" id="{04B3D6A5-340E-4492-9EB7-7B8C0BA560B1}"/>
+                <a16:creationId xmlns:a16="http://schemas.microsoft.com/office/drawing/2014/main" id="{AC54F044-183A-4E54-88C4-EA04ED4C7D79}"/>
               </a:ext>
             </a:extLst>
           </p:cNvPr>
@@ -5462,7 +6770,7 @@
           <p:cNvPr id="22" name="">
             <a:extLst xmlns:a="http://schemas.openxmlformats.org/drawingml/2006/main">
               <a:ext uri="{FF2B5EF4-FFF2-40B4-BE49-F238E27FC236}">
-                <a16:creationId xmlns:a16="http://schemas.microsoft.com/office/drawing/2014/main" id="{9CAE95DE-C641-456D-89EF-C69A165BE4A8}"/>
+                <a16:creationId xmlns:a16="http://schemas.microsoft.com/office/drawing/2014/main" id="{14F24097-06DC-4267-8CEA-9EB4460825F2}"/>
               </a:ext>
             </a:extLst>
           </p:cNvPr>
@@ -5526,7 +6834,7 @@
           <p:cNvPr id="23" name="">
             <a:extLst xmlns:a="http://schemas.openxmlformats.org/drawingml/2006/main">
               <a:ext uri="{FF2B5EF4-FFF2-40B4-BE49-F238E27FC236}">
-                <a16:creationId xmlns:a16="http://schemas.microsoft.com/office/drawing/2014/main" id="{D34B2131-2836-4EE6-8228-78E340DDD98C}"/>
+                <a16:creationId xmlns:a16="http://schemas.microsoft.com/office/drawing/2014/main" id="{B3B1697E-113C-48C6-9B6F-A25DEFC9F6C0}"/>
               </a:ext>
             </a:extLst>
           </p:cNvPr>
@@ -5559,7 +6867,7 @@
           <p:cNvPr id="24" name="">
             <a:extLst xmlns:a="http://schemas.openxmlformats.org/drawingml/2006/main">
               <a:ext uri="{FF2B5EF4-FFF2-40B4-BE49-F238E27FC236}">
-                <a16:creationId xmlns:a16="http://schemas.microsoft.com/office/drawing/2014/main" id="{92CBD56A-DCB5-4CAB-8105-EC18EBD89CE6}"/>
+                <a16:creationId xmlns:a16="http://schemas.microsoft.com/office/drawing/2014/main" id="{73A2D8EE-911A-4141-BB92-CA253382B478}"/>
               </a:ext>
             </a:extLst>
           </p:cNvPr>
@@ -5623,7 +6931,7 @@
           <p:cNvPr id="25" name="">
             <a:extLst xmlns:a="http://schemas.openxmlformats.org/drawingml/2006/main">
               <a:ext uri="{FF2B5EF4-FFF2-40B4-BE49-F238E27FC236}">
-                <a16:creationId xmlns:a16="http://schemas.microsoft.com/office/drawing/2014/main" id="{C44621EF-A23D-4F4F-B55E-60AB488C47AB}"/>
+                <a16:creationId xmlns:a16="http://schemas.microsoft.com/office/drawing/2014/main" id="{3B9E3148-E009-4D2C-A2E4-0A338F873B87}"/>
               </a:ext>
             </a:extLst>
           </p:cNvPr>
@@ -5687,7 +6995,7 @@
           <p:cNvPr id="26" name="">
             <a:extLst xmlns:a="http://schemas.openxmlformats.org/drawingml/2006/main">
               <a:ext uri="{FF2B5EF4-FFF2-40B4-BE49-F238E27FC236}">
-                <a16:creationId xmlns:a16="http://schemas.microsoft.com/office/drawing/2014/main" id="{1614149E-A1AC-4B9C-8038-E62197CC12CF}"/>
+                <a16:creationId xmlns:a16="http://schemas.microsoft.com/office/drawing/2014/main" id="{63FD5875-8304-47EE-93CD-F3DC0F12F3F1}"/>
               </a:ext>
             </a:extLst>
           </p:cNvPr>
@@ -5722,7 +7030,7 @@
           <p:cNvPr id="27" name="">
             <a:extLst xmlns:a="http://schemas.openxmlformats.org/drawingml/2006/main">
               <a:ext uri="{FF2B5EF4-FFF2-40B4-BE49-F238E27FC236}">
-                <a16:creationId xmlns:a16="http://schemas.microsoft.com/office/drawing/2014/main" id="{C1839473-4F20-4D1F-B02A-811C8A116E76}"/>
+                <a16:creationId xmlns:a16="http://schemas.microsoft.com/office/drawing/2014/main" id="{7EF8D285-340E-425A-9D40-3F12B0E71BC7}"/>
               </a:ext>
             </a:extLst>
           </p:cNvPr>
@@ -5786,7 +7094,7 @@
           <p:cNvPr id="28" name="">
             <a:extLst xmlns:a="http://schemas.openxmlformats.org/drawingml/2006/main">
               <a:ext uri="{FF2B5EF4-FFF2-40B4-BE49-F238E27FC236}">
-                <a16:creationId xmlns:a16="http://schemas.microsoft.com/office/drawing/2014/main" id="{7520109A-E2C5-440F-8E17-0D920B5D547E}"/>
+                <a16:creationId xmlns:a16="http://schemas.microsoft.com/office/drawing/2014/main" id="{0B56DEDE-BB4C-4A86-97DC-E2C37516C7DC}"/>
               </a:ext>
             </a:extLst>
           </p:cNvPr>
@@ -5850,7 +7158,7 @@
           <p:cNvPr id="29" name="">
             <a:extLst xmlns:a="http://schemas.openxmlformats.org/drawingml/2006/main">
               <a:ext uri="{FF2B5EF4-FFF2-40B4-BE49-F238E27FC236}">
-                <a16:creationId xmlns:a16="http://schemas.microsoft.com/office/drawing/2014/main" id="{D1746027-9314-42A3-B4DC-CC8921C1A3D1}"/>
+                <a16:creationId xmlns:a16="http://schemas.microsoft.com/office/drawing/2014/main" id="{6545318E-3624-4ACB-AF98-B16238A79D50}"/>
               </a:ext>
             </a:extLst>
           </p:cNvPr>
@@ -5912,7 +7220,7 @@
     </p:spTree>
     <p:extLst>
       <p:ext uri="{BB962C8B-B14F-4D97-AF65-F5344CB8AC3E}">
-        <p14:creationId xmlns:p14="http://schemas.microsoft.com/office/powerpoint/2010/main" val="342309129"/>
+        <p14:creationId xmlns:p14="http://schemas.microsoft.com/office/powerpoint/2010/main" val="1120298423"/>
       </p:ext>
     </p:extLst>
   </p:cSld>
@@ -5936,7 +7244,7 @@
           <p:cNvPr id="1" name="">
             <a:extLst xmlns:a="http://schemas.openxmlformats.org/drawingml/2006/main">
               <a:ext uri="{FF2B5EF4-FFF2-40B4-BE49-F238E27FC236}">
-                <a16:creationId xmlns:a16="http://schemas.microsoft.com/office/drawing/2014/main" id="{B24B6DA5-B55C-40FE-9882-AC9728C5588C}"/>
+                <a16:creationId xmlns:a16="http://schemas.microsoft.com/office/drawing/2014/main" id="{37A59C43-E9BD-46AE-BAB6-EAC5AC0B8EA2}"/>
               </a:ext>
             </a:extLst>
           </p:cNvPr>
@@ -5971,7 +7279,7 @@
           <p:cNvPr id="2" name="">
             <a:extLst xmlns:a="http://schemas.openxmlformats.org/drawingml/2006/main">
               <a:ext uri="{FF2B5EF4-FFF2-40B4-BE49-F238E27FC236}">
-                <a16:creationId xmlns:a16="http://schemas.microsoft.com/office/drawing/2014/main" id="{37C5F7E9-32FD-465E-B50A-E26D506E9C09}"/>
+                <a16:creationId xmlns:a16="http://schemas.microsoft.com/office/drawing/2014/main" id="{42ACA2FF-4FA6-4E4C-B96C-403F80EC48A8}"/>
               </a:ext>
             </a:extLst>
           </p:cNvPr>
@@ -6035,7 +7343,7 @@
           <p:cNvPr id="3" name="">
             <a:extLst xmlns:a="http://schemas.openxmlformats.org/drawingml/2006/main">
               <a:ext uri="{FF2B5EF4-FFF2-40B4-BE49-F238E27FC236}">
-                <a16:creationId xmlns:a16="http://schemas.microsoft.com/office/drawing/2014/main" id="{46ACCDD8-359C-44F9-9DFB-0065638E97FC}"/>
+                <a16:creationId xmlns:a16="http://schemas.microsoft.com/office/drawing/2014/main" id="{5A7C72AC-DB03-4E94-8290-2A3DB8DC0672}"/>
               </a:ext>
             </a:extLst>
           </p:cNvPr>
@@ -6099,7 +7407,7 @@
           <p:cNvPr id="4" name="">
             <a:extLst xmlns:a="http://schemas.openxmlformats.org/drawingml/2006/main">
               <a:ext uri="{FF2B5EF4-FFF2-40B4-BE49-F238E27FC236}">
-                <a16:creationId xmlns:a16="http://schemas.microsoft.com/office/drawing/2014/main" id="{C23095A8-CC85-4804-9F04-EE4E8B6DC548}"/>
+                <a16:creationId xmlns:a16="http://schemas.microsoft.com/office/drawing/2014/main" id="{AC23B9A3-667B-4777-8D40-5BAAB69E7D76}"/>
               </a:ext>
             </a:extLst>
           </p:cNvPr>
@@ -6138,7 +7446,7 @@
           <p:nvPr/>
         </p:nvPicPr>
         <p:blipFill>
-          <a:blip xmlns:r="http://schemas.openxmlformats.org/officeDocument/2006/relationships" xmlns:a="http://schemas.openxmlformats.org/drawingml/2006/main" r:embed="R363794cbfcd547a6"/>
+          <a:blip xmlns:r="http://schemas.openxmlformats.org/officeDocument/2006/relationships" xmlns:a="http://schemas.openxmlformats.org/drawingml/2006/main" r:embed="R491a077227c54bec"/>
           <a:srcRect xmlns:a="http://schemas.openxmlformats.org/drawingml/2006/main" l="5000" t="0" r="5000" b="0"/>
           <a:stretch xmlns:a="http://schemas.openxmlformats.org/drawingml/2006/main">
             <a:fillRect l="0" t="0" r="0" b="0"/>
@@ -6159,7 +7467,7 @@
           <p:cNvPr id="6" name="">
             <a:extLst xmlns:a="http://schemas.openxmlformats.org/drawingml/2006/main">
               <a:ext uri="{FF2B5EF4-FFF2-40B4-BE49-F238E27FC236}">
-                <a16:creationId xmlns:a16="http://schemas.microsoft.com/office/drawing/2014/main" id="{8EB5F951-C06D-49D7-AB26-28E2206F4412}"/>
+                <a16:creationId xmlns:a16="http://schemas.microsoft.com/office/drawing/2014/main" id="{D6CCAE7B-68AD-42AB-90C2-C1440282F816}"/>
               </a:ext>
             </a:extLst>
           </p:cNvPr>
@@ -6192,7 +7500,7 @@
           <p:cNvPr id="7" name="">
             <a:extLst xmlns:a="http://schemas.openxmlformats.org/drawingml/2006/main">
               <a:ext uri="{FF2B5EF4-FFF2-40B4-BE49-F238E27FC236}">
-                <a16:creationId xmlns:a16="http://schemas.microsoft.com/office/drawing/2014/main" id="{22F26BD9-2C88-4596-ABE1-4FBDB59CA8A5}"/>
+                <a16:creationId xmlns:a16="http://schemas.microsoft.com/office/drawing/2014/main" id="{D03B99BD-190C-4049-A6B4-DFC8B8660AB6}"/>
               </a:ext>
             </a:extLst>
           </p:cNvPr>
@@ -6227,7 +7535,7 @@
           <p:cNvPr id="8" name="">
             <a:extLst xmlns:a="http://schemas.openxmlformats.org/drawingml/2006/main">
               <a:ext uri="{FF2B5EF4-FFF2-40B4-BE49-F238E27FC236}">
-                <a16:creationId xmlns:a16="http://schemas.microsoft.com/office/drawing/2014/main" id="{554A20B7-68D6-4B3D-A58F-035D3DB9422C}"/>
+                <a16:creationId xmlns:a16="http://schemas.microsoft.com/office/drawing/2014/main" id="{A837D1FE-E1D1-47A5-9754-3B03D7C61338}"/>
               </a:ext>
             </a:extLst>
           </p:cNvPr>
@@ -6291,7 +7599,7 @@
           <p:cNvPr id="9" name="">
             <a:extLst xmlns:a="http://schemas.openxmlformats.org/drawingml/2006/main">
               <a:ext uri="{FF2B5EF4-FFF2-40B4-BE49-F238E27FC236}">
-                <a16:creationId xmlns:a16="http://schemas.microsoft.com/office/drawing/2014/main" id="{DC2FDEF6-8CEB-40A4-8C44-B278CE66D114}"/>
+                <a16:creationId xmlns:a16="http://schemas.microsoft.com/office/drawing/2014/main" id="{979169D3-54F4-4D53-A3C9-C7EDE6ECF036}"/>
               </a:ext>
             </a:extLst>
           </p:cNvPr>
@@ -6355,7 +7663,7 @@
           <p:cNvPr id="10" name="">
             <a:extLst xmlns:a="http://schemas.openxmlformats.org/drawingml/2006/main">
               <a:ext uri="{FF2B5EF4-FFF2-40B4-BE49-F238E27FC236}">
-                <a16:creationId xmlns:a16="http://schemas.microsoft.com/office/drawing/2014/main" id="{E3E3A23A-1C71-44C3-BD40-490CA3D4BDC9}"/>
+                <a16:creationId xmlns:a16="http://schemas.microsoft.com/office/drawing/2014/main" id="{3CD9435B-7927-4AB4-8E16-A07066C66F4B}"/>
               </a:ext>
             </a:extLst>
           </p:cNvPr>
@@ -6388,7 +7696,7 @@
           <p:cNvPr id="11" name="">
             <a:extLst xmlns:a="http://schemas.openxmlformats.org/drawingml/2006/main">
               <a:ext uri="{FF2B5EF4-FFF2-40B4-BE49-F238E27FC236}">
-                <a16:creationId xmlns:a16="http://schemas.microsoft.com/office/drawing/2014/main" id="{48DAF1A3-4A30-4E40-BABF-28891FE61B99}"/>
+                <a16:creationId xmlns:a16="http://schemas.microsoft.com/office/drawing/2014/main" id="{1EC5E14E-DB00-4C7D-A960-1A098E27B188}"/>
               </a:ext>
             </a:extLst>
           </p:cNvPr>
@@ -6423,7 +7731,7 @@
           <p:cNvPr id="12" name="">
             <a:extLst xmlns:a="http://schemas.openxmlformats.org/drawingml/2006/main">
               <a:ext uri="{FF2B5EF4-FFF2-40B4-BE49-F238E27FC236}">
-                <a16:creationId xmlns:a16="http://schemas.microsoft.com/office/drawing/2014/main" id="{2B5EAF67-52F8-4BA2-BEAC-87242E21A0B6}"/>
+                <a16:creationId xmlns:a16="http://schemas.microsoft.com/office/drawing/2014/main" id="{CB191AAE-45A7-466E-B5CF-C4B3556647D4}"/>
               </a:ext>
             </a:extLst>
           </p:cNvPr>
@@ -6487,7 +7795,7 @@
           <p:cNvPr id="13" name="">
             <a:extLst xmlns:a="http://schemas.openxmlformats.org/drawingml/2006/main">
               <a:ext uri="{FF2B5EF4-FFF2-40B4-BE49-F238E27FC236}">
-                <a16:creationId xmlns:a16="http://schemas.microsoft.com/office/drawing/2014/main" id="{F072338F-7FD0-4AD0-AC23-D3166CEF9BC7}"/>
+                <a16:creationId xmlns:a16="http://schemas.microsoft.com/office/drawing/2014/main" id="{E4273030-9FFC-43FF-994B-12FD41D89F80}"/>
               </a:ext>
             </a:extLst>
           </p:cNvPr>
@@ -6551,7 +7859,7 @@
           <p:cNvPr id="14" name="">
             <a:extLst xmlns:a="http://schemas.openxmlformats.org/drawingml/2006/main">
               <a:ext uri="{FF2B5EF4-FFF2-40B4-BE49-F238E27FC236}">
-                <a16:creationId xmlns:a16="http://schemas.microsoft.com/office/drawing/2014/main" id="{017F4B05-3DF5-4BF4-BC41-4CB22408A1DA}"/>
+                <a16:creationId xmlns:a16="http://schemas.microsoft.com/office/drawing/2014/main" id="{E53DBF83-0DEF-4655-85EE-B43965AA68E7}"/>
               </a:ext>
             </a:extLst>
           </p:cNvPr>
@@ -6584,7 +7892,7 @@
           <p:cNvPr id="15" name="">
             <a:extLst xmlns:a="http://schemas.openxmlformats.org/drawingml/2006/main">
               <a:ext uri="{FF2B5EF4-FFF2-40B4-BE49-F238E27FC236}">
-                <a16:creationId xmlns:a16="http://schemas.microsoft.com/office/drawing/2014/main" id="{BCDD19FA-3F09-44CB-B255-2A7ACABCC7F0}"/>
+                <a16:creationId xmlns:a16="http://schemas.microsoft.com/office/drawing/2014/main" id="{F546B5A7-C2BC-4F99-B20A-A4269F2ACC93}"/>
               </a:ext>
             </a:extLst>
           </p:cNvPr>
@@ -6619,7 +7927,7 @@
           <p:cNvPr id="16" name="">
             <a:extLst xmlns:a="http://schemas.openxmlformats.org/drawingml/2006/main">
               <a:ext uri="{FF2B5EF4-FFF2-40B4-BE49-F238E27FC236}">
-                <a16:creationId xmlns:a16="http://schemas.microsoft.com/office/drawing/2014/main" id="{67856045-744A-43D5-A8F2-5628E99E8ED0}"/>
+                <a16:creationId xmlns:a16="http://schemas.microsoft.com/office/drawing/2014/main" id="{E715E03D-812F-4C5A-81BF-8135DAD6D2AC}"/>
               </a:ext>
             </a:extLst>
           </p:cNvPr>
@@ -6683,7 +7991,7 @@
           <p:cNvPr id="17" name="">
             <a:extLst xmlns:a="http://schemas.openxmlformats.org/drawingml/2006/main">
               <a:ext uri="{FF2B5EF4-FFF2-40B4-BE49-F238E27FC236}">
-                <a16:creationId xmlns:a16="http://schemas.microsoft.com/office/drawing/2014/main" id="{6E61D954-A2DF-4119-8272-AE794593A67D}"/>
+                <a16:creationId xmlns:a16="http://schemas.microsoft.com/office/drawing/2014/main" id="{3D448FC8-FE68-4C58-B5FC-2ED5E688C574}"/>
               </a:ext>
             </a:extLst>
           </p:cNvPr>
@@ -6747,7 +8055,7 @@
           <p:cNvPr id="18" name="">
             <a:extLst xmlns:a="http://schemas.openxmlformats.org/drawingml/2006/main">
               <a:ext uri="{FF2B5EF4-FFF2-40B4-BE49-F238E27FC236}">
-                <a16:creationId xmlns:a16="http://schemas.microsoft.com/office/drawing/2014/main" id="{647FB6B6-1FEE-46EB-8F0B-EB988C1351F7}"/>
+                <a16:creationId xmlns:a16="http://schemas.microsoft.com/office/drawing/2014/main" id="{CF348F87-1998-488C-B4A4-87E22769BDEC}"/>
               </a:ext>
             </a:extLst>
           </p:cNvPr>
@@ -6780,7 +8088,7 @@
           <p:cNvPr id="19" name="">
             <a:extLst xmlns:a="http://schemas.openxmlformats.org/drawingml/2006/main">
               <a:ext uri="{FF2B5EF4-FFF2-40B4-BE49-F238E27FC236}">
-                <a16:creationId xmlns:a16="http://schemas.microsoft.com/office/drawing/2014/main" id="{53938F16-3F36-464E-B018-868B67636C50}"/>
+                <a16:creationId xmlns:a16="http://schemas.microsoft.com/office/drawing/2014/main" id="{DC1C4CF5-7934-4365-A959-AD6B947D1B4E}"/>
               </a:ext>
             </a:extLst>
           </p:cNvPr>
@@ -6815,7 +8123,7 @@
           <p:cNvPr id="20" name="">
             <a:extLst xmlns:a="http://schemas.openxmlformats.org/drawingml/2006/main">
               <a:ext uri="{FF2B5EF4-FFF2-40B4-BE49-F238E27FC236}">
-                <a16:creationId xmlns:a16="http://schemas.microsoft.com/office/drawing/2014/main" id="{2204A512-D115-4740-8C0D-6E21254D1470}"/>
+                <a16:creationId xmlns:a16="http://schemas.microsoft.com/office/drawing/2014/main" id="{2D62471C-B1E9-4637-B881-8FD139F95310}"/>
               </a:ext>
             </a:extLst>
           </p:cNvPr>
@@ -6879,7 +8187,7 @@
           <p:cNvPr id="21" name="">
             <a:extLst xmlns:a="http://schemas.openxmlformats.org/drawingml/2006/main">
               <a:ext uri="{FF2B5EF4-FFF2-40B4-BE49-F238E27FC236}">
-                <a16:creationId xmlns:a16="http://schemas.microsoft.com/office/drawing/2014/main" id="{6E3D8D5F-721A-421E-8C68-AA1A0F096123}"/>
+                <a16:creationId xmlns:a16="http://schemas.microsoft.com/office/drawing/2014/main" id="{DAC69393-CB10-4034-AB2D-FE85EACAE5C8}"/>
               </a:ext>
             </a:extLst>
           </p:cNvPr>
@@ -6943,7 +8251,7 @@
           <p:cNvPr id="22" name="">
             <a:extLst xmlns:a="http://schemas.openxmlformats.org/drawingml/2006/main">
               <a:ext uri="{FF2B5EF4-FFF2-40B4-BE49-F238E27FC236}">
-                <a16:creationId xmlns:a16="http://schemas.microsoft.com/office/drawing/2014/main" id="{E521E04B-4AE4-497A-B153-647AFDAC746E}"/>
+                <a16:creationId xmlns:a16="http://schemas.microsoft.com/office/drawing/2014/main" id="{E7402CF9-0E5A-431B-9186-5E22B413E0B8}"/>
               </a:ext>
             </a:extLst>
           </p:cNvPr>
@@ -7007,7 +8315,7 @@
           <p:cNvPr id="23" name="">
             <a:extLst xmlns:a="http://schemas.openxmlformats.org/drawingml/2006/main">
               <a:ext uri="{FF2B5EF4-FFF2-40B4-BE49-F238E27FC236}">
-                <a16:creationId xmlns:a16="http://schemas.microsoft.com/office/drawing/2014/main" id="{B955CD2C-5F3D-4058-820B-A9C0A8217E44}"/>
+                <a16:creationId xmlns:a16="http://schemas.microsoft.com/office/drawing/2014/main" id="{AEEDC1F1-4C8B-4C96-9833-6A6F1D09A7BF}"/>
               </a:ext>
             </a:extLst>
           </p:cNvPr>
@@ -7069,7 +8377,7 @@
     </p:spTree>
     <p:extLst>
       <p:ext uri="{BB962C8B-B14F-4D97-AF65-F5344CB8AC3E}">
-        <p14:creationId xmlns:p14="http://schemas.microsoft.com/office/powerpoint/2010/main" val="844861203"/>
+        <p14:creationId xmlns:p14="http://schemas.microsoft.com/office/powerpoint/2010/main" val="822389973"/>
       </p:ext>
     </p:extLst>
   </p:cSld>
@@ -7093,7 +8401,7 @@
           <p:cNvPr id="1" name="">
             <a:extLst xmlns:a="http://schemas.openxmlformats.org/drawingml/2006/main">
               <a:ext uri="{FF2B5EF4-FFF2-40B4-BE49-F238E27FC236}">
-                <a16:creationId xmlns:a16="http://schemas.microsoft.com/office/drawing/2014/main" id="{CB28726C-5997-4FDE-8BBD-92DC55C3AEF1}"/>
+                <a16:creationId xmlns:a16="http://schemas.microsoft.com/office/drawing/2014/main" id="{08A6B1D8-582B-4AB9-845D-FE84EB9DBD80}"/>
               </a:ext>
             </a:extLst>
           </p:cNvPr>
@@ -7128,7 +8436,7 @@
           <p:cNvPr id="2" name="">
             <a:extLst xmlns:a="http://schemas.openxmlformats.org/drawingml/2006/main">
               <a:ext uri="{FF2B5EF4-FFF2-40B4-BE49-F238E27FC236}">
-                <a16:creationId xmlns:a16="http://schemas.microsoft.com/office/drawing/2014/main" id="{9ACC7D87-51CD-4CD5-8641-C13BABBDC777}"/>
+                <a16:creationId xmlns:a16="http://schemas.microsoft.com/office/drawing/2014/main" id="{2FD8BAD7-5BF1-4B90-BB9B-AB7FCFBBFA00}"/>
               </a:ext>
             </a:extLst>
           </p:cNvPr>
@@ -7192,7 +8500,7 @@
           <p:cNvPr id="3" name="">
             <a:extLst xmlns:a="http://schemas.openxmlformats.org/drawingml/2006/main">
               <a:ext uri="{FF2B5EF4-FFF2-40B4-BE49-F238E27FC236}">
-                <a16:creationId xmlns:a16="http://schemas.microsoft.com/office/drawing/2014/main" id="{85A406FC-3E13-44D3-8A86-396C4D0EB169}"/>
+                <a16:creationId xmlns:a16="http://schemas.microsoft.com/office/drawing/2014/main" id="{44C07606-E36E-4747-A433-DBC1C68F7362}"/>
               </a:ext>
             </a:extLst>
           </p:cNvPr>
@@ -7256,7 +8564,7 @@
           <p:cNvPr id="4" name="">
             <a:extLst xmlns:a="http://schemas.openxmlformats.org/drawingml/2006/main">
               <a:ext uri="{FF2B5EF4-FFF2-40B4-BE49-F238E27FC236}">
-                <a16:creationId xmlns:a16="http://schemas.microsoft.com/office/drawing/2014/main" id="{D91EEA6A-DA53-4D0C-A4F6-C31B9A0216FD}"/>
+                <a16:creationId xmlns:a16="http://schemas.microsoft.com/office/drawing/2014/main" id="{D4B8ECA3-9CCD-4526-B5FA-FE64AEAC9173}"/>
               </a:ext>
             </a:extLst>
           </p:cNvPr>
@@ -7295,7 +8603,7 @@
           <p:nvPr/>
         </p:nvPicPr>
         <p:blipFill>
-          <a:blip xmlns:r="http://schemas.openxmlformats.org/officeDocument/2006/relationships" xmlns:a="http://schemas.openxmlformats.org/drawingml/2006/main" r:embed="R677af76bf42f41e7"/>
+          <a:blip xmlns:r="http://schemas.openxmlformats.org/officeDocument/2006/relationships" xmlns:a="http://schemas.openxmlformats.org/drawingml/2006/main" r:embed="R29a67a3bfdb346a0"/>
           <a:srcRect xmlns:a="http://schemas.openxmlformats.org/drawingml/2006/main" l="0" t="0" r="0" b="0"/>
           <a:stretch xmlns:a="http://schemas.openxmlformats.org/drawingml/2006/main">
             <a:fillRect l="0" t="0" r="0" b="0"/>
@@ -7316,7 +8624,7 @@
           <p:cNvPr id="6" name="">
             <a:extLst xmlns:a="http://schemas.openxmlformats.org/drawingml/2006/main">
               <a:ext uri="{FF2B5EF4-FFF2-40B4-BE49-F238E27FC236}">
-                <a16:creationId xmlns:a16="http://schemas.microsoft.com/office/drawing/2014/main" id="{770B6A97-9B3C-46C5-AB5B-188C8BD93C76}"/>
+                <a16:creationId xmlns:a16="http://schemas.microsoft.com/office/drawing/2014/main" id="{97C401EA-3EFB-4BE2-9C95-5E7FA91AB6F3}"/>
               </a:ext>
             </a:extLst>
           </p:cNvPr>
@@ -7380,7 +8688,7 @@
           <p:cNvPr id="7" name="">
             <a:extLst xmlns:a="http://schemas.openxmlformats.org/drawingml/2006/main">
               <a:ext uri="{FF2B5EF4-FFF2-40B4-BE49-F238E27FC236}">
-                <a16:creationId xmlns:a16="http://schemas.microsoft.com/office/drawing/2014/main" id="{7666EC85-70C2-4DCA-AA57-E823A0260A1B}"/>
+                <a16:creationId xmlns:a16="http://schemas.microsoft.com/office/drawing/2014/main" id="{F9081B1D-8AF1-4A91-B152-4DC1FACBE605}"/>
               </a:ext>
             </a:extLst>
           </p:cNvPr>
@@ -7413,7 +8721,7 @@
           <p:cNvPr id="8" name="">
             <a:extLst xmlns:a="http://schemas.openxmlformats.org/drawingml/2006/main">
               <a:ext uri="{FF2B5EF4-FFF2-40B4-BE49-F238E27FC236}">
-                <a16:creationId xmlns:a16="http://schemas.microsoft.com/office/drawing/2014/main" id="{39F5E203-A923-4066-8FE8-540A72FBB203}"/>
+                <a16:creationId xmlns:a16="http://schemas.microsoft.com/office/drawing/2014/main" id="{436C933A-5F3E-414D-856F-99F887B9403C}"/>
               </a:ext>
             </a:extLst>
           </p:cNvPr>
@@ -7448,7 +8756,7 @@
           <p:cNvPr id="9" name="">
             <a:extLst xmlns:a="http://schemas.openxmlformats.org/drawingml/2006/main">
               <a:ext uri="{FF2B5EF4-FFF2-40B4-BE49-F238E27FC236}">
-                <a16:creationId xmlns:a16="http://schemas.microsoft.com/office/drawing/2014/main" id="{D97B5CC6-130C-4F12-8464-EBDAE8C7BC0A}"/>
+                <a16:creationId xmlns:a16="http://schemas.microsoft.com/office/drawing/2014/main" id="{3B232D6A-7E40-42EF-8A00-F64010B81045}"/>
               </a:ext>
             </a:extLst>
           </p:cNvPr>
@@ -7512,7 +8820,7 @@
           <p:cNvPr id="10" name="">
             <a:extLst xmlns:a="http://schemas.openxmlformats.org/drawingml/2006/main">
               <a:ext uri="{FF2B5EF4-FFF2-40B4-BE49-F238E27FC236}">
-                <a16:creationId xmlns:a16="http://schemas.microsoft.com/office/drawing/2014/main" id="{82DA7096-48A4-4E70-9E54-D1CB13AE48A7}"/>
+                <a16:creationId xmlns:a16="http://schemas.microsoft.com/office/drawing/2014/main" id="{94E1784A-A0C5-4CAC-933D-710DE489875A}"/>
               </a:ext>
             </a:extLst>
           </p:cNvPr>
@@ -7576,7 +8884,7 @@
           <p:cNvPr id="11" name="">
             <a:extLst xmlns:a="http://schemas.openxmlformats.org/drawingml/2006/main">
               <a:ext uri="{FF2B5EF4-FFF2-40B4-BE49-F238E27FC236}">
-                <a16:creationId xmlns:a16="http://schemas.microsoft.com/office/drawing/2014/main" id="{D1D5D1C0-5C78-4FDC-B4FC-0B99A1C545AB}"/>
+                <a16:creationId xmlns:a16="http://schemas.microsoft.com/office/drawing/2014/main" id="{F8E1662E-9EF8-4B46-8560-D964B1C3EE5E}"/>
               </a:ext>
             </a:extLst>
           </p:cNvPr>
@@ -7609,7 +8917,7 @@
           <p:cNvPr id="12" name="">
             <a:extLst xmlns:a="http://schemas.openxmlformats.org/drawingml/2006/main">
               <a:ext uri="{FF2B5EF4-FFF2-40B4-BE49-F238E27FC236}">
-                <a16:creationId xmlns:a16="http://schemas.microsoft.com/office/drawing/2014/main" id="{7484FCC9-D7AC-4441-830E-32042667A5A4}"/>
+                <a16:creationId xmlns:a16="http://schemas.microsoft.com/office/drawing/2014/main" id="{EB025076-5F53-4323-964E-F60AB1CC5669}"/>
               </a:ext>
             </a:extLst>
           </p:cNvPr>
@@ -7644,7 +8952,7 @@
           <p:cNvPr id="13" name="">
             <a:extLst xmlns:a="http://schemas.openxmlformats.org/drawingml/2006/main">
               <a:ext uri="{FF2B5EF4-FFF2-40B4-BE49-F238E27FC236}">
-                <a16:creationId xmlns:a16="http://schemas.microsoft.com/office/drawing/2014/main" id="{CDC2F1E5-4E19-4589-BCC4-E069A6A2B678}"/>
+                <a16:creationId xmlns:a16="http://schemas.microsoft.com/office/drawing/2014/main" id="{7E5CB4DE-41B1-49FC-92A3-ECB3516632AB}"/>
               </a:ext>
             </a:extLst>
           </p:cNvPr>
@@ -7708,7 +9016,7 @@
           <p:cNvPr id="14" name="">
             <a:extLst xmlns:a="http://schemas.openxmlformats.org/drawingml/2006/main">
               <a:ext uri="{FF2B5EF4-FFF2-40B4-BE49-F238E27FC236}">
-                <a16:creationId xmlns:a16="http://schemas.microsoft.com/office/drawing/2014/main" id="{69590792-2C48-4464-AAEA-0883499C5A24}"/>
+                <a16:creationId xmlns:a16="http://schemas.microsoft.com/office/drawing/2014/main" id="{18BBE2ED-0CAC-4856-BAA1-E30A62423041}"/>
               </a:ext>
             </a:extLst>
           </p:cNvPr>
@@ -7772,7 +9080,7 @@
           <p:cNvPr id="15" name="">
             <a:extLst xmlns:a="http://schemas.openxmlformats.org/drawingml/2006/main">
               <a:ext uri="{FF2B5EF4-FFF2-40B4-BE49-F238E27FC236}">
-                <a16:creationId xmlns:a16="http://schemas.microsoft.com/office/drawing/2014/main" id="{898F4B53-A3D7-4C85-92F9-5251AAC67598}"/>
+                <a16:creationId xmlns:a16="http://schemas.microsoft.com/office/drawing/2014/main" id="{BC98DFF2-5FFA-4B16-9968-22D4F6D9114A}"/>
               </a:ext>
             </a:extLst>
           </p:cNvPr>
@@ -7805,7 +9113,7 @@
           <p:cNvPr id="16" name="">
             <a:extLst xmlns:a="http://schemas.openxmlformats.org/drawingml/2006/main">
               <a:ext uri="{FF2B5EF4-FFF2-40B4-BE49-F238E27FC236}">
-                <a16:creationId xmlns:a16="http://schemas.microsoft.com/office/drawing/2014/main" id="{2A7CC5C1-5108-48F6-AFEE-77ACDC856C3D}"/>
+                <a16:creationId xmlns:a16="http://schemas.microsoft.com/office/drawing/2014/main" id="{28D22200-3236-4633-A022-5842231EF337}"/>
               </a:ext>
             </a:extLst>
           </p:cNvPr>
@@ -7840,7 +9148,7 @@
           <p:cNvPr id="17" name="">
             <a:extLst xmlns:a="http://schemas.openxmlformats.org/drawingml/2006/main">
               <a:ext uri="{FF2B5EF4-FFF2-40B4-BE49-F238E27FC236}">
-                <a16:creationId xmlns:a16="http://schemas.microsoft.com/office/drawing/2014/main" id="{36E14DBC-10F7-403B-8A3B-A082F3EACB02}"/>
+                <a16:creationId xmlns:a16="http://schemas.microsoft.com/office/drawing/2014/main" id="{C533A502-2D5C-4142-A42C-4E244AA0305F}"/>
               </a:ext>
             </a:extLst>
           </p:cNvPr>
@@ -7904,7 +9212,7 @@
           <p:cNvPr id="18" name="">
             <a:extLst xmlns:a="http://schemas.openxmlformats.org/drawingml/2006/main">
               <a:ext uri="{FF2B5EF4-FFF2-40B4-BE49-F238E27FC236}">
-                <a16:creationId xmlns:a16="http://schemas.microsoft.com/office/drawing/2014/main" id="{0B80F9D0-BE7C-4AED-8FC2-1AD4101E5198}"/>
+                <a16:creationId xmlns:a16="http://schemas.microsoft.com/office/drawing/2014/main" id="{8B686F81-32A2-420F-9969-FA1D80155117}"/>
               </a:ext>
             </a:extLst>
           </p:cNvPr>
@@ -7968,7 +9276,7 @@
           <p:cNvPr id="19" name="">
             <a:extLst xmlns:a="http://schemas.openxmlformats.org/drawingml/2006/main">
               <a:ext uri="{FF2B5EF4-FFF2-40B4-BE49-F238E27FC236}">
-                <a16:creationId xmlns:a16="http://schemas.microsoft.com/office/drawing/2014/main" id="{7AC9A64B-C4A0-4B34-8D35-216B357F15CD}"/>
+                <a16:creationId xmlns:a16="http://schemas.microsoft.com/office/drawing/2014/main" id="{63D5C134-3041-4078-A750-FE696656B8C1}"/>
               </a:ext>
             </a:extLst>
           </p:cNvPr>
@@ -8032,7 +9340,7 @@
           <p:cNvPr id="20" name="">
             <a:extLst xmlns:a="http://schemas.openxmlformats.org/drawingml/2006/main">
               <a:ext uri="{FF2B5EF4-FFF2-40B4-BE49-F238E27FC236}">
-                <a16:creationId xmlns:a16="http://schemas.microsoft.com/office/drawing/2014/main" id="{88CC4D8A-A516-4AA8-BD92-2D7C5D869094}"/>
+                <a16:creationId xmlns:a16="http://schemas.microsoft.com/office/drawing/2014/main" id="{36A55397-6E94-40C5-ADDF-5CD4B5A84B8D}"/>
               </a:ext>
             </a:extLst>
           </p:cNvPr>
@@ -8094,7 +9402,7 @@
     </p:spTree>
     <p:extLst>
       <p:ext uri="{BB962C8B-B14F-4D97-AF65-F5344CB8AC3E}">
-        <p14:creationId xmlns:p14="http://schemas.microsoft.com/office/powerpoint/2010/main" val="1905204910"/>
+        <p14:creationId xmlns:p14="http://schemas.microsoft.com/office/powerpoint/2010/main" val="312623298"/>
       </p:ext>
     </p:extLst>
   </p:cSld>
@@ -8118,7 +9426,7 @@
           <p:cNvPr id="1" name="">
             <a:extLst xmlns:a="http://schemas.openxmlformats.org/drawingml/2006/main">
               <a:ext uri="{FF2B5EF4-FFF2-40B4-BE49-F238E27FC236}">
-                <a16:creationId xmlns:a16="http://schemas.microsoft.com/office/drawing/2014/main" id="{496912A5-7F41-4D5E-94F7-8F5AFE77D098}"/>
+                <a16:creationId xmlns:a16="http://schemas.microsoft.com/office/drawing/2014/main" id="{27291C87-C94E-4F67-99BE-1A49DE5F7B0E}"/>
               </a:ext>
             </a:extLst>
           </p:cNvPr>
@@ -8153,7 +9461,7 @@
           <p:cNvPr id="2" name="">
             <a:extLst xmlns:a="http://schemas.openxmlformats.org/drawingml/2006/main">
               <a:ext uri="{FF2B5EF4-FFF2-40B4-BE49-F238E27FC236}">
-                <a16:creationId xmlns:a16="http://schemas.microsoft.com/office/drawing/2014/main" id="{F988120C-9D73-4B9A-9BA3-CAF58929658B}"/>
+                <a16:creationId xmlns:a16="http://schemas.microsoft.com/office/drawing/2014/main" id="{5ACE43F8-A989-426E-B358-528454A8972F}"/>
               </a:ext>
             </a:extLst>
           </p:cNvPr>
@@ -8217,7 +9525,7 @@
           <p:cNvPr id="3" name="">
             <a:extLst xmlns:a="http://schemas.openxmlformats.org/drawingml/2006/main">
               <a:ext uri="{FF2B5EF4-FFF2-40B4-BE49-F238E27FC236}">
-                <a16:creationId xmlns:a16="http://schemas.microsoft.com/office/drawing/2014/main" id="{6A2414C5-E97C-4895-91E7-80FECE95D327}"/>
+                <a16:creationId xmlns:a16="http://schemas.microsoft.com/office/drawing/2014/main" id="{4809ED80-3B9B-431D-8957-0D70B202F50E}"/>
               </a:ext>
             </a:extLst>
           </p:cNvPr>
@@ -8281,7 +9589,7 @@
           <p:cNvPr id="4" name="">
             <a:extLst xmlns:a="http://schemas.openxmlformats.org/drawingml/2006/main">
               <a:ext uri="{FF2B5EF4-FFF2-40B4-BE49-F238E27FC236}">
-                <a16:creationId xmlns:a16="http://schemas.microsoft.com/office/drawing/2014/main" id="{7C1A2702-3DE3-4F67-88D2-04226D4BE1EC}"/>
+                <a16:creationId xmlns:a16="http://schemas.microsoft.com/office/drawing/2014/main" id="{14740167-4F06-4006-93D4-6096683156F7}"/>
               </a:ext>
             </a:extLst>
           </p:cNvPr>
@@ -8316,7 +9624,7 @@
           <p:cNvPr id="5" name="">
             <a:extLst xmlns:a="http://schemas.openxmlformats.org/drawingml/2006/main">
               <a:ext uri="{FF2B5EF4-FFF2-40B4-BE49-F238E27FC236}">
-                <a16:creationId xmlns:a16="http://schemas.microsoft.com/office/drawing/2014/main" id="{5833CCD4-4C54-49DC-B8AE-229CDA3B4C2C}"/>
+                <a16:creationId xmlns:a16="http://schemas.microsoft.com/office/drawing/2014/main" id="{17BF6E5C-0879-423A-A9FF-781CE3D71EB4}"/>
               </a:ext>
             </a:extLst>
           </p:cNvPr>
@@ -8384,7 +9692,7 @@
           <p:nvPr/>
         </p:nvPicPr>
         <p:blipFill>
-          <a:blip xmlns:r="http://schemas.openxmlformats.org/officeDocument/2006/relationships" xmlns:a="http://schemas.openxmlformats.org/drawingml/2006/main" r:embed="Rc3d4330dec03475e"/>
+          <a:blip xmlns:r="http://schemas.openxmlformats.org/officeDocument/2006/relationships" xmlns:a="http://schemas.openxmlformats.org/drawingml/2006/main" r:embed="R6ecd496213d24fb0"/>
           <a:srcRect xmlns:a="http://schemas.openxmlformats.org/drawingml/2006/main" l="893" t="0" r="893" b="0"/>
           <a:stretch xmlns:a="http://schemas.openxmlformats.org/drawingml/2006/main">
             <a:fillRect l="0" t="0" r="0" b="0"/>
@@ -8405,7 +9713,7 @@
           <p:cNvPr id="7" name="">
             <a:extLst xmlns:a="http://schemas.openxmlformats.org/drawingml/2006/main">
               <a:ext uri="{FF2B5EF4-FFF2-40B4-BE49-F238E27FC236}">
-                <a16:creationId xmlns:a16="http://schemas.microsoft.com/office/drawing/2014/main" id="{446D1B4C-BA07-4B42-911F-0595B34B8BF3}"/>
+                <a16:creationId xmlns:a16="http://schemas.microsoft.com/office/drawing/2014/main" id="{4437125F-612E-4F8E-8DEC-51EE9F1F04FA}"/>
               </a:ext>
             </a:extLst>
           </p:cNvPr>
@@ -8473,7 +9781,7 @@
           <p:nvPr/>
         </p:nvPicPr>
         <p:blipFill>
-          <a:blip xmlns:r="http://schemas.openxmlformats.org/officeDocument/2006/relationships" xmlns:a="http://schemas.openxmlformats.org/drawingml/2006/main" r:embed="R22481483600c4ee4"/>
+          <a:blip xmlns:r="http://schemas.openxmlformats.org/officeDocument/2006/relationships" xmlns:a="http://schemas.openxmlformats.org/drawingml/2006/main" r:embed="R135fff15647c4f15"/>
           <a:srcRect xmlns:a="http://schemas.openxmlformats.org/drawingml/2006/main" l="893" t="0" r="893" b="0"/>
           <a:stretch xmlns:a="http://schemas.openxmlformats.org/drawingml/2006/main">
             <a:fillRect l="0" t="0" r="0" b="0"/>
@@ -8494,7 +9802,7 @@
           <p:cNvPr id="9" name="">
             <a:extLst xmlns:a="http://schemas.openxmlformats.org/drawingml/2006/main">
               <a:ext uri="{FF2B5EF4-FFF2-40B4-BE49-F238E27FC236}">
-                <a16:creationId xmlns:a16="http://schemas.microsoft.com/office/drawing/2014/main" id="{C34967A3-DD76-41D5-874E-85878BCA8B33}"/>
+                <a16:creationId xmlns:a16="http://schemas.microsoft.com/office/drawing/2014/main" id="{623A69DE-1C68-4C0C-A64E-EEA594B4B1DE}"/>
               </a:ext>
             </a:extLst>
           </p:cNvPr>
@@ -8527,7 +9835,7 @@
           <p:cNvPr id="10" name="">
             <a:extLst xmlns:a="http://schemas.openxmlformats.org/drawingml/2006/main">
               <a:ext uri="{FF2B5EF4-FFF2-40B4-BE49-F238E27FC236}">
-                <a16:creationId xmlns:a16="http://schemas.microsoft.com/office/drawing/2014/main" id="{BC6B39B4-E02C-4760-886E-93A25F266848}"/>
+                <a16:creationId xmlns:a16="http://schemas.microsoft.com/office/drawing/2014/main" id="{01B75792-7A22-4971-9396-AFF4100B6A1F}"/>
               </a:ext>
             </a:extLst>
           </p:cNvPr>
@@ -8591,7 +9899,7 @@
           <p:cNvPr id="11" name="">
             <a:extLst xmlns:a="http://schemas.openxmlformats.org/drawingml/2006/main">
               <a:ext uri="{FF2B5EF4-FFF2-40B4-BE49-F238E27FC236}">
-                <a16:creationId xmlns:a16="http://schemas.microsoft.com/office/drawing/2014/main" id="{694902FD-5E04-454F-8318-BB2100314DB1}"/>
+                <a16:creationId xmlns:a16="http://schemas.microsoft.com/office/drawing/2014/main" id="{CFA5A643-2917-4CE6-896A-4337A7DC82DB}"/>
               </a:ext>
             </a:extLst>
           </p:cNvPr>
@@ -8624,7 +9932,7 @@
           <p:cNvPr id="12" name="">
             <a:extLst xmlns:a="http://schemas.openxmlformats.org/drawingml/2006/main">
               <a:ext uri="{FF2B5EF4-FFF2-40B4-BE49-F238E27FC236}">
-                <a16:creationId xmlns:a16="http://schemas.microsoft.com/office/drawing/2014/main" id="{BBFCCF71-115B-4F7E-9E57-F2575D8E3D93}"/>
+                <a16:creationId xmlns:a16="http://schemas.microsoft.com/office/drawing/2014/main" id="{06DDE3D8-F9BF-442F-84BB-F52B0722BBC9}"/>
               </a:ext>
             </a:extLst>
           </p:cNvPr>
@@ -8688,7 +9996,7 @@
           <p:cNvPr id="13" name="">
             <a:extLst xmlns:a="http://schemas.openxmlformats.org/drawingml/2006/main">
               <a:ext uri="{FF2B5EF4-FFF2-40B4-BE49-F238E27FC236}">
-                <a16:creationId xmlns:a16="http://schemas.microsoft.com/office/drawing/2014/main" id="{50F58E25-87CF-48A9-BB7D-651575341A23}"/>
+                <a16:creationId xmlns:a16="http://schemas.microsoft.com/office/drawing/2014/main" id="{266949D3-1682-45D1-9FA8-E6DCBD711BF6}"/>
               </a:ext>
             </a:extLst>
           </p:cNvPr>
@@ -8721,7 +10029,7 @@
           <p:cNvPr id="14" name="">
             <a:extLst xmlns:a="http://schemas.openxmlformats.org/drawingml/2006/main">
               <a:ext uri="{FF2B5EF4-FFF2-40B4-BE49-F238E27FC236}">
-                <a16:creationId xmlns:a16="http://schemas.microsoft.com/office/drawing/2014/main" id="{63A6C9A0-02EF-42AD-8BCB-D6B8110A243F}"/>
+                <a16:creationId xmlns:a16="http://schemas.microsoft.com/office/drawing/2014/main" id="{8C6948A0-DF17-4349-92A6-E41047489960}"/>
               </a:ext>
             </a:extLst>
           </p:cNvPr>
@@ -8785,7 +10093,7 @@
           <p:cNvPr id="15" name="">
             <a:extLst xmlns:a="http://schemas.openxmlformats.org/drawingml/2006/main">
               <a:ext uri="{FF2B5EF4-FFF2-40B4-BE49-F238E27FC236}">
-                <a16:creationId xmlns:a16="http://schemas.microsoft.com/office/drawing/2014/main" id="{DBE8AAA5-7CA0-4AD1-9F94-90AF4234E043}"/>
+                <a16:creationId xmlns:a16="http://schemas.microsoft.com/office/drawing/2014/main" id="{3B0A0375-79E5-4ADA-9C56-6BC5DD9B8FB4}"/>
               </a:ext>
             </a:extLst>
           </p:cNvPr>
@@ -8849,7 +10157,7 @@
           <p:cNvPr id="16" name="">
             <a:extLst xmlns:a="http://schemas.openxmlformats.org/drawingml/2006/main">
               <a:ext uri="{FF2B5EF4-FFF2-40B4-BE49-F238E27FC236}">
-                <a16:creationId xmlns:a16="http://schemas.microsoft.com/office/drawing/2014/main" id="{EE9B5D53-C29F-47AA-9E88-D05B85527C92}"/>
+                <a16:creationId xmlns:a16="http://schemas.microsoft.com/office/drawing/2014/main" id="{E91AEE0F-4C23-4671-859C-5AA0277BE8B6}"/>
               </a:ext>
             </a:extLst>
           </p:cNvPr>
@@ -8911,7 +10219,7 @@
     </p:spTree>
     <p:extLst>
       <p:ext uri="{BB962C8B-B14F-4D97-AF65-F5344CB8AC3E}">
-        <p14:creationId xmlns:p14="http://schemas.microsoft.com/office/powerpoint/2010/main" val="1152056078"/>
+        <p14:creationId xmlns:p14="http://schemas.microsoft.com/office/powerpoint/2010/main" val="412137078"/>
       </p:ext>
     </p:extLst>
   </p:cSld>
@@ -8935,7 +10243,7 @@
           <p:cNvPr id="1" name="">
             <a:extLst xmlns:a="http://schemas.openxmlformats.org/drawingml/2006/main">
               <a:ext uri="{FF2B5EF4-FFF2-40B4-BE49-F238E27FC236}">
-                <a16:creationId xmlns:a16="http://schemas.microsoft.com/office/drawing/2014/main" id="{87D9CB41-586F-459E-A5F8-24A89B6482EE}"/>
+                <a16:creationId xmlns:a16="http://schemas.microsoft.com/office/drawing/2014/main" id="{77D5D8EF-5787-4F9D-8B4A-6CBD33DAA354}"/>
               </a:ext>
             </a:extLst>
           </p:cNvPr>
@@ -8970,7 +10278,7 @@
           <p:cNvPr id="2" name="">
             <a:extLst xmlns:a="http://schemas.openxmlformats.org/drawingml/2006/main">
               <a:ext uri="{FF2B5EF4-FFF2-40B4-BE49-F238E27FC236}">
-                <a16:creationId xmlns:a16="http://schemas.microsoft.com/office/drawing/2014/main" id="{2DD29D07-4EA0-4E4D-AEF2-6FBDAAA5ADA7}"/>
+                <a16:creationId xmlns:a16="http://schemas.microsoft.com/office/drawing/2014/main" id="{C9F55417-6C53-4F32-B469-B487779695B3}"/>
               </a:ext>
             </a:extLst>
           </p:cNvPr>
@@ -9034,7 +10342,7 @@
           <p:cNvPr id="3" name="">
             <a:extLst xmlns:a="http://schemas.openxmlformats.org/drawingml/2006/main">
               <a:ext uri="{FF2B5EF4-FFF2-40B4-BE49-F238E27FC236}">
-                <a16:creationId xmlns:a16="http://schemas.microsoft.com/office/drawing/2014/main" id="{A7C4FF60-DA01-4323-877A-E1A2B9A0FF9B}"/>
+                <a16:creationId xmlns:a16="http://schemas.microsoft.com/office/drawing/2014/main" id="{A0F1DAE3-A6E1-4A03-BDF0-D4C4E9D6D7D4}"/>
               </a:ext>
             </a:extLst>
           </p:cNvPr>
@@ -9098,7 +10406,7 @@
           <p:cNvPr id="4" name="">
             <a:extLst xmlns:a="http://schemas.openxmlformats.org/drawingml/2006/main">
               <a:ext uri="{FF2B5EF4-FFF2-40B4-BE49-F238E27FC236}">
-                <a16:creationId xmlns:a16="http://schemas.microsoft.com/office/drawing/2014/main" id="{9CEB0712-8BE8-4CBF-8142-08AE2E07504F}"/>
+                <a16:creationId xmlns:a16="http://schemas.microsoft.com/office/drawing/2014/main" id="{4B62750A-FD94-4415-A5A6-CBEB2BFC3B42}"/>
               </a:ext>
             </a:extLst>
           </p:cNvPr>
@@ -9137,7 +10445,7 @@
           <p:nvPr/>
         </p:nvPicPr>
         <p:blipFill>
-          <a:blip xmlns:r="http://schemas.openxmlformats.org/officeDocument/2006/relationships" xmlns:a="http://schemas.openxmlformats.org/drawingml/2006/main" r:embed="Rda95cf479de548c7"/>
+          <a:blip xmlns:r="http://schemas.openxmlformats.org/officeDocument/2006/relationships" xmlns:a="http://schemas.openxmlformats.org/drawingml/2006/main" r:embed="Rf6a32bbffea84e9b"/>
           <a:srcRect xmlns:a="http://schemas.openxmlformats.org/drawingml/2006/main" l="2762" t="0" r="2762" b="0"/>
           <a:stretch xmlns:a="http://schemas.openxmlformats.org/drawingml/2006/main">
             <a:fillRect l="0" t="0" r="0" b="0"/>
@@ -9158,7 +10466,7 @@
           <p:cNvPr id="6" name="">
             <a:extLst xmlns:a="http://schemas.openxmlformats.org/drawingml/2006/main">
               <a:ext uri="{FF2B5EF4-FFF2-40B4-BE49-F238E27FC236}">
-                <a16:creationId xmlns:a16="http://schemas.microsoft.com/office/drawing/2014/main" id="{78AF31A5-F082-41A9-86BF-934A649E3BBD}"/>
+                <a16:creationId xmlns:a16="http://schemas.microsoft.com/office/drawing/2014/main" id="{897C1013-4879-4D8A-AEA5-6D98E81124FD}"/>
               </a:ext>
             </a:extLst>
           </p:cNvPr>
@@ -9222,7 +10530,7 @@
           <p:cNvPr id="7" name="">
             <a:extLst xmlns:a="http://schemas.openxmlformats.org/drawingml/2006/main">
               <a:ext uri="{FF2B5EF4-FFF2-40B4-BE49-F238E27FC236}">
-                <a16:creationId xmlns:a16="http://schemas.microsoft.com/office/drawing/2014/main" id="{E18C0A1E-5828-4F64-AF2F-73AE31B8705B}"/>
+                <a16:creationId xmlns:a16="http://schemas.microsoft.com/office/drawing/2014/main" id="{2BA26204-6F7E-47BB-88E6-290725D6E7B7}"/>
               </a:ext>
             </a:extLst>
           </p:cNvPr>
@@ -9257,7 +10565,7 @@
           <p:cNvPr id="8" name="">
             <a:extLst xmlns:a="http://schemas.openxmlformats.org/drawingml/2006/main">
               <a:ext uri="{FF2B5EF4-FFF2-40B4-BE49-F238E27FC236}">
-                <a16:creationId xmlns:a16="http://schemas.microsoft.com/office/drawing/2014/main" id="{4CCB73E8-EEBD-40DA-8A5E-99D2C954AA9B}"/>
+                <a16:creationId xmlns:a16="http://schemas.microsoft.com/office/drawing/2014/main" id="{E0496AD0-CB2A-40B7-80BC-14D4A24821AD}"/>
               </a:ext>
             </a:extLst>
           </p:cNvPr>
@@ -9321,7 +10629,7 @@
           <p:cNvPr id="9" name="">
             <a:extLst xmlns:a="http://schemas.openxmlformats.org/drawingml/2006/main">
               <a:ext uri="{FF2B5EF4-FFF2-40B4-BE49-F238E27FC236}">
-                <a16:creationId xmlns:a16="http://schemas.microsoft.com/office/drawing/2014/main" id="{13AB371C-02E2-4244-AAF2-7849CAD1429D}"/>
+                <a16:creationId xmlns:a16="http://schemas.microsoft.com/office/drawing/2014/main" id="{B4419760-6DB9-4644-B86E-006C22011FEB}"/>
               </a:ext>
             </a:extLst>
           </p:cNvPr>
@@ -9385,7 +10693,7 @@
           <p:cNvPr id="10" name="">
             <a:extLst xmlns:a="http://schemas.openxmlformats.org/drawingml/2006/main">
               <a:ext uri="{FF2B5EF4-FFF2-40B4-BE49-F238E27FC236}">
-                <a16:creationId xmlns:a16="http://schemas.microsoft.com/office/drawing/2014/main" id="{9F363653-58EE-48A1-82F4-B678E0821D24}"/>
+                <a16:creationId xmlns:a16="http://schemas.microsoft.com/office/drawing/2014/main" id="{3D15FD18-36CE-4DE0-A887-B1FF62FC98FF}"/>
               </a:ext>
             </a:extLst>
           </p:cNvPr>
@@ -9420,7 +10728,7 @@
           <p:cNvPr id="11" name="">
             <a:extLst xmlns:a="http://schemas.openxmlformats.org/drawingml/2006/main">
               <a:ext uri="{FF2B5EF4-FFF2-40B4-BE49-F238E27FC236}">
-                <a16:creationId xmlns:a16="http://schemas.microsoft.com/office/drawing/2014/main" id="{7133900B-E63E-48F3-B87E-6F549D16A086}"/>
+                <a16:creationId xmlns:a16="http://schemas.microsoft.com/office/drawing/2014/main" id="{B04D1CFD-1710-4B52-8666-CBFF28A17065}"/>
               </a:ext>
             </a:extLst>
           </p:cNvPr>
@@ -9484,7 +10792,7 @@
           <p:cNvPr id="12" name="">
             <a:extLst xmlns:a="http://schemas.openxmlformats.org/drawingml/2006/main">
               <a:ext uri="{FF2B5EF4-FFF2-40B4-BE49-F238E27FC236}">
-                <a16:creationId xmlns:a16="http://schemas.microsoft.com/office/drawing/2014/main" id="{C6691D16-E3FF-4203-AB36-B0559C163344}"/>
+                <a16:creationId xmlns:a16="http://schemas.microsoft.com/office/drawing/2014/main" id="{A28A8A44-E237-4FDC-8B40-E05362CD18A6}"/>
               </a:ext>
             </a:extLst>
           </p:cNvPr>
@@ -9548,7 +10856,7 @@
           <p:cNvPr id="13" name="">
             <a:extLst xmlns:a="http://schemas.openxmlformats.org/drawingml/2006/main">
               <a:ext uri="{FF2B5EF4-FFF2-40B4-BE49-F238E27FC236}">
-                <a16:creationId xmlns:a16="http://schemas.microsoft.com/office/drawing/2014/main" id="{0D14630C-27A0-46A4-AC48-C73414E1248B}"/>
+                <a16:creationId xmlns:a16="http://schemas.microsoft.com/office/drawing/2014/main" id="{48044490-5D76-447B-A392-F16FEACA3160}"/>
               </a:ext>
             </a:extLst>
           </p:cNvPr>
@@ -9583,7 +10891,7 @@
           <p:cNvPr id="14" name="">
             <a:extLst xmlns:a="http://schemas.openxmlformats.org/drawingml/2006/main">
               <a:ext uri="{FF2B5EF4-FFF2-40B4-BE49-F238E27FC236}">
-                <a16:creationId xmlns:a16="http://schemas.microsoft.com/office/drawing/2014/main" id="{5617E528-03ED-47AD-8A3C-BE8D03F24D68}"/>
+                <a16:creationId xmlns:a16="http://schemas.microsoft.com/office/drawing/2014/main" id="{045C9453-7D2B-4239-A85D-099308DADE50}"/>
               </a:ext>
             </a:extLst>
           </p:cNvPr>
@@ -9647,7 +10955,7 @@
           <p:cNvPr id="15" name="">
             <a:extLst xmlns:a="http://schemas.openxmlformats.org/drawingml/2006/main">
               <a:ext uri="{FF2B5EF4-FFF2-40B4-BE49-F238E27FC236}">
-                <a16:creationId xmlns:a16="http://schemas.microsoft.com/office/drawing/2014/main" id="{643D6965-B6B6-4109-B584-96D7A23ACF41}"/>
+                <a16:creationId xmlns:a16="http://schemas.microsoft.com/office/drawing/2014/main" id="{62F3C931-1A5F-4061-AFE9-7EA202B02BC3}"/>
               </a:ext>
             </a:extLst>
           </p:cNvPr>
@@ -9711,7 +11019,7 @@
           <p:cNvPr id="16" name="">
             <a:extLst xmlns:a="http://schemas.openxmlformats.org/drawingml/2006/main">
               <a:ext uri="{FF2B5EF4-FFF2-40B4-BE49-F238E27FC236}">
-                <a16:creationId xmlns:a16="http://schemas.microsoft.com/office/drawing/2014/main" id="{37632FA4-CDCE-4E97-9247-A0BE866C6603}"/>
+                <a16:creationId xmlns:a16="http://schemas.microsoft.com/office/drawing/2014/main" id="{61BC14AE-35C9-4942-9534-8A6B8EF52245}"/>
               </a:ext>
             </a:extLst>
           </p:cNvPr>
@@ -9746,7 +11054,7 @@
           <p:cNvPr id="17" name="">
             <a:extLst xmlns:a="http://schemas.openxmlformats.org/drawingml/2006/main">
               <a:ext uri="{FF2B5EF4-FFF2-40B4-BE49-F238E27FC236}">
-                <a16:creationId xmlns:a16="http://schemas.microsoft.com/office/drawing/2014/main" id="{6DFF8F20-606D-4AA8-B1FD-5BA0D528F043}"/>
+                <a16:creationId xmlns:a16="http://schemas.microsoft.com/office/drawing/2014/main" id="{F9A3C842-0353-464D-A0B3-4120F87EEA16}"/>
               </a:ext>
             </a:extLst>
           </p:cNvPr>
@@ -9810,7 +11118,7 @@
           <p:cNvPr id="18" name="">
             <a:extLst xmlns:a="http://schemas.openxmlformats.org/drawingml/2006/main">
               <a:ext uri="{FF2B5EF4-FFF2-40B4-BE49-F238E27FC236}">
-                <a16:creationId xmlns:a16="http://schemas.microsoft.com/office/drawing/2014/main" id="{A6296D08-F2D6-429B-BCE4-6413B5689FC2}"/>
+                <a16:creationId xmlns:a16="http://schemas.microsoft.com/office/drawing/2014/main" id="{1E671544-24C2-4A56-BF66-85B0FFBD4F21}"/>
               </a:ext>
             </a:extLst>
           </p:cNvPr>
@@ -9874,7 +11182,7 @@
           <p:cNvPr id="19" name="">
             <a:extLst xmlns:a="http://schemas.openxmlformats.org/drawingml/2006/main">
               <a:ext uri="{FF2B5EF4-FFF2-40B4-BE49-F238E27FC236}">
-                <a16:creationId xmlns:a16="http://schemas.microsoft.com/office/drawing/2014/main" id="{F7409CD2-59F7-4D8B-939D-821B0EA03E3A}"/>
+                <a16:creationId xmlns:a16="http://schemas.microsoft.com/office/drawing/2014/main" id="{76CB72F9-BE0F-470E-A6F7-413C0ADCCFF1}"/>
               </a:ext>
             </a:extLst>
           </p:cNvPr>
@@ -9909,7 +11217,7 @@
           <p:cNvPr id="20" name="">
             <a:extLst xmlns:a="http://schemas.openxmlformats.org/drawingml/2006/main">
               <a:ext uri="{FF2B5EF4-FFF2-40B4-BE49-F238E27FC236}">
-                <a16:creationId xmlns:a16="http://schemas.microsoft.com/office/drawing/2014/main" id="{07225C19-2E56-45A0-AF25-5A6B30234D8D}"/>
+                <a16:creationId xmlns:a16="http://schemas.microsoft.com/office/drawing/2014/main" id="{AA00CC75-1DC6-4A19-8E4F-7ED5DB9786AC}"/>
               </a:ext>
             </a:extLst>
           </p:cNvPr>
@@ -9973,7 +11281,7 @@
           <p:cNvPr id="21" name="">
             <a:extLst xmlns:a="http://schemas.openxmlformats.org/drawingml/2006/main">
               <a:ext uri="{FF2B5EF4-FFF2-40B4-BE49-F238E27FC236}">
-                <a16:creationId xmlns:a16="http://schemas.microsoft.com/office/drawing/2014/main" id="{93356F3C-8848-4A1D-805F-B8E9FD211959}"/>
+                <a16:creationId xmlns:a16="http://schemas.microsoft.com/office/drawing/2014/main" id="{2C1F0481-A041-465D-9524-9E95D3C1923E}"/>
               </a:ext>
             </a:extLst>
           </p:cNvPr>
@@ -10037,7 +11345,7 @@
           <p:cNvPr id="22" name="">
             <a:extLst xmlns:a="http://schemas.openxmlformats.org/drawingml/2006/main">
               <a:ext uri="{FF2B5EF4-FFF2-40B4-BE49-F238E27FC236}">
-                <a16:creationId xmlns:a16="http://schemas.microsoft.com/office/drawing/2014/main" id="{AE52280A-16AC-4A1B-890F-322C8935A731}"/>
+                <a16:creationId xmlns:a16="http://schemas.microsoft.com/office/drawing/2014/main" id="{7241496A-637E-4654-B873-0F8E737FEAE9}"/>
               </a:ext>
             </a:extLst>
           </p:cNvPr>
@@ -10070,7 +11378,7 @@
           <p:cNvPr id="23" name="">
             <a:extLst xmlns:a="http://schemas.openxmlformats.org/drawingml/2006/main">
               <a:ext uri="{FF2B5EF4-FFF2-40B4-BE49-F238E27FC236}">
-                <a16:creationId xmlns:a16="http://schemas.microsoft.com/office/drawing/2014/main" id="{3321FF7D-F640-4C28-B501-CDE2A3E6AE63}"/>
+                <a16:creationId xmlns:a16="http://schemas.microsoft.com/office/drawing/2014/main" id="{3A31B8E3-3BE2-454A-BE5C-61355389DF22}"/>
               </a:ext>
             </a:extLst>
           </p:cNvPr>
@@ -10134,7 +11442,7 @@
           <p:cNvPr id="24" name="">
             <a:extLst xmlns:a="http://schemas.openxmlformats.org/drawingml/2006/main">
               <a:ext uri="{FF2B5EF4-FFF2-40B4-BE49-F238E27FC236}">
-                <a16:creationId xmlns:a16="http://schemas.microsoft.com/office/drawing/2014/main" id="{9D8552F1-F084-42F7-A0F1-26C056072805}"/>
+                <a16:creationId xmlns:a16="http://schemas.microsoft.com/office/drawing/2014/main" id="{2660CF19-278D-4DF2-9092-5200A587094B}"/>
               </a:ext>
             </a:extLst>
           </p:cNvPr>
@@ -10169,7 +11477,7 @@
           <p:cNvPr id="25" name="">
             <a:extLst xmlns:a="http://schemas.openxmlformats.org/drawingml/2006/main">
               <a:ext uri="{FF2B5EF4-FFF2-40B4-BE49-F238E27FC236}">
-                <a16:creationId xmlns:a16="http://schemas.microsoft.com/office/drawing/2014/main" id="{C3367191-AAF1-4EBB-AD02-7707868B05B0}"/>
+                <a16:creationId xmlns:a16="http://schemas.microsoft.com/office/drawing/2014/main" id="{8D9C4CCA-38E9-4891-8C0F-A0C28871D03B}"/>
               </a:ext>
             </a:extLst>
           </p:cNvPr>
@@ -10233,7 +11541,7 @@
           <p:cNvPr id="26" name="">
             <a:extLst xmlns:a="http://schemas.openxmlformats.org/drawingml/2006/main">
               <a:ext uri="{FF2B5EF4-FFF2-40B4-BE49-F238E27FC236}">
-                <a16:creationId xmlns:a16="http://schemas.microsoft.com/office/drawing/2014/main" id="{0A841321-7506-4808-B568-9B2C1829B0CD}"/>
+                <a16:creationId xmlns:a16="http://schemas.microsoft.com/office/drawing/2014/main" id="{9EB3DD4E-95DA-40B9-9CE2-1F956A03E732}"/>
               </a:ext>
             </a:extLst>
           </p:cNvPr>
@@ -10268,7 +11576,7 @@
           <p:cNvPr id="27" name="">
             <a:extLst xmlns:a="http://schemas.openxmlformats.org/drawingml/2006/main">
               <a:ext uri="{FF2B5EF4-FFF2-40B4-BE49-F238E27FC236}">
-                <a16:creationId xmlns:a16="http://schemas.microsoft.com/office/drawing/2014/main" id="{AC2E897B-64D2-4F36-9D52-56B2A0CBDAA3}"/>
+                <a16:creationId xmlns:a16="http://schemas.microsoft.com/office/drawing/2014/main" id="{8FC774F5-10DA-498D-9029-BE22F88CFA62}"/>
               </a:ext>
             </a:extLst>
           </p:cNvPr>
@@ -10332,7 +11640,7 @@
           <p:cNvPr id="28" name="">
             <a:extLst xmlns:a="http://schemas.openxmlformats.org/drawingml/2006/main">
               <a:ext uri="{FF2B5EF4-FFF2-40B4-BE49-F238E27FC236}">
-                <a16:creationId xmlns:a16="http://schemas.microsoft.com/office/drawing/2014/main" id="{67CEA3F5-45B3-4DF8-9495-FF30639E665A}"/>
+                <a16:creationId xmlns:a16="http://schemas.microsoft.com/office/drawing/2014/main" id="{A90D35D3-E841-4A96-8D15-3B4DB08E6E6A}"/>
               </a:ext>
             </a:extLst>
           </p:cNvPr>
@@ -10367,7 +11675,7 @@
           <p:cNvPr id="29" name="">
             <a:extLst xmlns:a="http://schemas.openxmlformats.org/drawingml/2006/main">
               <a:ext uri="{FF2B5EF4-FFF2-40B4-BE49-F238E27FC236}">
-                <a16:creationId xmlns:a16="http://schemas.microsoft.com/office/drawing/2014/main" id="{E2C9485E-DC91-4B3D-8D40-FBEEB09D8B57}"/>
+                <a16:creationId xmlns:a16="http://schemas.microsoft.com/office/drawing/2014/main" id="{4FE97548-FB85-4EFB-A3DE-0A3EF504FBB9}"/>
               </a:ext>
             </a:extLst>
           </p:cNvPr>
@@ -10431,7 +11739,7 @@
           <p:cNvPr id="30" name="">
             <a:extLst xmlns:a="http://schemas.openxmlformats.org/drawingml/2006/main">
               <a:ext uri="{FF2B5EF4-FFF2-40B4-BE49-F238E27FC236}">
-                <a16:creationId xmlns:a16="http://schemas.microsoft.com/office/drawing/2014/main" id="{111FC809-6987-400D-9C9C-1012DB08F25D}"/>
+                <a16:creationId xmlns:a16="http://schemas.microsoft.com/office/drawing/2014/main" id="{252E2BD1-539A-4B9E-AB45-1095013242C4}"/>
               </a:ext>
             </a:extLst>
           </p:cNvPr>
@@ -10495,7 +11803,7 @@
           <p:cNvPr id="31" name="">
             <a:extLst xmlns:a="http://schemas.openxmlformats.org/drawingml/2006/main">
               <a:ext uri="{FF2B5EF4-FFF2-40B4-BE49-F238E27FC236}">
-                <a16:creationId xmlns:a16="http://schemas.microsoft.com/office/drawing/2014/main" id="{74086AEA-9FAE-48AF-9925-C66E95DDA6F1}"/>
+                <a16:creationId xmlns:a16="http://schemas.microsoft.com/office/drawing/2014/main" id="{41F9FB2B-4CF3-49DE-9046-E2BB4B951F1A}"/>
               </a:ext>
             </a:extLst>
           </p:cNvPr>
@@ -10557,7 +11865,7 @@
     </p:spTree>
     <p:extLst>
       <p:ext uri="{BB962C8B-B14F-4D97-AF65-F5344CB8AC3E}">
-        <p14:creationId xmlns:p14="http://schemas.microsoft.com/office/powerpoint/2010/main" val="751458355"/>
+        <p14:creationId xmlns:p14="http://schemas.microsoft.com/office/powerpoint/2010/main" val="990164065"/>
       </p:ext>
     </p:extLst>
   </p:cSld>
@@ -10581,7 +11889,7 @@
           <p:cNvPr id="1" name="">
             <a:extLst xmlns:a="http://schemas.openxmlformats.org/drawingml/2006/main">
               <a:ext uri="{FF2B5EF4-FFF2-40B4-BE49-F238E27FC236}">
-                <a16:creationId xmlns:a16="http://schemas.microsoft.com/office/drawing/2014/main" id="{ADA527F0-7CFB-455A-9DBF-15BB41331FF6}"/>
+                <a16:creationId xmlns:a16="http://schemas.microsoft.com/office/drawing/2014/main" id="{7CBDDDFF-5F90-4935-8DD5-2E5201FA2E32}"/>
               </a:ext>
             </a:extLst>
           </p:cNvPr>
@@ -10616,7 +11924,7 @@
           <p:cNvPr id="2" name="">
             <a:extLst xmlns:a="http://schemas.openxmlformats.org/drawingml/2006/main">
               <a:ext uri="{FF2B5EF4-FFF2-40B4-BE49-F238E27FC236}">
-                <a16:creationId xmlns:a16="http://schemas.microsoft.com/office/drawing/2014/main" id="{E0CA0719-6172-4320-99DE-786664E11EFC}"/>
+                <a16:creationId xmlns:a16="http://schemas.microsoft.com/office/drawing/2014/main" id="{3B13FE02-53AF-427F-9EDA-99B4212C0CC6}"/>
               </a:ext>
             </a:extLst>
           </p:cNvPr>
@@ -10670,7 +11978,7 @@
                 <a:ea typeface="Aptos"/>
                 <a:cs typeface="Aptos"/>
               </a:rPr>
-              <a:t>결과 요약 및 향후 보완</a:t>
+              <a:t>핵심 화면 확대 검증</a:t>
             </a:r>
           </a:p>
         </p:txBody>
@@ -10680,7 +11988,7 @@
           <p:cNvPr id="3" name="">
             <a:extLst xmlns:a="http://schemas.openxmlformats.org/drawingml/2006/main">
               <a:ext uri="{FF2B5EF4-FFF2-40B4-BE49-F238E27FC236}">
-                <a16:creationId xmlns:a16="http://schemas.microsoft.com/office/drawing/2014/main" id="{A63351C8-2F23-44BF-BB65-57FADF513251}"/>
+                <a16:creationId xmlns:a16="http://schemas.microsoft.com/office/drawing/2014/main" id="{E9AC3686-D31B-414E-A4BC-AC80EE256B49}"/>
               </a:ext>
             </a:extLst>
           </p:cNvPr>
@@ -10734,7 +12042,7 @@
                 <a:ea typeface="Aptos"/>
                 <a:cs typeface="Aptos"/>
               </a:rPr>
-              <a:t>핵심 데모 흐름은 구현 완료, 실장비 검증과 UX 다듬기가 다음 단계</a:t>
+              <a:t>발표장에서 읽히도록 실제 캡처의 증거 영역을 확대</a:t>
             </a:r>
           </a:p>
         </p:txBody>
@@ -10744,7 +12052,7 @@
           <p:cNvPr id="4" name="">
             <a:extLst xmlns:a="http://schemas.openxmlformats.org/drawingml/2006/main">
               <a:ext uri="{FF2B5EF4-FFF2-40B4-BE49-F238E27FC236}">
-                <a16:creationId xmlns:a16="http://schemas.microsoft.com/office/drawing/2014/main" id="{AEB948AD-4ADC-4DE7-9937-89768EA27885}"/>
+                <a16:creationId xmlns:a16="http://schemas.microsoft.com/office/drawing/2014/main" id="{60A5F488-15CD-49A4-BC6C-805E3783D372}"/>
               </a:ext>
             </a:extLst>
           </p:cNvPr>
@@ -10779,54 +12087,19 @@
           <p:cNvPr id="5" name="">
             <a:extLst xmlns:a="http://schemas.openxmlformats.org/drawingml/2006/main">
               <a:ext uri="{FF2B5EF4-FFF2-40B4-BE49-F238E27FC236}">
-                <a16:creationId xmlns:a16="http://schemas.microsoft.com/office/drawing/2014/main" id="{DA9DF516-0EA3-4629-94F2-BA10028FDA7F}"/>
-              </a:ext>
-            </a:extLst>
-          </p:cNvPr>
-          <p:cNvSpPr>
-            <a:spLocks xmlns:a="http://schemas.openxmlformats.org/drawingml/2006/main" noGrp="1"/>
-          </p:cNvSpPr>
-          <p:nvPr/>
-        </p:nvSpPr>
-        <p:spPr>
-          <a:xfrm xmlns:a="http://schemas.openxmlformats.org/drawingml/2006/main">
-            <a:off x="666750" y="1485900"/>
-            <a:ext cx="10363200" cy="457200"/>
-          </a:xfrm>
-          <a:prstGeom xmlns:a="http://schemas.openxmlformats.org/drawingml/2006/main" prst="rect">
-            <a:avLst/>
-          </a:prstGeom>
-          <a:solidFill xmlns:a="http://schemas.openxmlformats.org/drawingml/2006/main">
-            <a:srgbClr val="0B1220"/>
-          </a:solidFill>
-          <a:ln xmlns:a="http://schemas.openxmlformats.org/drawingml/2006/main" w="0">
-            <a:solidFill>
-              <a:srgbClr val="000000">
-                <a:alpha val="0"/>
-              </a:srgbClr>
-            </a:solidFill>
-            <a:prstDash val="solid"/>
-          </a:ln>
-        </p:spPr>
-      </p:sp>
-      <p:sp>
-        <p:nvSpPr>
-          <p:cNvPr id="6" name="">
-            <a:extLst xmlns:a="http://schemas.openxmlformats.org/drawingml/2006/main">
-              <a:ext uri="{FF2B5EF4-FFF2-40B4-BE49-F238E27FC236}">
-                <a16:creationId xmlns:a16="http://schemas.microsoft.com/office/drawing/2014/main" id="{190D7259-2CF2-4DA3-A29C-479632A20B7E}"/>
-              </a:ext>
-            </a:extLst>
-          </p:cNvPr>
-          <p:cNvSpPr>
-            <a:spLocks xmlns:a="http://schemas.openxmlformats.org/drawingml/2006/main" noGrp="1"/>
-          </p:cNvSpPr>
-          <p:nvPr/>
-        </p:nvSpPr>
-        <p:spPr>
-          <a:xfrm xmlns:a="http://schemas.openxmlformats.org/drawingml/2006/main">
-            <a:off x="819150" y="1628775"/>
-            <a:ext cx="1714500" cy="171450"/>
+                <a16:creationId xmlns:a16="http://schemas.microsoft.com/office/drawing/2014/main" id="{4CBFF971-386F-4FD3-AB56-1D006F184491}"/>
+              </a:ext>
+            </a:extLst>
+          </p:cNvPr>
+          <p:cNvSpPr>
+            <a:spLocks xmlns:a="http://schemas.openxmlformats.org/drawingml/2006/main" noGrp="1"/>
+          </p:cNvSpPr>
+          <p:nvPr/>
+        </p:nvSpPr>
+        <p:spPr>
+          <a:xfrm xmlns:a="http://schemas.openxmlformats.org/drawingml/2006/main">
+            <a:off x="666750" y="1390650"/>
+            <a:ext cx="4667250" cy="266700"/>
           </a:xfrm>
           <a:prstGeom xmlns:a="http://schemas.openxmlformats.org/drawingml/2006/main" prst="rect">
             <a:avLst/>
@@ -10850,6 +12123,473 @@
           <a:lstStyle xmlns:a="http://schemas.openxmlformats.org/drawingml/2006/main"/>
           <a:p xmlns:a="http://schemas.openxmlformats.org/drawingml/2006/main">
             <a:pPr algn="l">
+              <a:defRPr sz="1350" b="1">
+                <a:solidFill>
+                  <a:srgbClr val="111827"/>
+                </a:solidFill>
+                <a:latin typeface="Aptos"/>
+                <a:ea typeface="Aptos"/>
+                <a:cs typeface="Aptos"/>
+              </a:defRPr>
+            </a:pPr>
+            <a:r>
+              <a:rPr sz="1350" b="1">
+                <a:solidFill>
+                  <a:srgbClr val="111827"/>
+                </a:solidFill>
+                <a:latin typeface="Aptos"/>
+                <a:ea typeface="Aptos"/>
+                <a:cs typeface="Aptos"/>
+              </a:rPr>
+              <a:t>WPF 장비 도식</a:t>
+            </a:r>
+          </a:p>
+        </p:txBody>
+      </p:sp>
+      <p:sp>
+        <p:nvSpPr>
+          <p:cNvPr id="6" name="">
+            <a:extLst xmlns:a="http://schemas.openxmlformats.org/drawingml/2006/main">
+              <a:ext uri="{FF2B5EF4-FFF2-40B4-BE49-F238E27FC236}">
+                <a16:creationId xmlns:a16="http://schemas.microsoft.com/office/drawing/2014/main" id="{8D6449FC-1E1F-4A5F-BFB6-373758057216}"/>
+              </a:ext>
+            </a:extLst>
+          </p:cNvPr>
+          <p:cNvSpPr>
+            <a:spLocks xmlns:a="http://schemas.openxmlformats.org/drawingml/2006/main" noGrp="1"/>
+          </p:cNvSpPr>
+          <p:nvPr/>
+        </p:nvSpPr>
+        <p:spPr>
+          <a:xfrm xmlns:a="http://schemas.openxmlformats.org/drawingml/2006/main">
+            <a:off x="628650" y="1752600"/>
+            <a:ext cx="5048250" cy="3000375"/>
+          </a:xfrm>
+          <a:prstGeom xmlns:a="http://schemas.openxmlformats.org/drawingml/2006/main" prst="rect">
+            <a:avLst/>
+          </a:prstGeom>
+          <a:solidFill xmlns:a="http://schemas.openxmlformats.org/drawingml/2006/main">
+            <a:srgbClr val="F8FAFC"/>
+          </a:solidFill>
+          <a:ln xmlns:a="http://schemas.openxmlformats.org/drawingml/2006/main" w="9525">
+            <a:solidFill>
+              <a:srgbClr val="CBD5E1"/>
+            </a:solidFill>
+            <a:prstDash val="solid"/>
+          </a:ln>
+        </p:spPr>
+      </p:sp>
+      <p:pic>
+        <p:nvPicPr>
+          <p:cNvPr id="7" name=""/>
+          <p:cNvPicPr>
+            <a:picLocks xmlns:a="http://schemas.openxmlformats.org/drawingml/2006/main" noChangeAspect="1"/>
+          </p:cNvPicPr>
+          <p:nvPr/>
+        </p:nvPicPr>
+        <p:blipFill>
+          <a:blip xmlns:r="http://schemas.openxmlformats.org/officeDocument/2006/relationships" xmlns:a="http://schemas.openxmlformats.org/drawingml/2006/main" r:embed="Rd43e28b62b8a4cbc"/>
+          <a:stretch xmlns:a="http://schemas.openxmlformats.org/drawingml/2006/main"/>
+        </p:blipFill>
+        <p:spPr>
+          <a:xfrm xmlns:a="http://schemas.openxmlformats.org/drawingml/2006/main">
+            <a:off x="685800" y="2040446"/>
+            <a:ext cx="4933950" cy="2424684"/>
+          </a:xfrm>
+          <a:prstGeom xmlns:a="http://schemas.openxmlformats.org/drawingml/2006/main" prst="rect">
+            <a:avLst/>
+          </a:prstGeom>
+        </p:spPr>
+      </p:pic>
+      <p:sp>
+        <p:nvSpPr>
+          <p:cNvPr id="8" name="">
+            <a:extLst xmlns:a="http://schemas.openxmlformats.org/drawingml/2006/main">
+              <a:ext uri="{FF2B5EF4-FFF2-40B4-BE49-F238E27FC236}">
+                <a16:creationId xmlns:a16="http://schemas.microsoft.com/office/drawing/2014/main" id="{53867D68-C571-4BDB-A19D-FF33CBF9A8C4}"/>
+              </a:ext>
+            </a:extLst>
+          </p:cNvPr>
+          <p:cNvSpPr>
+            <a:spLocks xmlns:a="http://schemas.openxmlformats.org/drawingml/2006/main" noGrp="1"/>
+          </p:cNvSpPr>
+          <p:nvPr/>
+        </p:nvSpPr>
+        <p:spPr>
+          <a:xfrm xmlns:a="http://schemas.openxmlformats.org/drawingml/2006/main">
+            <a:off x="628650" y="4953000"/>
+            <a:ext cx="5048250" cy="628650"/>
+          </a:xfrm>
+          <a:prstGeom xmlns:a="http://schemas.openxmlformats.org/drawingml/2006/main" prst="rect">
+            <a:avLst/>
+          </a:prstGeom>
+          <a:solidFill xmlns:a="http://schemas.openxmlformats.org/drawingml/2006/main">
+            <a:srgbClr val="EFF6FF"/>
+          </a:solidFill>
+          <a:ln xmlns:a="http://schemas.openxmlformats.org/drawingml/2006/main" w="9525">
+            <a:solidFill>
+              <a:srgbClr val="BFDBFE"/>
+            </a:solidFill>
+            <a:prstDash val="solid"/>
+          </a:ln>
+        </p:spPr>
+      </p:sp>
+      <p:sp>
+        <p:nvSpPr>
+          <p:cNvPr id="9" name="">
+            <a:extLst xmlns:a="http://schemas.openxmlformats.org/drawingml/2006/main">
+              <a:ext uri="{FF2B5EF4-FFF2-40B4-BE49-F238E27FC236}">
+                <a16:creationId xmlns:a16="http://schemas.microsoft.com/office/drawing/2014/main" id="{298D8737-BE7F-45EE-938E-CDEAAE5D131A}"/>
+              </a:ext>
+            </a:extLst>
+          </p:cNvPr>
+          <p:cNvSpPr>
+            <a:spLocks xmlns:a="http://schemas.openxmlformats.org/drawingml/2006/main" noGrp="1"/>
+          </p:cNvSpPr>
+          <p:nvPr/>
+        </p:nvSpPr>
+        <p:spPr>
+          <a:xfrm xmlns:a="http://schemas.openxmlformats.org/drawingml/2006/main">
+            <a:off x="838200" y="5124450"/>
+            <a:ext cx="4629150" cy="266700"/>
+          </a:xfrm>
+          <a:prstGeom xmlns:a="http://schemas.openxmlformats.org/drawingml/2006/main" prst="rect">
+            <a:avLst/>
+          </a:prstGeom>
+          <a:solidFill xmlns:a="http://schemas.openxmlformats.org/drawingml/2006/main">
+            <a:srgbClr val="000000">
+              <a:alpha val="0"/>
+            </a:srgbClr>
+          </a:solidFill>
+          <a:ln xmlns:a="http://schemas.openxmlformats.org/drawingml/2006/main" w="0">
+            <a:solidFill>
+              <a:srgbClr val="000000">
+                <a:alpha val="0"/>
+              </a:srgbClr>
+            </a:solidFill>
+            <a:prstDash val="solid"/>
+          </a:ln>
+        </p:spPr>
+        <p:txBody>
+          <a:bodyPr xmlns:a="http://schemas.openxmlformats.org/drawingml/2006/main" lIns="0" tIns="0" rIns="0" bIns="0" anchor="t"/>
+          <a:lstStyle xmlns:a="http://schemas.openxmlformats.org/drawingml/2006/main"/>
+          <a:p xmlns:a="http://schemas.openxmlformats.org/drawingml/2006/main">
+            <a:pPr algn="l">
+              <a:defRPr sz="1050" b="1">
+                <a:solidFill>
+                  <a:srgbClr val="1D4ED8"/>
+                </a:solidFill>
+                <a:latin typeface="Aptos"/>
+                <a:ea typeface="Aptos"/>
+                <a:cs typeface="Aptos"/>
+              </a:defRPr>
+            </a:pPr>
+            <a:r>
+              <a:rPr sz="1050" b="1">
+                <a:solidFill>
+                  <a:srgbClr val="1D4ED8"/>
+                </a:solidFill>
+                <a:latin typeface="Aptos"/>
+                <a:ea typeface="Aptos"/>
+                <a:cs typeface="Aptos"/>
+              </a:rPr>
+              <a:t>가상 TM, EFEM, PM 챔버와 Blade 상태를 한 영역에서 확인</a:t>
+            </a:r>
+          </a:p>
+        </p:txBody>
+      </p:sp>
+      <p:sp>
+        <p:nvSpPr>
+          <p:cNvPr id="10" name="">
+            <a:extLst xmlns:a="http://schemas.openxmlformats.org/drawingml/2006/main">
+              <a:ext uri="{FF2B5EF4-FFF2-40B4-BE49-F238E27FC236}">
+                <a16:creationId xmlns:a16="http://schemas.microsoft.com/office/drawing/2014/main" id="{43F75118-0927-44E3-9D91-1DA6B96C47AA}"/>
+              </a:ext>
+            </a:extLst>
+          </p:cNvPr>
+          <p:cNvSpPr>
+            <a:spLocks xmlns:a="http://schemas.openxmlformats.org/drawingml/2006/main" noGrp="1"/>
+          </p:cNvSpPr>
+          <p:nvPr/>
+        </p:nvSpPr>
+        <p:spPr>
+          <a:xfrm xmlns:a="http://schemas.openxmlformats.org/drawingml/2006/main">
+            <a:off x="6381750" y="1390650"/>
+            <a:ext cx="4667250" cy="266700"/>
+          </a:xfrm>
+          <a:prstGeom xmlns:a="http://schemas.openxmlformats.org/drawingml/2006/main" prst="rect">
+            <a:avLst/>
+          </a:prstGeom>
+          <a:solidFill xmlns:a="http://schemas.openxmlformats.org/drawingml/2006/main">
+            <a:srgbClr val="000000">
+              <a:alpha val="0"/>
+            </a:srgbClr>
+          </a:solidFill>
+          <a:ln xmlns:a="http://schemas.openxmlformats.org/drawingml/2006/main" w="0">
+            <a:solidFill>
+              <a:srgbClr val="000000">
+                <a:alpha val="0"/>
+              </a:srgbClr>
+            </a:solidFill>
+            <a:prstDash val="solid"/>
+          </a:ln>
+        </p:spPr>
+        <p:txBody>
+          <a:bodyPr xmlns:a="http://schemas.openxmlformats.org/drawingml/2006/main" lIns="0" tIns="0" rIns="0" bIns="0" anchor="t"/>
+          <a:lstStyle xmlns:a="http://schemas.openxmlformats.org/drawingml/2006/main"/>
+          <a:p xmlns:a="http://schemas.openxmlformats.org/drawingml/2006/main">
+            <a:pPr algn="l">
+              <a:defRPr sz="1350" b="1">
+                <a:solidFill>
+                  <a:srgbClr val="111827"/>
+                </a:solidFill>
+                <a:latin typeface="Aptos"/>
+                <a:ea typeface="Aptos"/>
+                <a:cs typeface="Aptos"/>
+              </a:defRPr>
+            </a:pPr>
+            <a:r>
+              <a:rPr sz="1350" b="1">
+                <a:solidFill>
+                  <a:srgbClr val="111827"/>
+                </a:solidFill>
+                <a:latin typeface="Aptos"/>
+                <a:ea typeface="Aptos"/>
+                <a:cs typeface="Aptos"/>
+              </a:rPr>
+              <a:t>Flask 모듈 상태</a:t>
+            </a:r>
+          </a:p>
+        </p:txBody>
+      </p:sp>
+      <p:sp>
+        <p:nvSpPr>
+          <p:cNvPr id="11" name="">
+            <a:extLst xmlns:a="http://schemas.openxmlformats.org/drawingml/2006/main">
+              <a:ext uri="{FF2B5EF4-FFF2-40B4-BE49-F238E27FC236}">
+                <a16:creationId xmlns:a16="http://schemas.microsoft.com/office/drawing/2014/main" id="{2504558E-FAD1-4747-8EBE-2810074AC464}"/>
+              </a:ext>
+            </a:extLst>
+          </p:cNvPr>
+          <p:cNvSpPr>
+            <a:spLocks xmlns:a="http://schemas.openxmlformats.org/drawingml/2006/main" noGrp="1"/>
+          </p:cNvSpPr>
+          <p:nvPr/>
+        </p:nvSpPr>
+        <p:spPr>
+          <a:xfrm xmlns:a="http://schemas.openxmlformats.org/drawingml/2006/main">
+            <a:off x="6343650" y="1752600"/>
+            <a:ext cx="5048250" cy="3000375"/>
+          </a:xfrm>
+          <a:prstGeom xmlns:a="http://schemas.openxmlformats.org/drawingml/2006/main" prst="rect">
+            <a:avLst/>
+          </a:prstGeom>
+          <a:solidFill xmlns:a="http://schemas.openxmlformats.org/drawingml/2006/main">
+            <a:srgbClr val="F8FAFC"/>
+          </a:solidFill>
+          <a:ln xmlns:a="http://schemas.openxmlformats.org/drawingml/2006/main" w="9525">
+            <a:solidFill>
+              <a:srgbClr val="CBD5E1"/>
+            </a:solidFill>
+            <a:prstDash val="solid"/>
+          </a:ln>
+        </p:spPr>
+      </p:sp>
+      <p:pic>
+        <p:nvPicPr>
+          <p:cNvPr id="12" name=""/>
+          <p:cNvPicPr>
+            <a:picLocks xmlns:a="http://schemas.openxmlformats.org/drawingml/2006/main" noChangeAspect="1"/>
+          </p:cNvPicPr>
+          <p:nvPr/>
+        </p:nvPicPr>
+        <p:blipFill>
+          <a:blip xmlns:r="http://schemas.openxmlformats.org/officeDocument/2006/relationships" xmlns:a="http://schemas.openxmlformats.org/drawingml/2006/main" r:embed="R0aaa9bf12b734c6b"/>
+          <a:stretch xmlns:a="http://schemas.openxmlformats.org/drawingml/2006/main"/>
+        </p:blipFill>
+        <p:spPr>
+          <a:xfrm xmlns:a="http://schemas.openxmlformats.org/drawingml/2006/main">
+            <a:off x="6400800" y="2158348"/>
+            <a:ext cx="4933950" cy="2188880"/>
+          </a:xfrm>
+          <a:prstGeom xmlns:a="http://schemas.openxmlformats.org/drawingml/2006/main" prst="rect">
+            <a:avLst/>
+          </a:prstGeom>
+        </p:spPr>
+      </p:pic>
+      <p:sp>
+        <p:nvSpPr>
+          <p:cNvPr id="13" name="">
+            <a:extLst xmlns:a="http://schemas.openxmlformats.org/drawingml/2006/main">
+              <a:ext uri="{FF2B5EF4-FFF2-40B4-BE49-F238E27FC236}">
+                <a16:creationId xmlns:a16="http://schemas.microsoft.com/office/drawing/2014/main" id="{AB07FDC0-F9D4-40E6-8542-F294D242C051}"/>
+              </a:ext>
+            </a:extLst>
+          </p:cNvPr>
+          <p:cNvSpPr>
+            <a:spLocks xmlns:a="http://schemas.openxmlformats.org/drawingml/2006/main" noGrp="1"/>
+          </p:cNvSpPr>
+          <p:nvPr/>
+        </p:nvSpPr>
+        <p:spPr>
+          <a:xfrm xmlns:a="http://schemas.openxmlformats.org/drawingml/2006/main">
+            <a:off x="6343650" y="4953000"/>
+            <a:ext cx="5048250" cy="628650"/>
+          </a:xfrm>
+          <a:prstGeom xmlns:a="http://schemas.openxmlformats.org/drawingml/2006/main" prst="rect">
+            <a:avLst/>
+          </a:prstGeom>
+          <a:solidFill xmlns:a="http://schemas.openxmlformats.org/drawingml/2006/main">
+            <a:srgbClr val="F0FDF4"/>
+          </a:solidFill>
+          <a:ln xmlns:a="http://schemas.openxmlformats.org/drawingml/2006/main" w="9525">
+            <a:solidFill>
+              <a:srgbClr val="BBF7D0"/>
+            </a:solidFill>
+            <a:prstDash val="solid"/>
+          </a:ln>
+        </p:spPr>
+      </p:sp>
+      <p:sp>
+        <p:nvSpPr>
+          <p:cNvPr id="14" name="">
+            <a:extLst xmlns:a="http://schemas.openxmlformats.org/drawingml/2006/main">
+              <a:ext uri="{FF2B5EF4-FFF2-40B4-BE49-F238E27FC236}">
+                <a16:creationId xmlns:a16="http://schemas.microsoft.com/office/drawing/2014/main" id="{08756C96-A2E0-4C7E-97ED-000EEBD04538}"/>
+              </a:ext>
+            </a:extLst>
+          </p:cNvPr>
+          <p:cNvSpPr>
+            <a:spLocks xmlns:a="http://schemas.openxmlformats.org/drawingml/2006/main" noGrp="1"/>
+          </p:cNvSpPr>
+          <p:nvPr/>
+        </p:nvSpPr>
+        <p:spPr>
+          <a:xfrm xmlns:a="http://schemas.openxmlformats.org/drawingml/2006/main">
+            <a:off x="6553200" y="5124450"/>
+            <a:ext cx="4629150" cy="266700"/>
+          </a:xfrm>
+          <a:prstGeom xmlns:a="http://schemas.openxmlformats.org/drawingml/2006/main" prst="rect">
+            <a:avLst/>
+          </a:prstGeom>
+          <a:solidFill xmlns:a="http://schemas.openxmlformats.org/drawingml/2006/main">
+            <a:srgbClr val="000000">
+              <a:alpha val="0"/>
+            </a:srgbClr>
+          </a:solidFill>
+          <a:ln xmlns:a="http://schemas.openxmlformats.org/drawingml/2006/main" w="0">
+            <a:solidFill>
+              <a:srgbClr val="000000">
+                <a:alpha val="0"/>
+              </a:srgbClr>
+            </a:solidFill>
+            <a:prstDash val="solid"/>
+          </a:ln>
+        </p:spPr>
+        <p:txBody>
+          <a:bodyPr xmlns:a="http://schemas.openxmlformats.org/drawingml/2006/main" lIns="0" tIns="0" rIns="0" bIns="0" anchor="t"/>
+          <a:lstStyle xmlns:a="http://schemas.openxmlformats.org/drawingml/2006/main"/>
+          <a:p xmlns:a="http://schemas.openxmlformats.org/drawingml/2006/main">
+            <a:pPr algn="l">
+              <a:defRPr sz="1050" b="1">
+                <a:solidFill>
+                  <a:srgbClr val="15803D"/>
+                </a:solidFill>
+                <a:latin typeface="Aptos"/>
+                <a:ea typeface="Aptos"/>
+                <a:cs typeface="Aptos"/>
+              </a:defRPr>
+            </a:pPr>
+            <a:r>
+              <a:rPr sz="1050" b="1">
+                <a:solidFill>
+                  <a:srgbClr val="15803D"/>
+                </a:solidFill>
+                <a:latin typeface="Aptos"/>
+                <a:ea typeface="Aptos"/>
+                <a:cs typeface="Aptos"/>
+              </a:rPr>
+              <a:t>LP1, BM1, PM1, PM2 처리 상태가 API 응답으로 화면에 표시</a:t>
+            </a:r>
+          </a:p>
+        </p:txBody>
+      </p:sp>
+      <p:sp>
+        <p:nvSpPr>
+          <p:cNvPr id="15" name="">
+            <a:extLst xmlns:a="http://schemas.openxmlformats.org/drawingml/2006/main">
+              <a:ext uri="{FF2B5EF4-FFF2-40B4-BE49-F238E27FC236}">
+                <a16:creationId xmlns:a16="http://schemas.microsoft.com/office/drawing/2014/main" id="{5254B6A8-5A24-42F9-88DD-D309C9F48311}"/>
+              </a:ext>
+            </a:extLst>
+          </p:cNvPr>
+          <p:cNvSpPr>
+            <a:spLocks xmlns:a="http://schemas.openxmlformats.org/drawingml/2006/main" noGrp="1"/>
+          </p:cNvSpPr>
+          <p:nvPr/>
+        </p:nvSpPr>
+        <p:spPr>
+          <a:xfrm xmlns:a="http://schemas.openxmlformats.org/drawingml/2006/main">
+            <a:off x="1752600" y="5867400"/>
+            <a:ext cx="8686800" cy="361950"/>
+          </a:xfrm>
+          <a:prstGeom xmlns:a="http://schemas.openxmlformats.org/drawingml/2006/main" prst="rect">
+            <a:avLst/>
+          </a:prstGeom>
+          <a:solidFill xmlns:a="http://schemas.openxmlformats.org/drawingml/2006/main">
+            <a:srgbClr val="0B1220"/>
+          </a:solidFill>
+          <a:ln xmlns:a="http://schemas.openxmlformats.org/drawingml/2006/main" w="0">
+            <a:solidFill>
+              <a:srgbClr val="000000">
+                <a:alpha val="0"/>
+              </a:srgbClr>
+            </a:solidFill>
+            <a:prstDash val="solid"/>
+          </a:ln>
+        </p:spPr>
+      </p:sp>
+      <p:sp>
+        <p:nvSpPr>
+          <p:cNvPr id="16" name="">
+            <a:extLst xmlns:a="http://schemas.openxmlformats.org/drawingml/2006/main">
+              <a:ext uri="{FF2B5EF4-FFF2-40B4-BE49-F238E27FC236}">
+                <a16:creationId xmlns:a16="http://schemas.microsoft.com/office/drawing/2014/main" id="{AD373D73-BA19-41F2-9D5E-F2E8B2ED824C}"/>
+              </a:ext>
+            </a:extLst>
+          </p:cNvPr>
+          <p:cNvSpPr>
+            <a:spLocks xmlns:a="http://schemas.openxmlformats.org/drawingml/2006/main" noGrp="1"/>
+          </p:cNvSpPr>
+          <p:nvPr/>
+        </p:nvSpPr>
+        <p:spPr>
+          <a:xfrm xmlns:a="http://schemas.openxmlformats.org/drawingml/2006/main">
+            <a:off x="2038350" y="5962650"/>
+            <a:ext cx="8115300" cy="171450"/>
+          </a:xfrm>
+          <a:prstGeom xmlns:a="http://schemas.openxmlformats.org/drawingml/2006/main" prst="rect">
+            <a:avLst/>
+          </a:prstGeom>
+          <a:solidFill xmlns:a="http://schemas.openxmlformats.org/drawingml/2006/main">
+            <a:srgbClr val="000000">
+              <a:alpha val="0"/>
+            </a:srgbClr>
+          </a:solidFill>
+          <a:ln xmlns:a="http://schemas.openxmlformats.org/drawingml/2006/main" w="0">
+            <a:solidFill>
+              <a:srgbClr val="000000">
+                <a:alpha val="0"/>
+              </a:srgbClr>
+            </a:solidFill>
+            <a:prstDash val="solid"/>
+          </a:ln>
+        </p:spPr>
+        <p:txBody>
+          <a:bodyPr xmlns:a="http://schemas.openxmlformats.org/drawingml/2006/main" lIns="0" tIns="0" rIns="0" bIns="0" anchor="t"/>
+          <a:lstStyle xmlns:a="http://schemas.openxmlformats.org/drawingml/2006/main"/>
+          <a:p xmlns:a="http://schemas.openxmlformats.org/drawingml/2006/main">
+            <a:pPr algn="ctr">
               <a:defRPr sz="900" b="1">
                 <a:solidFill>
                   <a:srgbClr val="FFFFFF"/>
@@ -10868,29 +12608,1452 @@
                 <a:ea typeface="Aptos"/>
                 <a:cs typeface="Aptos"/>
               </a:rPr>
-              <a:t>영역</a:t>
+              <a:t>보강 포인트: 기존 전체 캡처만으로는 글자가 작았기 때문에, 평가자가 바로 읽을 수 있는 증거 영역을 별도 확대</a:t>
             </a:r>
           </a:p>
         </p:txBody>
       </p:sp>
       <p:sp>
         <p:nvSpPr>
+          <p:cNvPr id="17" name="">
+            <a:extLst xmlns:a="http://schemas.openxmlformats.org/drawingml/2006/main">
+              <a:ext uri="{FF2B5EF4-FFF2-40B4-BE49-F238E27FC236}">
+                <a16:creationId xmlns:a16="http://schemas.microsoft.com/office/drawing/2014/main" id="{EEA099B0-B73A-47F6-A005-C969380B8546}"/>
+              </a:ext>
+            </a:extLst>
+          </p:cNvPr>
+          <p:cNvSpPr>
+            <a:spLocks xmlns:a="http://schemas.openxmlformats.org/drawingml/2006/main" noGrp="1"/>
+          </p:cNvSpPr>
+          <p:nvPr/>
+        </p:nvSpPr>
+        <p:spPr>
+          <a:xfrm xmlns:a="http://schemas.openxmlformats.org/drawingml/2006/main">
+            <a:off x="533400" y="6572250"/>
+            <a:ext cx="7239000" cy="171450"/>
+          </a:xfrm>
+          <a:prstGeom xmlns:a="http://schemas.openxmlformats.org/drawingml/2006/main" prst="rect">
+            <a:avLst/>
+          </a:prstGeom>
+          <a:solidFill xmlns:a="http://schemas.openxmlformats.org/drawingml/2006/main">
+            <a:srgbClr val="000000">
+              <a:alpha val="0"/>
+            </a:srgbClr>
+          </a:solidFill>
+          <a:ln xmlns:a="http://schemas.openxmlformats.org/drawingml/2006/main" w="0">
+            <a:solidFill>
+              <a:srgbClr val="000000">
+                <a:alpha val="0"/>
+              </a:srgbClr>
+            </a:solidFill>
+            <a:prstDash val="solid"/>
+          </a:ln>
+        </p:spPr>
+        <p:txBody>
+          <a:bodyPr xmlns:a="http://schemas.openxmlformats.org/drawingml/2006/main" lIns="0" tIns="0" rIns="0" bIns="0" anchor="t"/>
+          <a:lstStyle xmlns:a="http://schemas.openxmlformats.org/drawingml/2006/main"/>
+          <a:p xmlns:a="http://schemas.openxmlformats.org/drawingml/2006/main">
+            <a:pPr algn="l">
+              <a:defRPr sz="675" b="0">
+                <a:solidFill>
+                  <a:srgbClr val="94A3B8"/>
+                </a:solidFill>
+                <a:latin typeface="Aptos"/>
+                <a:ea typeface="Aptos"/>
+                <a:cs typeface="Aptos"/>
+              </a:defRPr>
+            </a:pPr>
+            <a:r>
+              <a:rPr sz="675" b="0">
+                <a:solidFill>
+                  <a:srgbClr val="94A3B8"/>
+                </a:solidFill>
+                <a:latin typeface="Aptos"/>
+                <a:ea typeface="Aptos"/>
+                <a:cs typeface="Aptos"/>
+              </a:rPr>
+              <a:t>Etch Load Lock HMI 결과 보고서</a:t>
+            </a:r>
+          </a:p>
+        </p:txBody>
+      </p:sp>
+      <p:sp>
+        <p:nvSpPr>
+          <p:cNvPr id="18" name="">
+            <a:extLst xmlns:a="http://schemas.openxmlformats.org/drawingml/2006/main">
+              <a:ext uri="{FF2B5EF4-FFF2-40B4-BE49-F238E27FC236}">
+                <a16:creationId xmlns:a16="http://schemas.microsoft.com/office/drawing/2014/main" id="{10A18E93-9383-46F6-9814-8174CE1F95BA}"/>
+              </a:ext>
+            </a:extLst>
+          </p:cNvPr>
+          <p:cNvSpPr>
+            <a:spLocks xmlns:a="http://schemas.openxmlformats.org/drawingml/2006/main" noGrp="1"/>
+          </p:cNvSpPr>
+          <p:nvPr/>
+        </p:nvSpPr>
+        <p:spPr>
+          <a:xfrm xmlns:a="http://schemas.openxmlformats.org/drawingml/2006/main">
+            <a:off x="11191875" y="6572250"/>
+            <a:ext cx="457200" cy="171450"/>
+          </a:xfrm>
+          <a:prstGeom xmlns:a="http://schemas.openxmlformats.org/drawingml/2006/main" prst="rect">
+            <a:avLst/>
+          </a:prstGeom>
+          <a:solidFill xmlns:a="http://schemas.openxmlformats.org/drawingml/2006/main">
+            <a:srgbClr val="000000">
+              <a:alpha val="0"/>
+            </a:srgbClr>
+          </a:solidFill>
+          <a:ln xmlns:a="http://schemas.openxmlformats.org/drawingml/2006/main" w="0">
+            <a:solidFill>
+              <a:srgbClr val="000000">
+                <a:alpha val="0"/>
+              </a:srgbClr>
+            </a:solidFill>
+            <a:prstDash val="solid"/>
+          </a:ln>
+        </p:spPr>
+        <p:txBody>
+          <a:bodyPr xmlns:a="http://schemas.openxmlformats.org/drawingml/2006/main" lIns="0" tIns="0" rIns="0" bIns="0" anchor="t"/>
+          <a:lstStyle xmlns:a="http://schemas.openxmlformats.org/drawingml/2006/main"/>
+          <a:p xmlns:a="http://schemas.openxmlformats.org/drawingml/2006/main">
+            <a:pPr algn="r">
+              <a:defRPr sz="675" b="0">
+                <a:solidFill>
+                  <a:srgbClr val="94A3B8"/>
+                </a:solidFill>
+                <a:latin typeface="Aptos"/>
+                <a:ea typeface="Aptos"/>
+                <a:cs typeface="Aptos"/>
+              </a:defRPr>
+            </a:pPr>
+            <a:r>
+              <a:rPr sz="675" b="0">
+                <a:solidFill>
+                  <a:srgbClr val="94A3B8"/>
+                </a:solidFill>
+                <a:latin typeface="Aptos"/>
+                <a:ea typeface="Aptos"/>
+                <a:cs typeface="Aptos"/>
+              </a:rPr>
+              <a:t>08</a:t>
+            </a:r>
+          </a:p>
+        </p:txBody>
+      </p:sp>
+    </p:spTree>
+    <p:extLst>
+      <p:ext uri="{BB962C8B-B14F-4D97-AF65-F5344CB8AC3E}">
+        <p14:creationId xmlns:p14="http://schemas.microsoft.com/office/powerpoint/2010/main" val="716561681"/>
+      </p:ext>
+    </p:extLst>
+  </p:cSld>
+</p:sld>
+</file>
+
+<file path=ppt/slides/slide9.xml><?xml version="1.0" encoding="utf-8"?>
+<p:sld xmlns:p="http://schemas.openxmlformats.org/presentationml/2006/main">
+  <p:cSld>
+    <p:spTree>
+      <p:nvGrpSpPr>
+        <p:cNvPr id="1" name=""/>
+        <p:cNvGrpSpPr/>
+        <p:nvPr/>
+      </p:nvGrpSpPr>
+      <p:grpSpPr>
+        <a:xfrm xmlns:a="http://schemas.openxmlformats.org/drawingml/2006/main"/>
+      </p:grpSpPr>
+      <p:sp>
+        <p:nvSpPr>
+          <p:cNvPr id="1" name="">
+            <a:extLst xmlns:a="http://schemas.openxmlformats.org/drawingml/2006/main">
+              <a:ext uri="{FF2B5EF4-FFF2-40B4-BE49-F238E27FC236}">
+                <a16:creationId xmlns:a16="http://schemas.microsoft.com/office/drawing/2014/main" id="{71FDE72D-87C8-4565-8884-5E901F896A56}"/>
+              </a:ext>
+            </a:extLst>
+          </p:cNvPr>
+          <p:cNvSpPr>
+            <a:spLocks xmlns:a="http://schemas.openxmlformats.org/drawingml/2006/main" noGrp="1"/>
+          </p:cNvSpPr>
+          <p:nvPr/>
+        </p:nvSpPr>
+        <p:spPr>
+          <a:xfrm xmlns:a="http://schemas.openxmlformats.org/drawingml/2006/main">
+            <a:off x="0" y="0"/>
+            <a:ext cx="12192000" cy="6858000"/>
+          </a:xfrm>
+          <a:prstGeom xmlns:a="http://schemas.openxmlformats.org/drawingml/2006/main" prst="rect">
+            <a:avLst/>
+          </a:prstGeom>
+          <a:solidFill xmlns:a="http://schemas.openxmlformats.org/drawingml/2006/main">
+            <a:srgbClr val="FFFFFF"/>
+          </a:solidFill>
+          <a:ln xmlns:a="http://schemas.openxmlformats.org/drawingml/2006/main" w="0">
+            <a:solidFill>
+              <a:srgbClr val="000000">
+                <a:alpha val="0"/>
+              </a:srgbClr>
+            </a:solidFill>
+            <a:prstDash val="solid"/>
+          </a:ln>
+        </p:spPr>
+      </p:sp>
+      <p:sp>
+        <p:nvSpPr>
+          <p:cNvPr id="2" name="">
+            <a:extLst xmlns:a="http://schemas.openxmlformats.org/drawingml/2006/main">
+              <a:ext uri="{FF2B5EF4-FFF2-40B4-BE49-F238E27FC236}">
+                <a16:creationId xmlns:a16="http://schemas.microsoft.com/office/drawing/2014/main" id="{3AC831FB-32D9-4F2F-ABDA-CE2BFC2CCE8B}"/>
+              </a:ext>
+            </a:extLst>
+          </p:cNvPr>
+          <p:cNvSpPr>
+            <a:spLocks xmlns:a="http://schemas.openxmlformats.org/drawingml/2006/main" noGrp="1"/>
+          </p:cNvSpPr>
+          <p:nvPr/>
+        </p:nvSpPr>
+        <p:spPr>
+          <a:xfrm xmlns:a="http://schemas.openxmlformats.org/drawingml/2006/main">
+            <a:off x="533400" y="361950"/>
+            <a:ext cx="7810500" cy="419100"/>
+          </a:xfrm>
+          <a:prstGeom xmlns:a="http://schemas.openxmlformats.org/drawingml/2006/main" prst="rect">
+            <a:avLst/>
+          </a:prstGeom>
+          <a:solidFill xmlns:a="http://schemas.openxmlformats.org/drawingml/2006/main">
+            <a:srgbClr val="000000">
+              <a:alpha val="0"/>
+            </a:srgbClr>
+          </a:solidFill>
+          <a:ln xmlns:a="http://schemas.openxmlformats.org/drawingml/2006/main" w="0">
+            <a:solidFill>
+              <a:srgbClr val="000000">
+                <a:alpha val="0"/>
+              </a:srgbClr>
+            </a:solidFill>
+            <a:prstDash val="solid"/>
+          </a:ln>
+        </p:spPr>
+        <p:txBody>
+          <a:bodyPr xmlns:a="http://schemas.openxmlformats.org/drawingml/2006/main" lIns="0" tIns="0" rIns="0" bIns="0" anchor="t"/>
+          <a:lstStyle xmlns:a="http://schemas.openxmlformats.org/drawingml/2006/main"/>
+          <a:p xmlns:a="http://schemas.openxmlformats.org/drawingml/2006/main">
+            <a:pPr algn="l">
+              <a:defRPr sz="2175" b="1">
+                <a:solidFill>
+                  <a:srgbClr val="111827"/>
+                </a:solidFill>
+                <a:latin typeface="Aptos"/>
+                <a:ea typeface="Aptos"/>
+                <a:cs typeface="Aptos"/>
+              </a:defRPr>
+            </a:pPr>
+            <a:r>
+              <a:rPr sz="2175" b="1">
+                <a:solidFill>
+                  <a:srgbClr val="111827"/>
+                </a:solidFill>
+                <a:latin typeface="Aptos"/>
+                <a:ea typeface="Aptos"/>
+                <a:cs typeface="Aptos"/>
+              </a:rPr>
+              <a:t>정량 성과와 검증 결과</a:t>
+            </a:r>
+          </a:p>
+        </p:txBody>
+      </p:sp>
+      <p:sp>
+        <p:nvSpPr>
+          <p:cNvPr id="3" name="">
+            <a:extLst xmlns:a="http://schemas.openxmlformats.org/drawingml/2006/main">
+              <a:ext uri="{FF2B5EF4-FFF2-40B4-BE49-F238E27FC236}">
+                <a16:creationId xmlns:a16="http://schemas.microsoft.com/office/drawing/2014/main" id="{8939E820-8659-436F-A5FF-D48E2623A261}"/>
+              </a:ext>
+            </a:extLst>
+          </p:cNvPr>
+          <p:cNvSpPr>
+            <a:spLocks xmlns:a="http://schemas.openxmlformats.org/drawingml/2006/main" noGrp="1"/>
+          </p:cNvSpPr>
+          <p:nvPr/>
+        </p:nvSpPr>
+        <p:spPr>
+          <a:xfrm xmlns:a="http://schemas.openxmlformats.org/drawingml/2006/main">
+            <a:off x="552450" y="781050"/>
+            <a:ext cx="7810500" cy="285750"/>
+          </a:xfrm>
+          <a:prstGeom xmlns:a="http://schemas.openxmlformats.org/drawingml/2006/main" prst="rect">
+            <a:avLst/>
+          </a:prstGeom>
+          <a:solidFill xmlns:a="http://schemas.openxmlformats.org/drawingml/2006/main">
+            <a:srgbClr val="000000">
+              <a:alpha val="0"/>
+            </a:srgbClr>
+          </a:solidFill>
+          <a:ln xmlns:a="http://schemas.openxmlformats.org/drawingml/2006/main" w="0">
+            <a:solidFill>
+              <a:srgbClr val="000000">
+                <a:alpha val="0"/>
+              </a:srgbClr>
+            </a:solidFill>
+            <a:prstDash val="solid"/>
+          </a:ln>
+        </p:spPr>
+        <p:txBody>
+          <a:bodyPr xmlns:a="http://schemas.openxmlformats.org/drawingml/2006/main" lIns="0" tIns="0" rIns="0" bIns="0" anchor="t"/>
+          <a:lstStyle xmlns:a="http://schemas.openxmlformats.org/drawingml/2006/main"/>
+          <a:p xmlns:a="http://schemas.openxmlformats.org/drawingml/2006/main">
+            <a:pPr algn="l">
+              <a:defRPr sz="975" b="0">
+                <a:solidFill>
+                  <a:srgbClr val="64748B"/>
+                </a:solidFill>
+                <a:latin typeface="Aptos"/>
+                <a:ea typeface="Aptos"/>
+                <a:cs typeface="Aptos"/>
+              </a:defRPr>
+            </a:pPr>
+            <a:r>
+              <a:rPr sz="975" b="0">
+                <a:solidFill>
+                  <a:srgbClr val="64748B"/>
+                </a:solidFill>
+                <a:latin typeface="Aptos"/>
+                <a:ea typeface="Aptos"/>
+                <a:cs typeface="Aptos"/>
+              </a:rPr>
+              <a:t>구현 범위와 확인 결과를 숫자로 정리해 결과 보고서의 설득력 강화</a:t>
+            </a:r>
+          </a:p>
+        </p:txBody>
+      </p:sp>
+      <p:sp>
+        <p:nvSpPr>
+          <p:cNvPr id="4" name="">
+            <a:extLst xmlns:a="http://schemas.openxmlformats.org/drawingml/2006/main">
+              <a:ext uri="{FF2B5EF4-FFF2-40B4-BE49-F238E27FC236}">
+                <a16:creationId xmlns:a16="http://schemas.microsoft.com/office/drawing/2014/main" id="{3A526F9B-3866-44F1-84EB-8E3E33C79865}"/>
+              </a:ext>
+            </a:extLst>
+          </p:cNvPr>
+          <p:cNvSpPr>
+            <a:spLocks xmlns:a="http://schemas.openxmlformats.org/drawingml/2006/main" noGrp="1"/>
+          </p:cNvSpPr>
+          <p:nvPr/>
+        </p:nvSpPr>
+        <p:spPr>
+          <a:xfrm xmlns:a="http://schemas.openxmlformats.org/drawingml/2006/main">
+            <a:off x="533400" y="1123950"/>
+            <a:ext cx="11125200" cy="19050"/>
+          </a:xfrm>
+          <a:prstGeom xmlns:a="http://schemas.openxmlformats.org/drawingml/2006/main" prst="rect">
+            <a:avLst/>
+          </a:prstGeom>
+          <a:solidFill xmlns:a="http://schemas.openxmlformats.org/drawingml/2006/main">
+            <a:srgbClr val="2563EB"/>
+          </a:solidFill>
+          <a:ln xmlns:a="http://schemas.openxmlformats.org/drawingml/2006/main" w="0">
+            <a:solidFill>
+              <a:srgbClr val="000000">
+                <a:alpha val="0"/>
+              </a:srgbClr>
+            </a:solidFill>
+            <a:prstDash val="solid"/>
+          </a:ln>
+        </p:spPr>
+      </p:sp>
+      <p:sp>
+        <p:nvSpPr>
+          <p:cNvPr id="5" name="">
+            <a:extLst xmlns:a="http://schemas.openxmlformats.org/drawingml/2006/main">
+              <a:ext uri="{FF2B5EF4-FFF2-40B4-BE49-F238E27FC236}">
+                <a16:creationId xmlns:a16="http://schemas.microsoft.com/office/drawing/2014/main" id="{F7741490-C1CD-4717-9980-5793652EDED9}"/>
+              </a:ext>
+            </a:extLst>
+          </p:cNvPr>
+          <p:cNvSpPr>
+            <a:spLocks xmlns:a="http://schemas.openxmlformats.org/drawingml/2006/main" noGrp="1"/>
+          </p:cNvSpPr>
+          <p:nvPr/>
+        </p:nvSpPr>
+        <p:spPr>
+          <a:xfrm xmlns:a="http://schemas.openxmlformats.org/drawingml/2006/main">
+            <a:off x="666750" y="1428750"/>
+            <a:ext cx="2381250" cy="1123950"/>
+          </a:xfrm>
+          <a:prstGeom xmlns:a="http://schemas.openxmlformats.org/drawingml/2006/main" prst="rect">
+            <a:avLst/>
+          </a:prstGeom>
+          <a:solidFill xmlns:a="http://schemas.openxmlformats.org/drawingml/2006/main">
+            <a:srgbClr val="F8FAFC"/>
+          </a:solidFill>
+          <a:ln xmlns:a="http://schemas.openxmlformats.org/drawingml/2006/main" w="9525">
+            <a:solidFill>
+              <a:srgbClr val="CBD5E1"/>
+            </a:solidFill>
+            <a:prstDash val="solid"/>
+          </a:ln>
+        </p:spPr>
+      </p:sp>
+      <p:sp>
+        <p:nvSpPr>
+          <p:cNvPr id="6" name="">
+            <a:extLst xmlns:a="http://schemas.openxmlformats.org/drawingml/2006/main">
+              <a:ext uri="{FF2B5EF4-FFF2-40B4-BE49-F238E27FC236}">
+                <a16:creationId xmlns:a16="http://schemas.microsoft.com/office/drawing/2014/main" id="{6812CC58-8C82-4275-9F0E-3E004B4EBD52}"/>
+              </a:ext>
+            </a:extLst>
+          </p:cNvPr>
+          <p:cNvSpPr>
+            <a:spLocks xmlns:a="http://schemas.openxmlformats.org/drawingml/2006/main" noGrp="1"/>
+          </p:cNvSpPr>
+          <p:nvPr/>
+        </p:nvSpPr>
+        <p:spPr>
+          <a:xfrm xmlns:a="http://schemas.openxmlformats.org/drawingml/2006/main">
+            <a:off x="666750" y="1428750"/>
+            <a:ext cx="2381250" cy="57150"/>
+          </a:xfrm>
+          <a:prstGeom xmlns:a="http://schemas.openxmlformats.org/drawingml/2006/main" prst="rect">
+            <a:avLst/>
+          </a:prstGeom>
+          <a:solidFill xmlns:a="http://schemas.openxmlformats.org/drawingml/2006/main">
+            <a:srgbClr val="2563EB"/>
+          </a:solidFill>
+          <a:ln xmlns:a="http://schemas.openxmlformats.org/drawingml/2006/main" w="0">
+            <a:solidFill>
+              <a:srgbClr val="000000">
+                <a:alpha val="0"/>
+              </a:srgbClr>
+            </a:solidFill>
+            <a:prstDash val="solid"/>
+          </a:ln>
+        </p:spPr>
+      </p:sp>
+      <p:sp>
+        <p:nvSpPr>
           <p:cNvPr id="7" name="">
             <a:extLst xmlns:a="http://schemas.openxmlformats.org/drawingml/2006/main">
               <a:ext uri="{FF2B5EF4-FFF2-40B4-BE49-F238E27FC236}">
-                <a16:creationId xmlns:a16="http://schemas.microsoft.com/office/drawing/2014/main" id="{0B1559BC-BD11-4D8B-AD75-3C1661E705AB}"/>
-              </a:ext>
-            </a:extLst>
-          </p:cNvPr>
-          <p:cNvSpPr>
-            <a:spLocks xmlns:a="http://schemas.openxmlformats.org/drawingml/2006/main" noGrp="1"/>
-          </p:cNvSpPr>
-          <p:nvPr/>
-        </p:nvSpPr>
-        <p:spPr>
-          <a:xfrm xmlns:a="http://schemas.openxmlformats.org/drawingml/2006/main">
-            <a:off x="2724150" y="1628775"/>
-            <a:ext cx="3714750" cy="171450"/>
+                <a16:creationId xmlns:a16="http://schemas.microsoft.com/office/drawing/2014/main" id="{CB89C220-2E99-4279-B541-285816FA295D}"/>
+              </a:ext>
+            </a:extLst>
+          </p:cNvPr>
+          <p:cNvSpPr>
+            <a:spLocks xmlns:a="http://schemas.openxmlformats.org/drawingml/2006/main" noGrp="1"/>
+          </p:cNvSpPr>
+          <p:nvPr/>
+        </p:nvSpPr>
+        <p:spPr>
+          <a:xfrm xmlns:a="http://schemas.openxmlformats.org/drawingml/2006/main">
+            <a:off x="876300" y="1676400"/>
+            <a:ext cx="1962150" cy="361950"/>
+          </a:xfrm>
+          <a:prstGeom xmlns:a="http://schemas.openxmlformats.org/drawingml/2006/main" prst="rect">
+            <a:avLst/>
+          </a:prstGeom>
+          <a:solidFill xmlns:a="http://schemas.openxmlformats.org/drawingml/2006/main">
+            <a:srgbClr val="000000">
+              <a:alpha val="0"/>
+            </a:srgbClr>
+          </a:solidFill>
+          <a:ln xmlns:a="http://schemas.openxmlformats.org/drawingml/2006/main" w="0">
+            <a:solidFill>
+              <a:srgbClr val="000000">
+                <a:alpha val="0"/>
+              </a:srgbClr>
+            </a:solidFill>
+            <a:prstDash val="solid"/>
+          </a:ln>
+        </p:spPr>
+        <p:txBody>
+          <a:bodyPr xmlns:a="http://schemas.openxmlformats.org/drawingml/2006/main" lIns="0" tIns="0" rIns="0" bIns="0" anchor="t"/>
+          <a:lstStyle xmlns:a="http://schemas.openxmlformats.org/drawingml/2006/main"/>
+          <a:p xmlns:a="http://schemas.openxmlformats.org/drawingml/2006/main">
+            <a:pPr algn="ctr">
+              <a:defRPr sz="2250" b="1">
+                <a:solidFill>
+                  <a:srgbClr val="2563EB"/>
+                </a:solidFill>
+                <a:latin typeface="Aptos"/>
+                <a:ea typeface="Aptos"/>
+                <a:cs typeface="Aptos"/>
+              </a:defRPr>
+            </a:pPr>
+            <a:r>
+              <a:rPr sz="2250" b="1">
+                <a:solidFill>
+                  <a:srgbClr val="2563EB"/>
+                </a:solidFill>
+                <a:latin typeface="Aptos"/>
+                <a:ea typeface="Aptos"/>
+                <a:cs typeface="Aptos"/>
+              </a:rPr>
+              <a:t>2</a:t>
+            </a:r>
+          </a:p>
+        </p:txBody>
+      </p:sp>
+      <p:sp>
+        <p:nvSpPr>
+          <p:cNvPr id="8" name="">
+            <a:extLst xmlns:a="http://schemas.openxmlformats.org/drawingml/2006/main">
+              <a:ext uri="{FF2B5EF4-FFF2-40B4-BE49-F238E27FC236}">
+                <a16:creationId xmlns:a16="http://schemas.microsoft.com/office/drawing/2014/main" id="{483C6012-5E95-488E-A919-097A38B2689B}"/>
+              </a:ext>
+            </a:extLst>
+          </p:cNvPr>
+          <p:cNvSpPr>
+            <a:spLocks xmlns:a="http://schemas.openxmlformats.org/drawingml/2006/main" noGrp="1"/>
+          </p:cNvSpPr>
+          <p:nvPr/>
+        </p:nvSpPr>
+        <p:spPr>
+          <a:xfrm xmlns:a="http://schemas.openxmlformats.org/drawingml/2006/main">
+            <a:off x="838200" y="2057400"/>
+            <a:ext cx="2038350" cy="209550"/>
+          </a:xfrm>
+          <a:prstGeom xmlns:a="http://schemas.openxmlformats.org/drawingml/2006/main" prst="rect">
+            <a:avLst/>
+          </a:prstGeom>
+          <a:solidFill xmlns:a="http://schemas.openxmlformats.org/drawingml/2006/main">
+            <a:srgbClr val="000000">
+              <a:alpha val="0"/>
+            </a:srgbClr>
+          </a:solidFill>
+          <a:ln xmlns:a="http://schemas.openxmlformats.org/drawingml/2006/main" w="0">
+            <a:solidFill>
+              <a:srgbClr val="000000">
+                <a:alpha val="0"/>
+              </a:srgbClr>
+            </a:solidFill>
+            <a:prstDash val="solid"/>
+          </a:ln>
+        </p:spPr>
+        <p:txBody>
+          <a:bodyPr xmlns:a="http://schemas.openxmlformats.org/drawingml/2006/main" lIns="0" tIns="0" rIns="0" bIns="0" anchor="t"/>
+          <a:lstStyle xmlns:a="http://schemas.openxmlformats.org/drawingml/2006/main"/>
+          <a:p xmlns:a="http://schemas.openxmlformats.org/drawingml/2006/main">
+            <a:pPr algn="ctr">
+              <a:defRPr sz="975" b="1">
+                <a:solidFill>
+                  <a:srgbClr val="111827"/>
+                </a:solidFill>
+                <a:latin typeface="Aptos"/>
+                <a:ea typeface="Aptos"/>
+                <a:cs typeface="Aptos"/>
+              </a:defRPr>
+            </a:pPr>
+            <a:r>
+              <a:rPr sz="975" b="1">
+                <a:solidFill>
+                  <a:srgbClr val="111827"/>
+                </a:solidFill>
+                <a:latin typeface="Aptos"/>
+                <a:ea typeface="Aptos"/>
+                <a:cs typeface="Aptos"/>
+              </a:rPr>
+              <a:t>실행 앱</a:t>
+            </a:r>
+          </a:p>
+        </p:txBody>
+      </p:sp>
+      <p:sp>
+        <p:nvSpPr>
+          <p:cNvPr id="9" name="">
+            <a:extLst xmlns:a="http://schemas.openxmlformats.org/drawingml/2006/main">
+              <a:ext uri="{FF2B5EF4-FFF2-40B4-BE49-F238E27FC236}">
+                <a16:creationId xmlns:a16="http://schemas.microsoft.com/office/drawing/2014/main" id="{9727E279-F5C0-4D59-B051-BA2A1FA6FFC0}"/>
+              </a:ext>
+            </a:extLst>
+          </p:cNvPr>
+          <p:cNvSpPr>
+            <a:spLocks xmlns:a="http://schemas.openxmlformats.org/drawingml/2006/main" noGrp="1"/>
+          </p:cNvSpPr>
+          <p:nvPr/>
+        </p:nvSpPr>
+        <p:spPr>
+          <a:xfrm xmlns:a="http://schemas.openxmlformats.org/drawingml/2006/main">
+            <a:off x="838200" y="2286000"/>
+            <a:ext cx="2038350" cy="190500"/>
+          </a:xfrm>
+          <a:prstGeom xmlns:a="http://schemas.openxmlformats.org/drawingml/2006/main" prst="rect">
+            <a:avLst/>
+          </a:prstGeom>
+          <a:solidFill xmlns:a="http://schemas.openxmlformats.org/drawingml/2006/main">
+            <a:srgbClr val="000000">
+              <a:alpha val="0"/>
+            </a:srgbClr>
+          </a:solidFill>
+          <a:ln xmlns:a="http://schemas.openxmlformats.org/drawingml/2006/main" w="0">
+            <a:solidFill>
+              <a:srgbClr val="000000">
+                <a:alpha val="0"/>
+              </a:srgbClr>
+            </a:solidFill>
+            <a:prstDash val="solid"/>
+          </a:ln>
+        </p:spPr>
+        <p:txBody>
+          <a:bodyPr xmlns:a="http://schemas.openxmlformats.org/drawingml/2006/main" lIns="0" tIns="0" rIns="0" bIns="0" anchor="t"/>
+          <a:lstStyle xmlns:a="http://schemas.openxmlformats.org/drawingml/2006/main"/>
+          <a:p xmlns:a="http://schemas.openxmlformats.org/drawingml/2006/main">
+            <a:pPr algn="ctr">
+              <a:defRPr sz="675" b="0">
+                <a:solidFill>
+                  <a:srgbClr val="64748B"/>
+                </a:solidFill>
+                <a:latin typeface="Aptos"/>
+                <a:ea typeface="Aptos"/>
+                <a:cs typeface="Aptos"/>
+              </a:defRPr>
+            </a:pPr>
+            <a:r>
+              <a:rPr sz="675" b="0">
+                <a:solidFill>
+                  <a:srgbClr val="64748B"/>
+                </a:solidFill>
+                <a:latin typeface="Aptos"/>
+                <a:ea typeface="Aptos"/>
+                <a:cs typeface="Aptos"/>
+              </a:rPr>
+              <a:t>WPF HMI + Flask Dashboard</a:t>
+            </a:r>
+          </a:p>
+        </p:txBody>
+      </p:sp>
+      <p:sp>
+        <p:nvSpPr>
+          <p:cNvPr id="10" name="">
+            <a:extLst xmlns:a="http://schemas.openxmlformats.org/drawingml/2006/main">
+              <a:ext uri="{FF2B5EF4-FFF2-40B4-BE49-F238E27FC236}">
+                <a16:creationId xmlns:a16="http://schemas.microsoft.com/office/drawing/2014/main" id="{B95CCDC0-F1E7-4A85-85EC-C8C4F0FD46C6}"/>
+              </a:ext>
+            </a:extLst>
+          </p:cNvPr>
+          <p:cNvSpPr>
+            <a:spLocks xmlns:a="http://schemas.openxmlformats.org/drawingml/2006/main" noGrp="1"/>
+          </p:cNvSpPr>
+          <p:nvPr/>
+        </p:nvSpPr>
+        <p:spPr>
+          <a:xfrm xmlns:a="http://schemas.openxmlformats.org/drawingml/2006/main">
+            <a:off x="3333750" y="1428750"/>
+            <a:ext cx="2381250" cy="1123950"/>
+          </a:xfrm>
+          <a:prstGeom xmlns:a="http://schemas.openxmlformats.org/drawingml/2006/main" prst="rect">
+            <a:avLst/>
+          </a:prstGeom>
+          <a:solidFill xmlns:a="http://schemas.openxmlformats.org/drawingml/2006/main">
+            <a:srgbClr val="F8FAFC"/>
+          </a:solidFill>
+          <a:ln xmlns:a="http://schemas.openxmlformats.org/drawingml/2006/main" w="9525">
+            <a:solidFill>
+              <a:srgbClr val="CBD5E1"/>
+            </a:solidFill>
+            <a:prstDash val="solid"/>
+          </a:ln>
+        </p:spPr>
+      </p:sp>
+      <p:sp>
+        <p:nvSpPr>
+          <p:cNvPr id="11" name="">
+            <a:extLst xmlns:a="http://schemas.openxmlformats.org/drawingml/2006/main">
+              <a:ext uri="{FF2B5EF4-FFF2-40B4-BE49-F238E27FC236}">
+                <a16:creationId xmlns:a16="http://schemas.microsoft.com/office/drawing/2014/main" id="{20F8D93F-4918-4BD2-92AB-54A54F316C0C}"/>
+              </a:ext>
+            </a:extLst>
+          </p:cNvPr>
+          <p:cNvSpPr>
+            <a:spLocks xmlns:a="http://schemas.openxmlformats.org/drawingml/2006/main" noGrp="1"/>
+          </p:cNvSpPr>
+          <p:nvPr/>
+        </p:nvSpPr>
+        <p:spPr>
+          <a:xfrm xmlns:a="http://schemas.openxmlformats.org/drawingml/2006/main">
+            <a:off x="3333750" y="1428750"/>
+            <a:ext cx="2381250" cy="57150"/>
+          </a:xfrm>
+          <a:prstGeom xmlns:a="http://schemas.openxmlformats.org/drawingml/2006/main" prst="rect">
+            <a:avLst/>
+          </a:prstGeom>
+          <a:solidFill xmlns:a="http://schemas.openxmlformats.org/drawingml/2006/main">
+            <a:srgbClr val="06B6D4"/>
+          </a:solidFill>
+          <a:ln xmlns:a="http://schemas.openxmlformats.org/drawingml/2006/main" w="0">
+            <a:solidFill>
+              <a:srgbClr val="000000">
+                <a:alpha val="0"/>
+              </a:srgbClr>
+            </a:solidFill>
+            <a:prstDash val="solid"/>
+          </a:ln>
+        </p:spPr>
+      </p:sp>
+      <p:sp>
+        <p:nvSpPr>
+          <p:cNvPr id="12" name="">
+            <a:extLst xmlns:a="http://schemas.openxmlformats.org/drawingml/2006/main">
+              <a:ext uri="{FF2B5EF4-FFF2-40B4-BE49-F238E27FC236}">
+                <a16:creationId xmlns:a16="http://schemas.microsoft.com/office/drawing/2014/main" id="{009F16D6-1AAA-4130-B6EE-522894774DBC}"/>
+              </a:ext>
+            </a:extLst>
+          </p:cNvPr>
+          <p:cNvSpPr>
+            <a:spLocks xmlns:a="http://schemas.openxmlformats.org/drawingml/2006/main" noGrp="1"/>
+          </p:cNvSpPr>
+          <p:nvPr/>
+        </p:nvSpPr>
+        <p:spPr>
+          <a:xfrm xmlns:a="http://schemas.openxmlformats.org/drawingml/2006/main">
+            <a:off x="3543300" y="1676400"/>
+            <a:ext cx="1962150" cy="361950"/>
+          </a:xfrm>
+          <a:prstGeom xmlns:a="http://schemas.openxmlformats.org/drawingml/2006/main" prst="rect">
+            <a:avLst/>
+          </a:prstGeom>
+          <a:solidFill xmlns:a="http://schemas.openxmlformats.org/drawingml/2006/main">
+            <a:srgbClr val="000000">
+              <a:alpha val="0"/>
+            </a:srgbClr>
+          </a:solidFill>
+          <a:ln xmlns:a="http://schemas.openxmlformats.org/drawingml/2006/main" w="0">
+            <a:solidFill>
+              <a:srgbClr val="000000">
+                <a:alpha val="0"/>
+              </a:srgbClr>
+            </a:solidFill>
+            <a:prstDash val="solid"/>
+          </a:ln>
+        </p:spPr>
+        <p:txBody>
+          <a:bodyPr xmlns:a="http://schemas.openxmlformats.org/drawingml/2006/main" lIns="0" tIns="0" rIns="0" bIns="0" anchor="t"/>
+          <a:lstStyle xmlns:a="http://schemas.openxmlformats.org/drawingml/2006/main"/>
+          <a:p xmlns:a="http://schemas.openxmlformats.org/drawingml/2006/main">
+            <a:pPr algn="ctr">
+              <a:defRPr sz="2250" b="1">
+                <a:solidFill>
+                  <a:srgbClr val="06B6D4"/>
+                </a:solidFill>
+                <a:latin typeface="Aptos"/>
+                <a:ea typeface="Aptos"/>
+                <a:cs typeface="Aptos"/>
+              </a:defRPr>
+            </a:pPr>
+            <a:r>
+              <a:rPr sz="2250" b="1">
+                <a:solidFill>
+                  <a:srgbClr val="06B6D4"/>
+                </a:solidFill>
+                <a:latin typeface="Aptos"/>
+                <a:ea typeface="Aptos"/>
+                <a:cs typeface="Aptos"/>
+              </a:rPr>
+              <a:t>6+</a:t>
+            </a:r>
+          </a:p>
+        </p:txBody>
+      </p:sp>
+      <p:sp>
+        <p:nvSpPr>
+          <p:cNvPr id="13" name="">
+            <a:extLst xmlns:a="http://schemas.openxmlformats.org/drawingml/2006/main">
+              <a:ext uri="{FF2B5EF4-FFF2-40B4-BE49-F238E27FC236}">
+                <a16:creationId xmlns:a16="http://schemas.microsoft.com/office/drawing/2014/main" id="{8EF73CAA-506A-4CCD-B82A-9CB304AB6BE2}"/>
+              </a:ext>
+            </a:extLst>
+          </p:cNvPr>
+          <p:cNvSpPr>
+            <a:spLocks xmlns:a="http://schemas.openxmlformats.org/drawingml/2006/main" noGrp="1"/>
+          </p:cNvSpPr>
+          <p:nvPr/>
+        </p:nvSpPr>
+        <p:spPr>
+          <a:xfrm xmlns:a="http://schemas.openxmlformats.org/drawingml/2006/main">
+            <a:off x="3505200" y="2057400"/>
+            <a:ext cx="2038350" cy="209550"/>
+          </a:xfrm>
+          <a:prstGeom xmlns:a="http://schemas.openxmlformats.org/drawingml/2006/main" prst="rect">
+            <a:avLst/>
+          </a:prstGeom>
+          <a:solidFill xmlns:a="http://schemas.openxmlformats.org/drawingml/2006/main">
+            <a:srgbClr val="000000">
+              <a:alpha val="0"/>
+            </a:srgbClr>
+          </a:solidFill>
+          <a:ln xmlns:a="http://schemas.openxmlformats.org/drawingml/2006/main" w="0">
+            <a:solidFill>
+              <a:srgbClr val="000000">
+                <a:alpha val="0"/>
+              </a:srgbClr>
+            </a:solidFill>
+            <a:prstDash val="solid"/>
+          </a:ln>
+        </p:spPr>
+        <p:txBody>
+          <a:bodyPr xmlns:a="http://schemas.openxmlformats.org/drawingml/2006/main" lIns="0" tIns="0" rIns="0" bIns="0" anchor="t"/>
+          <a:lstStyle xmlns:a="http://schemas.openxmlformats.org/drawingml/2006/main"/>
+          <a:p xmlns:a="http://schemas.openxmlformats.org/drawingml/2006/main">
+            <a:pPr algn="ctr">
+              <a:defRPr sz="975" b="1">
+                <a:solidFill>
+                  <a:srgbClr val="111827"/>
+                </a:solidFill>
+                <a:latin typeface="Aptos"/>
+                <a:ea typeface="Aptos"/>
+                <a:cs typeface="Aptos"/>
+              </a:defRPr>
+            </a:pPr>
+            <a:r>
+              <a:rPr sz="975" b="1">
+                <a:solidFill>
+                  <a:srgbClr val="111827"/>
+                </a:solidFill>
+                <a:latin typeface="Aptos"/>
+                <a:ea typeface="Aptos"/>
+                <a:cs typeface="Aptos"/>
+              </a:rPr>
+              <a:t>주요 API</a:t>
+            </a:r>
+          </a:p>
+        </p:txBody>
+      </p:sp>
+      <p:sp>
+        <p:nvSpPr>
+          <p:cNvPr id="14" name="">
+            <a:extLst xmlns:a="http://schemas.openxmlformats.org/drawingml/2006/main">
+              <a:ext uri="{FF2B5EF4-FFF2-40B4-BE49-F238E27FC236}">
+                <a16:creationId xmlns:a16="http://schemas.microsoft.com/office/drawing/2014/main" id="{6CE1339C-A8A8-47E4-937A-D602D8F03383}"/>
+              </a:ext>
+            </a:extLst>
+          </p:cNvPr>
+          <p:cNvSpPr>
+            <a:spLocks xmlns:a="http://schemas.openxmlformats.org/drawingml/2006/main" noGrp="1"/>
+          </p:cNvSpPr>
+          <p:nvPr/>
+        </p:nvSpPr>
+        <p:spPr>
+          <a:xfrm xmlns:a="http://schemas.openxmlformats.org/drawingml/2006/main">
+            <a:off x="3505200" y="2286000"/>
+            <a:ext cx="2038350" cy="190500"/>
+          </a:xfrm>
+          <a:prstGeom xmlns:a="http://schemas.openxmlformats.org/drawingml/2006/main" prst="rect">
+            <a:avLst/>
+          </a:prstGeom>
+          <a:solidFill xmlns:a="http://schemas.openxmlformats.org/drawingml/2006/main">
+            <a:srgbClr val="000000">
+              <a:alpha val="0"/>
+            </a:srgbClr>
+          </a:solidFill>
+          <a:ln xmlns:a="http://schemas.openxmlformats.org/drawingml/2006/main" w="0">
+            <a:solidFill>
+              <a:srgbClr val="000000">
+                <a:alpha val="0"/>
+              </a:srgbClr>
+            </a:solidFill>
+            <a:prstDash val="solid"/>
+          </a:ln>
+        </p:spPr>
+        <p:txBody>
+          <a:bodyPr xmlns:a="http://schemas.openxmlformats.org/drawingml/2006/main" lIns="0" tIns="0" rIns="0" bIns="0" anchor="t"/>
+          <a:lstStyle xmlns:a="http://schemas.openxmlformats.org/drawingml/2006/main"/>
+          <a:p xmlns:a="http://schemas.openxmlformats.org/drawingml/2006/main">
+            <a:pPr algn="ctr">
+              <a:defRPr sz="675" b="0">
+                <a:solidFill>
+                  <a:srgbClr val="64748B"/>
+                </a:solidFill>
+                <a:latin typeface="Aptos"/>
+                <a:ea typeface="Aptos"/>
+                <a:cs typeface="Aptos"/>
+              </a:defRPr>
+            </a:pPr>
+            <a:r>
+              <a:rPr sz="675" b="0">
+                <a:solidFill>
+                  <a:srgbClr val="64748B"/>
+                </a:solidFill>
+                <a:latin typeface="Aptos"/>
+                <a:ea typeface="Aptos"/>
+                <a:cs typeface="Aptos"/>
+              </a:rPr>
+              <a:t>sensors, history, events, modules, recipe, AI</a:t>
+            </a:r>
+          </a:p>
+        </p:txBody>
+      </p:sp>
+      <p:sp>
+        <p:nvSpPr>
+          <p:cNvPr id="15" name="">
+            <a:extLst xmlns:a="http://schemas.openxmlformats.org/drawingml/2006/main">
+              <a:ext uri="{FF2B5EF4-FFF2-40B4-BE49-F238E27FC236}">
+                <a16:creationId xmlns:a16="http://schemas.microsoft.com/office/drawing/2014/main" id="{5F40BBB6-A1B3-4CA0-B04F-50A274BA0D28}"/>
+              </a:ext>
+            </a:extLst>
+          </p:cNvPr>
+          <p:cNvSpPr>
+            <a:spLocks xmlns:a="http://schemas.openxmlformats.org/drawingml/2006/main" noGrp="1"/>
+          </p:cNvSpPr>
+          <p:nvPr/>
+        </p:nvSpPr>
+        <p:spPr>
+          <a:xfrm xmlns:a="http://schemas.openxmlformats.org/drawingml/2006/main">
+            <a:off x="6000750" y="1428750"/>
+            <a:ext cx="2381250" cy="1123950"/>
+          </a:xfrm>
+          <a:prstGeom xmlns:a="http://schemas.openxmlformats.org/drawingml/2006/main" prst="rect">
+            <a:avLst/>
+          </a:prstGeom>
+          <a:solidFill xmlns:a="http://schemas.openxmlformats.org/drawingml/2006/main">
+            <a:srgbClr val="F8FAFC"/>
+          </a:solidFill>
+          <a:ln xmlns:a="http://schemas.openxmlformats.org/drawingml/2006/main" w="9525">
+            <a:solidFill>
+              <a:srgbClr val="CBD5E1"/>
+            </a:solidFill>
+            <a:prstDash val="solid"/>
+          </a:ln>
+        </p:spPr>
+      </p:sp>
+      <p:sp>
+        <p:nvSpPr>
+          <p:cNvPr id="16" name="">
+            <a:extLst xmlns:a="http://schemas.openxmlformats.org/drawingml/2006/main">
+              <a:ext uri="{FF2B5EF4-FFF2-40B4-BE49-F238E27FC236}">
+                <a16:creationId xmlns:a16="http://schemas.microsoft.com/office/drawing/2014/main" id="{4E4D1142-7E92-4EFE-9A71-5D7352001C02}"/>
+              </a:ext>
+            </a:extLst>
+          </p:cNvPr>
+          <p:cNvSpPr>
+            <a:spLocks xmlns:a="http://schemas.openxmlformats.org/drawingml/2006/main" noGrp="1"/>
+          </p:cNvSpPr>
+          <p:nvPr/>
+        </p:nvSpPr>
+        <p:spPr>
+          <a:xfrm xmlns:a="http://schemas.openxmlformats.org/drawingml/2006/main">
+            <a:off x="6000750" y="1428750"/>
+            <a:ext cx="2381250" cy="57150"/>
+          </a:xfrm>
+          <a:prstGeom xmlns:a="http://schemas.openxmlformats.org/drawingml/2006/main" prst="rect">
+            <a:avLst/>
+          </a:prstGeom>
+          <a:solidFill xmlns:a="http://schemas.openxmlformats.org/drawingml/2006/main">
+            <a:srgbClr val="16A34A"/>
+          </a:solidFill>
+          <a:ln xmlns:a="http://schemas.openxmlformats.org/drawingml/2006/main" w="0">
+            <a:solidFill>
+              <a:srgbClr val="000000">
+                <a:alpha val="0"/>
+              </a:srgbClr>
+            </a:solidFill>
+            <a:prstDash val="solid"/>
+          </a:ln>
+        </p:spPr>
+      </p:sp>
+      <p:sp>
+        <p:nvSpPr>
+          <p:cNvPr id="17" name="">
+            <a:extLst xmlns:a="http://schemas.openxmlformats.org/drawingml/2006/main">
+              <a:ext uri="{FF2B5EF4-FFF2-40B4-BE49-F238E27FC236}">
+                <a16:creationId xmlns:a16="http://schemas.microsoft.com/office/drawing/2014/main" id="{393F951B-06B9-42AD-81A3-C1B7D31CBCBC}"/>
+              </a:ext>
+            </a:extLst>
+          </p:cNvPr>
+          <p:cNvSpPr>
+            <a:spLocks xmlns:a="http://schemas.openxmlformats.org/drawingml/2006/main" noGrp="1"/>
+          </p:cNvSpPr>
+          <p:nvPr/>
+        </p:nvSpPr>
+        <p:spPr>
+          <a:xfrm xmlns:a="http://schemas.openxmlformats.org/drawingml/2006/main">
+            <a:off x="6210300" y="1676400"/>
+            <a:ext cx="1962150" cy="361950"/>
+          </a:xfrm>
+          <a:prstGeom xmlns:a="http://schemas.openxmlformats.org/drawingml/2006/main" prst="rect">
+            <a:avLst/>
+          </a:prstGeom>
+          <a:solidFill xmlns:a="http://schemas.openxmlformats.org/drawingml/2006/main">
+            <a:srgbClr val="000000">
+              <a:alpha val="0"/>
+            </a:srgbClr>
+          </a:solidFill>
+          <a:ln xmlns:a="http://schemas.openxmlformats.org/drawingml/2006/main" w="0">
+            <a:solidFill>
+              <a:srgbClr val="000000">
+                <a:alpha val="0"/>
+              </a:srgbClr>
+            </a:solidFill>
+            <a:prstDash val="solid"/>
+          </a:ln>
+        </p:spPr>
+        <p:txBody>
+          <a:bodyPr xmlns:a="http://schemas.openxmlformats.org/drawingml/2006/main" lIns="0" tIns="0" rIns="0" bIns="0" anchor="t"/>
+          <a:lstStyle xmlns:a="http://schemas.openxmlformats.org/drawingml/2006/main"/>
+          <a:p xmlns:a="http://schemas.openxmlformats.org/drawingml/2006/main">
+            <a:pPr algn="ctr">
+              <a:defRPr sz="2250" b="1">
+                <a:solidFill>
+                  <a:srgbClr val="16A34A"/>
+                </a:solidFill>
+                <a:latin typeface="Aptos"/>
+                <a:ea typeface="Aptos"/>
+                <a:cs typeface="Aptos"/>
+              </a:defRPr>
+            </a:pPr>
+            <a:r>
+              <a:rPr sz="2250" b="1">
+                <a:solidFill>
+                  <a:srgbClr val="16A34A"/>
+                </a:solidFill>
+                <a:latin typeface="Aptos"/>
+                <a:ea typeface="Aptos"/>
+                <a:cs typeface="Aptos"/>
+              </a:rPr>
+              <a:t>8</a:t>
+            </a:r>
+          </a:p>
+        </p:txBody>
+      </p:sp>
+      <p:sp>
+        <p:nvSpPr>
+          <p:cNvPr id="18" name="">
+            <a:extLst xmlns:a="http://schemas.openxmlformats.org/drawingml/2006/main">
+              <a:ext uri="{FF2B5EF4-FFF2-40B4-BE49-F238E27FC236}">
+                <a16:creationId xmlns:a16="http://schemas.microsoft.com/office/drawing/2014/main" id="{EDAD9CAB-3C28-4633-9765-68B832F254F6}"/>
+              </a:ext>
+            </a:extLst>
+          </p:cNvPr>
+          <p:cNvSpPr>
+            <a:spLocks xmlns:a="http://schemas.openxmlformats.org/drawingml/2006/main" noGrp="1"/>
+          </p:cNvSpPr>
+          <p:nvPr/>
+        </p:nvSpPr>
+        <p:spPr>
+          <a:xfrm xmlns:a="http://schemas.openxmlformats.org/drawingml/2006/main">
+            <a:off x="6172200" y="2057400"/>
+            <a:ext cx="2038350" cy="209550"/>
+          </a:xfrm>
+          <a:prstGeom xmlns:a="http://schemas.openxmlformats.org/drawingml/2006/main" prst="rect">
+            <a:avLst/>
+          </a:prstGeom>
+          <a:solidFill xmlns:a="http://schemas.openxmlformats.org/drawingml/2006/main">
+            <a:srgbClr val="000000">
+              <a:alpha val="0"/>
+            </a:srgbClr>
+          </a:solidFill>
+          <a:ln xmlns:a="http://schemas.openxmlformats.org/drawingml/2006/main" w="0">
+            <a:solidFill>
+              <a:srgbClr val="000000">
+                <a:alpha val="0"/>
+              </a:srgbClr>
+            </a:solidFill>
+            <a:prstDash val="solid"/>
+          </a:ln>
+        </p:spPr>
+        <p:txBody>
+          <a:bodyPr xmlns:a="http://schemas.openxmlformats.org/drawingml/2006/main" lIns="0" tIns="0" rIns="0" bIns="0" anchor="t"/>
+          <a:lstStyle xmlns:a="http://schemas.openxmlformats.org/drawingml/2006/main"/>
+          <a:p xmlns:a="http://schemas.openxmlformats.org/drawingml/2006/main">
+            <a:pPr algn="ctr">
+              <a:defRPr sz="975" b="1">
+                <a:solidFill>
+                  <a:srgbClr val="111827"/>
+                </a:solidFill>
+                <a:latin typeface="Aptos"/>
+                <a:ea typeface="Aptos"/>
+                <a:cs typeface="Aptos"/>
+              </a:defRPr>
+            </a:pPr>
+            <a:r>
+              <a:rPr sz="975" b="1">
+                <a:solidFill>
+                  <a:srgbClr val="111827"/>
+                </a:solidFill>
+                <a:latin typeface="Aptos"/>
+                <a:ea typeface="Aptos"/>
+                <a:cs typeface="Aptos"/>
+              </a:rPr>
+              <a:t>모듈 상태</a:t>
+            </a:r>
+          </a:p>
+        </p:txBody>
+      </p:sp>
+      <p:sp>
+        <p:nvSpPr>
+          <p:cNvPr id="19" name="">
+            <a:extLst xmlns:a="http://schemas.openxmlformats.org/drawingml/2006/main">
+              <a:ext uri="{FF2B5EF4-FFF2-40B4-BE49-F238E27FC236}">
+                <a16:creationId xmlns:a16="http://schemas.microsoft.com/office/drawing/2014/main" id="{2905A6EA-55AB-472E-A304-01B8FF84747A}"/>
+              </a:ext>
+            </a:extLst>
+          </p:cNvPr>
+          <p:cNvSpPr>
+            <a:spLocks xmlns:a="http://schemas.openxmlformats.org/drawingml/2006/main" noGrp="1"/>
+          </p:cNvSpPr>
+          <p:nvPr/>
+        </p:nvSpPr>
+        <p:spPr>
+          <a:xfrm xmlns:a="http://schemas.openxmlformats.org/drawingml/2006/main">
+            <a:off x="6172200" y="2286000"/>
+            <a:ext cx="2038350" cy="190500"/>
+          </a:xfrm>
+          <a:prstGeom xmlns:a="http://schemas.openxmlformats.org/drawingml/2006/main" prst="rect">
+            <a:avLst/>
+          </a:prstGeom>
+          <a:solidFill xmlns:a="http://schemas.openxmlformats.org/drawingml/2006/main">
+            <a:srgbClr val="000000">
+              <a:alpha val="0"/>
+            </a:srgbClr>
+          </a:solidFill>
+          <a:ln xmlns:a="http://schemas.openxmlformats.org/drawingml/2006/main" w="0">
+            <a:solidFill>
+              <a:srgbClr val="000000">
+                <a:alpha val="0"/>
+              </a:srgbClr>
+            </a:solidFill>
+            <a:prstDash val="solid"/>
+          </a:ln>
+        </p:spPr>
+        <p:txBody>
+          <a:bodyPr xmlns:a="http://schemas.openxmlformats.org/drawingml/2006/main" lIns="0" tIns="0" rIns="0" bIns="0" anchor="t"/>
+          <a:lstStyle xmlns:a="http://schemas.openxmlformats.org/drawingml/2006/main"/>
+          <a:p xmlns:a="http://schemas.openxmlformats.org/drawingml/2006/main">
+            <a:pPr algn="ctr">
+              <a:defRPr sz="675" b="0">
+                <a:solidFill>
+                  <a:srgbClr val="64748B"/>
+                </a:solidFill>
+                <a:latin typeface="Aptos"/>
+                <a:ea typeface="Aptos"/>
+                <a:cs typeface="Aptos"/>
+              </a:defRPr>
+            </a:pPr>
+            <a:r>
+              <a:rPr sz="675" b="0">
+                <a:solidFill>
+                  <a:srgbClr val="64748B"/>
+                </a:solidFill>
+                <a:latin typeface="Aptos"/>
+                <a:ea typeface="Aptos"/>
+                <a:cs typeface="Aptos"/>
+              </a:rPr>
+              <a:t>LP/AL/BM/PM/SIDE 화면 표시</a:t>
+            </a:r>
+          </a:p>
+        </p:txBody>
+      </p:sp>
+      <p:sp>
+        <p:nvSpPr>
+          <p:cNvPr id="20" name="">
+            <a:extLst xmlns:a="http://schemas.openxmlformats.org/drawingml/2006/main">
+              <a:ext uri="{FF2B5EF4-FFF2-40B4-BE49-F238E27FC236}">
+                <a16:creationId xmlns:a16="http://schemas.microsoft.com/office/drawing/2014/main" id="{DC8EA51D-73D0-4CE8-9B8D-E040648532FF}"/>
+              </a:ext>
+            </a:extLst>
+          </p:cNvPr>
+          <p:cNvSpPr>
+            <a:spLocks xmlns:a="http://schemas.openxmlformats.org/drawingml/2006/main" noGrp="1"/>
+          </p:cNvSpPr>
+          <p:nvPr/>
+        </p:nvSpPr>
+        <p:spPr>
+          <a:xfrm xmlns:a="http://schemas.openxmlformats.org/drawingml/2006/main">
+            <a:off x="8667750" y="1428750"/>
+            <a:ext cx="2381250" cy="1123950"/>
+          </a:xfrm>
+          <a:prstGeom xmlns:a="http://schemas.openxmlformats.org/drawingml/2006/main" prst="rect">
+            <a:avLst/>
+          </a:prstGeom>
+          <a:solidFill xmlns:a="http://schemas.openxmlformats.org/drawingml/2006/main">
+            <a:srgbClr val="F8FAFC"/>
+          </a:solidFill>
+          <a:ln xmlns:a="http://schemas.openxmlformats.org/drawingml/2006/main" w="9525">
+            <a:solidFill>
+              <a:srgbClr val="CBD5E1"/>
+            </a:solidFill>
+            <a:prstDash val="solid"/>
+          </a:ln>
+        </p:spPr>
+      </p:sp>
+      <p:sp>
+        <p:nvSpPr>
+          <p:cNvPr id="21" name="">
+            <a:extLst xmlns:a="http://schemas.openxmlformats.org/drawingml/2006/main">
+              <a:ext uri="{FF2B5EF4-FFF2-40B4-BE49-F238E27FC236}">
+                <a16:creationId xmlns:a16="http://schemas.microsoft.com/office/drawing/2014/main" id="{71C1E39B-3F87-4C4B-A1D6-469D43C70B3B}"/>
+              </a:ext>
+            </a:extLst>
+          </p:cNvPr>
+          <p:cNvSpPr>
+            <a:spLocks xmlns:a="http://schemas.openxmlformats.org/drawingml/2006/main" noGrp="1"/>
+          </p:cNvSpPr>
+          <p:nvPr/>
+        </p:nvSpPr>
+        <p:spPr>
+          <a:xfrm xmlns:a="http://schemas.openxmlformats.org/drawingml/2006/main">
+            <a:off x="8667750" y="1428750"/>
+            <a:ext cx="2381250" cy="57150"/>
+          </a:xfrm>
+          <a:prstGeom xmlns:a="http://schemas.openxmlformats.org/drawingml/2006/main" prst="rect">
+            <a:avLst/>
+          </a:prstGeom>
+          <a:solidFill xmlns:a="http://schemas.openxmlformats.org/drawingml/2006/main">
+            <a:srgbClr val="7C3AED"/>
+          </a:solidFill>
+          <a:ln xmlns:a="http://schemas.openxmlformats.org/drawingml/2006/main" w="0">
+            <a:solidFill>
+              <a:srgbClr val="000000">
+                <a:alpha val="0"/>
+              </a:srgbClr>
+            </a:solidFill>
+            <a:prstDash val="solid"/>
+          </a:ln>
+        </p:spPr>
+      </p:sp>
+      <p:sp>
+        <p:nvSpPr>
+          <p:cNvPr id="22" name="">
+            <a:extLst xmlns:a="http://schemas.openxmlformats.org/drawingml/2006/main">
+              <a:ext uri="{FF2B5EF4-FFF2-40B4-BE49-F238E27FC236}">
+                <a16:creationId xmlns:a16="http://schemas.microsoft.com/office/drawing/2014/main" id="{E60A33D0-38F5-430A-BCC7-4A894439495C}"/>
+              </a:ext>
+            </a:extLst>
+          </p:cNvPr>
+          <p:cNvSpPr>
+            <a:spLocks xmlns:a="http://schemas.openxmlformats.org/drawingml/2006/main" noGrp="1"/>
+          </p:cNvSpPr>
+          <p:nvPr/>
+        </p:nvSpPr>
+        <p:spPr>
+          <a:xfrm xmlns:a="http://schemas.openxmlformats.org/drawingml/2006/main">
+            <a:off x="8877300" y="1676400"/>
+            <a:ext cx="1962150" cy="361950"/>
+          </a:xfrm>
+          <a:prstGeom xmlns:a="http://schemas.openxmlformats.org/drawingml/2006/main" prst="rect">
+            <a:avLst/>
+          </a:prstGeom>
+          <a:solidFill xmlns:a="http://schemas.openxmlformats.org/drawingml/2006/main">
+            <a:srgbClr val="000000">
+              <a:alpha val="0"/>
+            </a:srgbClr>
+          </a:solidFill>
+          <a:ln xmlns:a="http://schemas.openxmlformats.org/drawingml/2006/main" w="0">
+            <a:solidFill>
+              <a:srgbClr val="000000">
+                <a:alpha val="0"/>
+              </a:srgbClr>
+            </a:solidFill>
+            <a:prstDash val="solid"/>
+          </a:ln>
+        </p:spPr>
+        <p:txBody>
+          <a:bodyPr xmlns:a="http://schemas.openxmlformats.org/drawingml/2006/main" lIns="0" tIns="0" rIns="0" bIns="0" anchor="t"/>
+          <a:lstStyle xmlns:a="http://schemas.openxmlformats.org/drawingml/2006/main"/>
+          <a:p xmlns:a="http://schemas.openxmlformats.org/drawingml/2006/main">
+            <a:pPr algn="ctr">
+              <a:defRPr sz="2250" b="1">
+                <a:solidFill>
+                  <a:srgbClr val="7C3AED"/>
+                </a:solidFill>
+                <a:latin typeface="Aptos"/>
+                <a:ea typeface="Aptos"/>
+                <a:cs typeface="Aptos"/>
+              </a:defRPr>
+            </a:pPr>
+            <a:r>
+              <a:rPr sz="2250" b="1">
+                <a:solidFill>
+                  <a:srgbClr val="7C3AED"/>
+                </a:solidFill>
+                <a:latin typeface="Aptos"/>
+                <a:ea typeface="Aptos"/>
+                <a:cs typeface="Aptos"/>
+              </a:rPr>
+              <a:t>10</a:t>
+            </a:r>
+          </a:p>
+        </p:txBody>
+      </p:sp>
+      <p:sp>
+        <p:nvSpPr>
+          <p:cNvPr id="23" name="">
+            <a:extLst xmlns:a="http://schemas.openxmlformats.org/drawingml/2006/main">
+              <a:ext uri="{FF2B5EF4-FFF2-40B4-BE49-F238E27FC236}">
+                <a16:creationId xmlns:a16="http://schemas.microsoft.com/office/drawing/2014/main" id="{C287535A-5015-4630-AF08-8BE4FC8C8397}"/>
+              </a:ext>
+            </a:extLst>
+          </p:cNvPr>
+          <p:cNvSpPr>
+            <a:spLocks xmlns:a="http://schemas.openxmlformats.org/drawingml/2006/main" noGrp="1"/>
+          </p:cNvSpPr>
+          <p:nvPr/>
+        </p:nvSpPr>
+        <p:spPr>
+          <a:xfrm xmlns:a="http://schemas.openxmlformats.org/drawingml/2006/main">
+            <a:off x="8839200" y="2057400"/>
+            <a:ext cx="2038350" cy="209550"/>
+          </a:xfrm>
+          <a:prstGeom xmlns:a="http://schemas.openxmlformats.org/drawingml/2006/main" prst="rect">
+            <a:avLst/>
+          </a:prstGeom>
+          <a:solidFill xmlns:a="http://schemas.openxmlformats.org/drawingml/2006/main">
+            <a:srgbClr val="000000">
+              <a:alpha val="0"/>
+            </a:srgbClr>
+          </a:solidFill>
+          <a:ln xmlns:a="http://schemas.openxmlformats.org/drawingml/2006/main" w="0">
+            <a:solidFill>
+              <a:srgbClr val="000000">
+                <a:alpha val="0"/>
+              </a:srgbClr>
+            </a:solidFill>
+            <a:prstDash val="solid"/>
+          </a:ln>
+        </p:spPr>
+        <p:txBody>
+          <a:bodyPr xmlns:a="http://schemas.openxmlformats.org/drawingml/2006/main" lIns="0" tIns="0" rIns="0" bIns="0" anchor="t"/>
+          <a:lstStyle xmlns:a="http://schemas.openxmlformats.org/drawingml/2006/main"/>
+          <a:p xmlns:a="http://schemas.openxmlformats.org/drawingml/2006/main">
+            <a:pPr algn="ctr">
+              <a:defRPr sz="975" b="1">
+                <a:solidFill>
+                  <a:srgbClr val="111827"/>
+                </a:solidFill>
+                <a:latin typeface="Aptos"/>
+                <a:ea typeface="Aptos"/>
+                <a:cs typeface="Aptos"/>
+              </a:defRPr>
+            </a:pPr>
+            <a:r>
+              <a:rPr sz="975" b="1">
+                <a:solidFill>
+                  <a:srgbClr val="111827"/>
+                </a:solidFill>
+                <a:latin typeface="Aptos"/>
+                <a:ea typeface="Aptos"/>
+                <a:cs typeface="Aptos"/>
+              </a:rPr>
+              <a:t>보고서 슬라이드</a:t>
+            </a:r>
+          </a:p>
+        </p:txBody>
+      </p:sp>
+      <p:sp>
+        <p:nvSpPr>
+          <p:cNvPr id="24" name="">
+            <a:extLst xmlns:a="http://schemas.openxmlformats.org/drawingml/2006/main">
+              <a:ext uri="{FF2B5EF4-FFF2-40B4-BE49-F238E27FC236}">
+                <a16:creationId xmlns:a16="http://schemas.microsoft.com/office/drawing/2014/main" id="{C23FDFD8-BF05-4880-AE0D-DB0C50B11B92}"/>
+              </a:ext>
+            </a:extLst>
+          </p:cNvPr>
+          <p:cNvSpPr>
+            <a:spLocks xmlns:a="http://schemas.openxmlformats.org/drawingml/2006/main" noGrp="1"/>
+          </p:cNvSpPr>
+          <p:nvPr/>
+        </p:nvSpPr>
+        <p:spPr>
+          <a:xfrm xmlns:a="http://schemas.openxmlformats.org/drawingml/2006/main">
+            <a:off x="8839200" y="2286000"/>
+            <a:ext cx="2038350" cy="190500"/>
+          </a:xfrm>
+          <a:prstGeom xmlns:a="http://schemas.openxmlformats.org/drawingml/2006/main" prst="rect">
+            <a:avLst/>
+          </a:prstGeom>
+          <a:solidFill xmlns:a="http://schemas.openxmlformats.org/drawingml/2006/main">
+            <a:srgbClr val="000000">
+              <a:alpha val="0"/>
+            </a:srgbClr>
+          </a:solidFill>
+          <a:ln xmlns:a="http://schemas.openxmlformats.org/drawingml/2006/main" w="0">
+            <a:solidFill>
+              <a:srgbClr val="000000">
+                <a:alpha val="0"/>
+              </a:srgbClr>
+            </a:solidFill>
+            <a:prstDash val="solid"/>
+          </a:ln>
+        </p:spPr>
+        <p:txBody>
+          <a:bodyPr xmlns:a="http://schemas.openxmlformats.org/drawingml/2006/main" lIns="0" tIns="0" rIns="0" bIns="0" anchor="t"/>
+          <a:lstStyle xmlns:a="http://schemas.openxmlformats.org/drawingml/2006/main"/>
+          <a:p xmlns:a="http://schemas.openxmlformats.org/drawingml/2006/main">
+            <a:pPr algn="ctr">
+              <a:defRPr sz="675" b="0">
+                <a:solidFill>
+                  <a:srgbClr val="64748B"/>
+                </a:solidFill>
+                <a:latin typeface="Aptos"/>
+                <a:ea typeface="Aptos"/>
+                <a:cs typeface="Aptos"/>
+              </a:defRPr>
+            </a:pPr>
+            <a:r>
+              <a:rPr sz="675" b="0">
+                <a:solidFill>
+                  <a:srgbClr val="64748B"/>
+                </a:solidFill>
+                <a:latin typeface="Aptos"/>
+                <a:ea typeface="Aptos"/>
+                <a:cs typeface="Aptos"/>
+              </a:rPr>
+              <a:t>증거 확대와 검증표 추가</a:t>
+            </a:r>
+          </a:p>
+        </p:txBody>
+      </p:sp>
+      <p:sp>
+        <p:nvSpPr>
+          <p:cNvPr id="25" name="">
+            <a:extLst xmlns:a="http://schemas.openxmlformats.org/drawingml/2006/main">
+              <a:ext uri="{FF2B5EF4-FFF2-40B4-BE49-F238E27FC236}">
+                <a16:creationId xmlns:a16="http://schemas.microsoft.com/office/drawing/2014/main" id="{AA844E22-9487-4FAC-9C50-EBF7D6F25767}"/>
+              </a:ext>
+            </a:extLst>
+          </p:cNvPr>
+          <p:cNvSpPr>
+            <a:spLocks xmlns:a="http://schemas.openxmlformats.org/drawingml/2006/main" noGrp="1"/>
+          </p:cNvSpPr>
+          <p:nvPr/>
+        </p:nvSpPr>
+        <p:spPr>
+          <a:xfrm xmlns:a="http://schemas.openxmlformats.org/drawingml/2006/main">
+            <a:off x="666750" y="2971800"/>
+            <a:ext cx="10287000" cy="457200"/>
+          </a:xfrm>
+          <a:prstGeom xmlns:a="http://schemas.openxmlformats.org/drawingml/2006/main" prst="rect">
+            <a:avLst/>
+          </a:prstGeom>
+          <a:solidFill xmlns:a="http://schemas.openxmlformats.org/drawingml/2006/main">
+            <a:srgbClr val="0B1220"/>
+          </a:solidFill>
+          <a:ln xmlns:a="http://schemas.openxmlformats.org/drawingml/2006/main" w="0">
+            <a:solidFill>
+              <a:srgbClr val="000000">
+                <a:alpha val="0"/>
+              </a:srgbClr>
+            </a:solidFill>
+            <a:prstDash val="solid"/>
+          </a:ln>
+        </p:spPr>
+      </p:sp>
+      <p:sp>
+        <p:nvSpPr>
+          <p:cNvPr id="26" name="">
+            <a:extLst xmlns:a="http://schemas.openxmlformats.org/drawingml/2006/main">
+              <a:ext uri="{FF2B5EF4-FFF2-40B4-BE49-F238E27FC236}">
+                <a16:creationId xmlns:a16="http://schemas.microsoft.com/office/drawing/2014/main" id="{53E442F0-2FD4-4CC9-B16F-185B7D1D8B66}"/>
+              </a:ext>
+            </a:extLst>
+          </p:cNvPr>
+          <p:cNvSpPr>
+            <a:spLocks xmlns:a="http://schemas.openxmlformats.org/drawingml/2006/main" noGrp="1"/>
+          </p:cNvSpPr>
+          <p:nvPr/>
+        </p:nvSpPr>
+        <p:spPr>
+          <a:xfrm xmlns:a="http://schemas.openxmlformats.org/drawingml/2006/main">
+            <a:off x="819150" y="3114675"/>
+            <a:ext cx="2381250" cy="171450"/>
           </a:xfrm>
           <a:prstGeom xmlns:a="http://schemas.openxmlformats.org/drawingml/2006/main" prst="rect">
             <a:avLst/>
@@ -10932,29 +14095,29 @@
                 <a:ea typeface="Aptos"/>
                 <a:cs typeface="Aptos"/>
               </a:rPr>
-              <a:t>완료 결과</a:t>
+              <a:t>검증 항목</a:t>
             </a:r>
           </a:p>
         </p:txBody>
       </p:sp>
       <p:sp>
         <p:nvSpPr>
-          <p:cNvPr id="8" name="">
-            <a:extLst xmlns:a="http://schemas.openxmlformats.org/drawingml/2006/main">
-              <a:ext uri="{FF2B5EF4-FFF2-40B4-BE49-F238E27FC236}">
-                <a16:creationId xmlns:a16="http://schemas.microsoft.com/office/drawing/2014/main" id="{8FF77680-135B-431F-84E6-0D5EBD984633}"/>
-              </a:ext>
-            </a:extLst>
-          </p:cNvPr>
-          <p:cNvSpPr>
-            <a:spLocks xmlns:a="http://schemas.openxmlformats.org/drawingml/2006/main" noGrp="1"/>
-          </p:cNvSpPr>
-          <p:nvPr/>
-        </p:nvSpPr>
-        <p:spPr>
-          <a:xfrm xmlns:a="http://schemas.openxmlformats.org/drawingml/2006/main">
-            <a:off x="6819900" y="1628775"/>
-            <a:ext cx="4095750" cy="171450"/>
+          <p:cNvPr id="27" name="">
+            <a:extLst xmlns:a="http://schemas.openxmlformats.org/drawingml/2006/main">
+              <a:ext uri="{FF2B5EF4-FFF2-40B4-BE49-F238E27FC236}">
+                <a16:creationId xmlns:a16="http://schemas.microsoft.com/office/drawing/2014/main" id="{4A4BD066-52AE-4FD1-ACE8-D2F29240F94C}"/>
+              </a:ext>
+            </a:extLst>
+          </p:cNvPr>
+          <p:cNvSpPr>
+            <a:spLocks xmlns:a="http://schemas.openxmlformats.org/drawingml/2006/main" noGrp="1"/>
+          </p:cNvSpPr>
+          <p:nvPr/>
+        </p:nvSpPr>
+        <p:spPr>
+          <a:xfrm xmlns:a="http://schemas.openxmlformats.org/drawingml/2006/main">
+            <a:off x="3505200" y="3114675"/>
+            <a:ext cx="4953000" cy="171450"/>
           </a:xfrm>
           <a:prstGeom xmlns:a="http://schemas.openxmlformats.org/drawingml/2006/main" prst="rect">
             <a:avLst/>
@@ -10996,29 +14159,29 @@
                 <a:ea typeface="Aptos"/>
                 <a:cs typeface="Aptos"/>
               </a:rPr>
-              <a:t>보완 방향</a:t>
+              <a:t>확인 근거</a:t>
             </a:r>
           </a:p>
         </p:txBody>
       </p:sp>
       <p:sp>
         <p:nvSpPr>
-          <p:cNvPr id="9" name="">
-            <a:extLst xmlns:a="http://schemas.openxmlformats.org/drawingml/2006/main">
-              <a:ext uri="{FF2B5EF4-FFF2-40B4-BE49-F238E27FC236}">
-                <a16:creationId xmlns:a16="http://schemas.microsoft.com/office/drawing/2014/main" id="{4122C122-B5C8-46D5-935E-E15D99299B71}"/>
-              </a:ext>
-            </a:extLst>
-          </p:cNvPr>
-          <p:cNvSpPr>
-            <a:spLocks xmlns:a="http://schemas.openxmlformats.org/drawingml/2006/main" noGrp="1"/>
-          </p:cNvSpPr>
-          <p:nvPr/>
-        </p:nvSpPr>
-        <p:spPr>
-          <a:xfrm xmlns:a="http://schemas.openxmlformats.org/drawingml/2006/main">
-            <a:off x="819150" y="2152650"/>
-            <a:ext cx="1714500" cy="228600"/>
+          <p:cNvPr id="28" name="">
+            <a:extLst xmlns:a="http://schemas.openxmlformats.org/drawingml/2006/main">
+              <a:ext uri="{FF2B5EF4-FFF2-40B4-BE49-F238E27FC236}">
+                <a16:creationId xmlns:a16="http://schemas.microsoft.com/office/drawing/2014/main" id="{5C62C67A-F3BD-4273-874A-297F09C2371A}"/>
+              </a:ext>
+            </a:extLst>
+          </p:cNvPr>
+          <p:cNvSpPr>
+            <a:spLocks xmlns:a="http://schemas.openxmlformats.org/drawingml/2006/main" noGrp="1"/>
+          </p:cNvSpPr>
+          <p:nvPr/>
+        </p:nvSpPr>
+        <p:spPr>
+          <a:xfrm xmlns:a="http://schemas.openxmlformats.org/drawingml/2006/main">
+            <a:off x="9620250" y="3114675"/>
+            <a:ext cx="1047750" cy="171450"/>
           </a:xfrm>
           <a:prstGeom xmlns:a="http://schemas.openxmlformats.org/drawingml/2006/main" prst="rect">
             <a:avLst/>
@@ -11041,10 +14204,10 @@
           <a:bodyPr xmlns:a="http://schemas.openxmlformats.org/drawingml/2006/main" lIns="0" tIns="0" rIns="0" bIns="0" anchor="t"/>
           <a:lstStyle xmlns:a="http://schemas.openxmlformats.org/drawingml/2006/main"/>
           <a:p xmlns:a="http://schemas.openxmlformats.org/drawingml/2006/main">
-            <a:pPr algn="l">
-              <a:defRPr sz="975" b="1">
-                <a:solidFill>
-                  <a:srgbClr val="111827"/>
+            <a:pPr algn="ctr">
+              <a:defRPr sz="900" b="1">
+                <a:solidFill>
+                  <a:srgbClr val="FFFFFF"/>
                 </a:solidFill>
                 <a:latin typeface="Aptos"/>
                 <a:ea typeface="Aptos"/>
@@ -11052,37 +14215,101 @@
               </a:defRPr>
             </a:pPr>
             <a:r>
-              <a:rPr sz="975" b="1">
-                <a:solidFill>
-                  <a:srgbClr val="111827"/>
+              <a:rPr sz="900" b="1">
+                <a:solidFill>
+                  <a:srgbClr val="FFFFFF"/>
                 </a:solidFill>
                 <a:latin typeface="Aptos"/>
                 <a:ea typeface="Aptos"/>
                 <a:cs typeface="Aptos"/>
               </a:rPr>
-              <a:t>WPF HMI</a:t>
+              <a:t>상태</a:t>
             </a:r>
           </a:p>
         </p:txBody>
       </p:sp>
       <p:sp>
         <p:nvSpPr>
-          <p:cNvPr id="10" name="">
-            <a:extLst xmlns:a="http://schemas.openxmlformats.org/drawingml/2006/main">
-              <a:ext uri="{FF2B5EF4-FFF2-40B4-BE49-F238E27FC236}">
-                <a16:creationId xmlns:a16="http://schemas.microsoft.com/office/drawing/2014/main" id="{EF18ECFC-28C9-439A-B7CD-8852C0C83E50}"/>
-              </a:ext>
-            </a:extLst>
-          </p:cNvPr>
-          <p:cNvSpPr>
-            <a:spLocks xmlns:a="http://schemas.openxmlformats.org/drawingml/2006/main" noGrp="1"/>
-          </p:cNvSpPr>
-          <p:nvPr/>
-        </p:nvSpPr>
-        <p:spPr>
-          <a:xfrm xmlns:a="http://schemas.openxmlformats.org/drawingml/2006/main">
-            <a:off x="2724150" y="2152650"/>
-            <a:ext cx="3714750" cy="228600"/>
+          <p:cNvPr id="29" name="">
+            <a:extLst xmlns:a="http://schemas.openxmlformats.org/drawingml/2006/main">
+              <a:ext uri="{FF2B5EF4-FFF2-40B4-BE49-F238E27FC236}">
+                <a16:creationId xmlns:a16="http://schemas.microsoft.com/office/drawing/2014/main" id="{286B895B-2660-4E09-929D-2C697D63184F}"/>
+              </a:ext>
+            </a:extLst>
+          </p:cNvPr>
+          <p:cNvSpPr>
+            <a:spLocks xmlns:a="http://schemas.openxmlformats.org/drawingml/2006/main" noGrp="1"/>
+          </p:cNvSpPr>
+          <p:nvPr/>
+        </p:nvSpPr>
+        <p:spPr>
+          <a:xfrm xmlns:a="http://schemas.openxmlformats.org/drawingml/2006/main">
+            <a:off x="819150" y="3676650"/>
+            <a:ext cx="2476500" cy="209550"/>
+          </a:xfrm>
+          <a:prstGeom xmlns:a="http://schemas.openxmlformats.org/drawingml/2006/main" prst="rect">
+            <a:avLst/>
+          </a:prstGeom>
+          <a:solidFill xmlns:a="http://schemas.openxmlformats.org/drawingml/2006/main">
+            <a:srgbClr val="000000">
+              <a:alpha val="0"/>
+            </a:srgbClr>
+          </a:solidFill>
+          <a:ln xmlns:a="http://schemas.openxmlformats.org/drawingml/2006/main" w="0">
+            <a:solidFill>
+              <a:srgbClr val="000000">
+                <a:alpha val="0"/>
+              </a:srgbClr>
+            </a:solidFill>
+            <a:prstDash val="solid"/>
+          </a:ln>
+        </p:spPr>
+        <p:txBody>
+          <a:bodyPr xmlns:a="http://schemas.openxmlformats.org/drawingml/2006/main" lIns="0" tIns="0" rIns="0" bIns="0" anchor="t"/>
+          <a:lstStyle xmlns:a="http://schemas.openxmlformats.org/drawingml/2006/main"/>
+          <a:p xmlns:a="http://schemas.openxmlformats.org/drawingml/2006/main">
+            <a:pPr algn="l">
+              <a:defRPr sz="900" b="1">
+                <a:solidFill>
+                  <a:srgbClr val="111827"/>
+                </a:solidFill>
+                <a:latin typeface="Aptos"/>
+                <a:ea typeface="Aptos"/>
+                <a:cs typeface="Aptos"/>
+              </a:defRPr>
+            </a:pPr>
+            <a:r>
+              <a:rPr sz="900" b="1">
+                <a:solidFill>
+                  <a:srgbClr val="111827"/>
+                </a:solidFill>
+                <a:latin typeface="Aptos"/>
+                <a:ea typeface="Aptos"/>
+                <a:cs typeface="Aptos"/>
+              </a:rPr>
+              <a:t>WPF 빌드</a:t>
+            </a:r>
+          </a:p>
+        </p:txBody>
+      </p:sp>
+      <p:sp>
+        <p:nvSpPr>
+          <p:cNvPr id="30" name="">
+            <a:extLst xmlns:a="http://schemas.openxmlformats.org/drawingml/2006/main">
+              <a:ext uri="{FF2B5EF4-FFF2-40B4-BE49-F238E27FC236}">
+                <a16:creationId xmlns:a16="http://schemas.microsoft.com/office/drawing/2014/main" id="{622C7CFC-031B-4DEB-A422-2F4B9139A03A}"/>
+              </a:ext>
+            </a:extLst>
+          </p:cNvPr>
+          <p:cNvSpPr>
+            <a:spLocks xmlns:a="http://schemas.openxmlformats.org/drawingml/2006/main" noGrp="1"/>
+          </p:cNvSpPr>
+          <p:nvPr/>
+        </p:nvSpPr>
+        <p:spPr>
+          <a:xfrm xmlns:a="http://schemas.openxmlformats.org/drawingml/2006/main">
+            <a:off x="3505200" y="3676650"/>
+            <a:ext cx="4953000" cy="209550"/>
           </a:xfrm>
           <a:prstGeom xmlns:a="http://schemas.openxmlformats.org/drawingml/2006/main" prst="rect">
             <a:avLst/>
@@ -11124,29 +14351,29 @@
                 <a:ea typeface="Aptos"/>
                 <a:cs typeface="Aptos"/>
               </a:rPr>
-              <a:t>로그인, 장비 도식, 인터락, 램프/제어 버튼, 이력 창 구성</a:t>
+              <a:t>dotnet build etch_ui.csproj: 경고 0개, 오류 0개</a:t>
             </a:r>
           </a:p>
         </p:txBody>
       </p:sp>
       <p:sp>
         <p:nvSpPr>
-          <p:cNvPr id="11" name="">
-            <a:extLst xmlns:a="http://schemas.openxmlformats.org/drawingml/2006/main">
-              <a:ext uri="{FF2B5EF4-FFF2-40B4-BE49-F238E27FC236}">
-                <a16:creationId xmlns:a16="http://schemas.microsoft.com/office/drawing/2014/main" id="{93FC8449-BBC4-43A3-9F97-BF8FB042E605}"/>
-              </a:ext>
-            </a:extLst>
-          </p:cNvPr>
-          <p:cNvSpPr>
-            <a:spLocks xmlns:a="http://schemas.openxmlformats.org/drawingml/2006/main" noGrp="1"/>
-          </p:cNvSpPr>
-          <p:nvPr/>
-        </p:nvSpPr>
-        <p:spPr>
-          <a:xfrm xmlns:a="http://schemas.openxmlformats.org/drawingml/2006/main">
-            <a:off x="6819900" y="2152650"/>
-            <a:ext cx="4095750" cy="228600"/>
+          <p:cNvPr id="31" name="">
+            <a:extLst xmlns:a="http://schemas.openxmlformats.org/drawingml/2006/main">
+              <a:ext uri="{FF2B5EF4-FFF2-40B4-BE49-F238E27FC236}">
+                <a16:creationId xmlns:a16="http://schemas.microsoft.com/office/drawing/2014/main" id="{8DA6FB5C-3BB2-4939-A7BD-E10C302BA9A5}"/>
+              </a:ext>
+            </a:extLst>
+          </p:cNvPr>
+          <p:cNvSpPr>
+            <a:spLocks xmlns:a="http://schemas.openxmlformats.org/drawingml/2006/main" noGrp="1"/>
+          </p:cNvSpPr>
+          <p:nvPr/>
+        </p:nvSpPr>
+        <p:spPr>
+          <a:xfrm xmlns:a="http://schemas.openxmlformats.org/drawingml/2006/main">
+            <a:off x="9620250" y="3676650"/>
+            <a:ext cx="1047750" cy="209550"/>
           </a:xfrm>
           <a:prstGeom xmlns:a="http://schemas.openxmlformats.org/drawingml/2006/main" prst="rect">
             <a:avLst/>
@@ -11169,10 +14396,173 @@
           <a:bodyPr xmlns:a="http://schemas.openxmlformats.org/drawingml/2006/main" lIns="0" tIns="0" rIns="0" bIns="0" anchor="t"/>
           <a:lstStyle xmlns:a="http://schemas.openxmlformats.org/drawingml/2006/main"/>
           <a:p xmlns:a="http://schemas.openxmlformats.org/drawingml/2006/main">
+            <a:pPr algn="ctr">
+              <a:defRPr sz="900" b="1">
+                <a:solidFill>
+                  <a:srgbClr val="16A34A"/>
+                </a:solidFill>
+                <a:latin typeface="Aptos"/>
+                <a:ea typeface="Aptos"/>
+                <a:cs typeface="Aptos"/>
+              </a:defRPr>
+            </a:pPr>
+            <a:r>
+              <a:rPr sz="900" b="1">
+                <a:solidFill>
+                  <a:srgbClr val="16A34A"/>
+                </a:solidFill>
+                <a:latin typeface="Aptos"/>
+                <a:ea typeface="Aptos"/>
+                <a:cs typeface="Aptos"/>
+              </a:rPr>
+              <a:t>PASS</a:t>
+            </a:r>
+          </a:p>
+        </p:txBody>
+      </p:sp>
+      <p:sp>
+        <p:nvSpPr>
+          <p:cNvPr id="32" name="">
+            <a:extLst xmlns:a="http://schemas.openxmlformats.org/drawingml/2006/main">
+              <a:ext uri="{FF2B5EF4-FFF2-40B4-BE49-F238E27FC236}">
+                <a16:creationId xmlns:a16="http://schemas.microsoft.com/office/drawing/2014/main" id="{51A0D04B-B61D-4A5A-8E0B-3138DEBCF1BF}"/>
+              </a:ext>
+            </a:extLst>
+          </p:cNvPr>
+          <p:cNvSpPr>
+            <a:spLocks xmlns:a="http://schemas.openxmlformats.org/drawingml/2006/main" noGrp="1"/>
+          </p:cNvSpPr>
+          <p:nvPr/>
+        </p:nvSpPr>
+        <p:spPr>
+          <a:xfrm xmlns:a="http://schemas.openxmlformats.org/drawingml/2006/main">
+            <a:off x="685800" y="3981450"/>
+            <a:ext cx="10191750" cy="9525"/>
+          </a:xfrm>
+          <a:prstGeom xmlns:a="http://schemas.openxmlformats.org/drawingml/2006/main" prst="rect">
+            <a:avLst/>
+          </a:prstGeom>
+          <a:solidFill xmlns:a="http://schemas.openxmlformats.org/drawingml/2006/main">
+            <a:srgbClr val="E2E8F0"/>
+          </a:solidFill>
+          <a:ln xmlns:a="http://schemas.openxmlformats.org/drawingml/2006/main" w="0">
+            <a:solidFill>
+              <a:srgbClr val="000000">
+                <a:alpha val="0"/>
+              </a:srgbClr>
+            </a:solidFill>
+            <a:prstDash val="solid"/>
+          </a:ln>
+        </p:spPr>
+      </p:sp>
+      <p:sp>
+        <p:nvSpPr>
+          <p:cNvPr id="33" name="">
+            <a:extLst xmlns:a="http://schemas.openxmlformats.org/drawingml/2006/main">
+              <a:ext uri="{FF2B5EF4-FFF2-40B4-BE49-F238E27FC236}">
+                <a16:creationId xmlns:a16="http://schemas.microsoft.com/office/drawing/2014/main" id="{F77F1690-41DC-49A2-B70B-51D5EDEA3506}"/>
+              </a:ext>
+            </a:extLst>
+          </p:cNvPr>
+          <p:cNvSpPr>
+            <a:spLocks xmlns:a="http://schemas.openxmlformats.org/drawingml/2006/main" noGrp="1"/>
+          </p:cNvSpPr>
+          <p:nvPr/>
+        </p:nvSpPr>
+        <p:spPr>
+          <a:xfrm xmlns:a="http://schemas.openxmlformats.org/drawingml/2006/main">
+            <a:off x="819150" y="4171950"/>
+            <a:ext cx="2476500" cy="209550"/>
+          </a:xfrm>
+          <a:prstGeom xmlns:a="http://schemas.openxmlformats.org/drawingml/2006/main" prst="rect">
+            <a:avLst/>
+          </a:prstGeom>
+          <a:solidFill xmlns:a="http://schemas.openxmlformats.org/drawingml/2006/main">
+            <a:srgbClr val="000000">
+              <a:alpha val="0"/>
+            </a:srgbClr>
+          </a:solidFill>
+          <a:ln xmlns:a="http://schemas.openxmlformats.org/drawingml/2006/main" w="0">
+            <a:solidFill>
+              <a:srgbClr val="000000">
+                <a:alpha val="0"/>
+              </a:srgbClr>
+            </a:solidFill>
+            <a:prstDash val="solid"/>
+          </a:ln>
+        </p:spPr>
+        <p:txBody>
+          <a:bodyPr xmlns:a="http://schemas.openxmlformats.org/drawingml/2006/main" lIns="0" tIns="0" rIns="0" bIns="0" anchor="t"/>
+          <a:lstStyle xmlns:a="http://schemas.openxmlformats.org/drawingml/2006/main"/>
+          <a:p xmlns:a="http://schemas.openxmlformats.org/drawingml/2006/main">
+            <a:pPr algn="l">
+              <a:defRPr sz="900" b="1">
+                <a:solidFill>
+                  <a:srgbClr val="111827"/>
+                </a:solidFill>
+                <a:latin typeface="Aptos"/>
+                <a:ea typeface="Aptos"/>
+                <a:cs typeface="Aptos"/>
+              </a:defRPr>
+            </a:pPr>
+            <a:r>
+              <a:rPr sz="900" b="1">
+                <a:solidFill>
+                  <a:srgbClr val="111827"/>
+                </a:solidFill>
+                <a:latin typeface="Aptos"/>
+                <a:ea typeface="Aptos"/>
+                <a:cs typeface="Aptos"/>
+              </a:rPr>
+              <a:t>WPF 실행</a:t>
+            </a:r>
+          </a:p>
+        </p:txBody>
+      </p:sp>
+      <p:sp>
+        <p:nvSpPr>
+          <p:cNvPr id="34" name="">
+            <a:extLst xmlns:a="http://schemas.openxmlformats.org/drawingml/2006/main">
+              <a:ext uri="{FF2B5EF4-FFF2-40B4-BE49-F238E27FC236}">
+                <a16:creationId xmlns:a16="http://schemas.microsoft.com/office/drawing/2014/main" id="{2731D934-4F07-41A7-A192-01638FF6BF66}"/>
+              </a:ext>
+            </a:extLst>
+          </p:cNvPr>
+          <p:cNvSpPr>
+            <a:spLocks xmlns:a="http://schemas.openxmlformats.org/drawingml/2006/main" noGrp="1"/>
+          </p:cNvSpPr>
+          <p:nvPr/>
+        </p:nvSpPr>
+        <p:spPr>
+          <a:xfrm xmlns:a="http://schemas.openxmlformats.org/drawingml/2006/main">
+            <a:off x="3505200" y="4171950"/>
+            <a:ext cx="4953000" cy="209550"/>
+          </a:xfrm>
+          <a:prstGeom xmlns:a="http://schemas.openxmlformats.org/drawingml/2006/main" prst="rect">
+            <a:avLst/>
+          </a:prstGeom>
+          <a:solidFill xmlns:a="http://schemas.openxmlformats.org/drawingml/2006/main">
+            <a:srgbClr val="000000">
+              <a:alpha val="0"/>
+            </a:srgbClr>
+          </a:solidFill>
+          <a:ln xmlns:a="http://schemas.openxmlformats.org/drawingml/2006/main" w="0">
+            <a:solidFill>
+              <a:srgbClr val="000000">
+                <a:alpha val="0"/>
+              </a:srgbClr>
+            </a:solidFill>
+            <a:prstDash val="solid"/>
+          </a:ln>
+        </p:spPr>
+        <p:txBody>
+          <a:bodyPr xmlns:a="http://schemas.openxmlformats.org/drawingml/2006/main" lIns="0" tIns="0" rIns="0" bIns="0" anchor="t"/>
+          <a:lstStyle xmlns:a="http://schemas.openxmlformats.org/drawingml/2006/main"/>
+          <a:p xmlns:a="http://schemas.openxmlformats.org/drawingml/2006/main">
             <a:pPr algn="l">
               <a:defRPr sz="900" b="0">
                 <a:solidFill>
-                  <a:srgbClr val="475569"/>
+                  <a:srgbClr val="334155"/>
                 </a:solidFill>
                 <a:latin typeface="Aptos"/>
                 <a:ea typeface="Aptos"/>
@@ -11182,70 +14572,35 @@
             <a:r>
               <a:rPr sz="900" b="0">
                 <a:solidFill>
-                  <a:srgbClr val="475569"/>
+                  <a:srgbClr val="334155"/>
                 </a:solidFill>
                 <a:latin typeface="Aptos"/>
                 <a:ea typeface="Aptos"/>
                 <a:cs typeface="Aptos"/>
               </a:rPr>
-              <a:t>메인 화면 분할 최적화와 발표용 자동 시나리오 고도화</a:t>
+              <a:t>admin 로그인 후 실제 메인 화면 캡처 확보</a:t>
             </a:r>
           </a:p>
         </p:txBody>
       </p:sp>
       <p:sp>
         <p:nvSpPr>
-          <p:cNvPr id="12" name="">
-            <a:extLst xmlns:a="http://schemas.openxmlformats.org/drawingml/2006/main">
-              <a:ext uri="{FF2B5EF4-FFF2-40B4-BE49-F238E27FC236}">
-                <a16:creationId xmlns:a16="http://schemas.microsoft.com/office/drawing/2014/main" id="{E19337CB-D9EB-43AE-AD5C-636A5914F5A3}"/>
-              </a:ext>
-            </a:extLst>
-          </p:cNvPr>
-          <p:cNvSpPr>
-            <a:spLocks xmlns:a="http://schemas.openxmlformats.org/drawingml/2006/main" noGrp="1"/>
-          </p:cNvSpPr>
-          <p:nvPr/>
-        </p:nvSpPr>
-        <p:spPr>
-          <a:xfrm xmlns:a="http://schemas.openxmlformats.org/drawingml/2006/main">
-            <a:off x="704850" y="2476500"/>
-            <a:ext cx="10287000" cy="9525"/>
-          </a:xfrm>
-          <a:prstGeom xmlns:a="http://schemas.openxmlformats.org/drawingml/2006/main" prst="rect">
-            <a:avLst/>
-          </a:prstGeom>
-          <a:solidFill xmlns:a="http://schemas.openxmlformats.org/drawingml/2006/main">
-            <a:srgbClr val="E2E8F0"/>
-          </a:solidFill>
-          <a:ln xmlns:a="http://schemas.openxmlformats.org/drawingml/2006/main" w="0">
-            <a:solidFill>
-              <a:srgbClr val="000000">
-                <a:alpha val="0"/>
-              </a:srgbClr>
-            </a:solidFill>
-            <a:prstDash val="solid"/>
-          </a:ln>
-        </p:spPr>
-      </p:sp>
-      <p:sp>
-        <p:nvSpPr>
-          <p:cNvPr id="13" name="">
-            <a:extLst xmlns:a="http://schemas.openxmlformats.org/drawingml/2006/main">
-              <a:ext uri="{FF2B5EF4-FFF2-40B4-BE49-F238E27FC236}">
-                <a16:creationId xmlns:a16="http://schemas.microsoft.com/office/drawing/2014/main" id="{914D2D54-B26D-4EAD-83B2-5FCD5FBF123D}"/>
-              </a:ext>
-            </a:extLst>
-          </p:cNvPr>
-          <p:cNvSpPr>
-            <a:spLocks xmlns:a="http://schemas.openxmlformats.org/drawingml/2006/main" noGrp="1"/>
-          </p:cNvSpPr>
-          <p:nvPr/>
-        </p:nvSpPr>
-        <p:spPr>
-          <a:xfrm xmlns:a="http://schemas.openxmlformats.org/drawingml/2006/main">
-            <a:off x="819150" y="2724150"/>
-            <a:ext cx="1714500" cy="228600"/>
+          <p:cNvPr id="35" name="">
+            <a:extLst xmlns:a="http://schemas.openxmlformats.org/drawingml/2006/main">
+              <a:ext uri="{FF2B5EF4-FFF2-40B4-BE49-F238E27FC236}">
+                <a16:creationId xmlns:a16="http://schemas.microsoft.com/office/drawing/2014/main" id="{D4FCB3A5-8873-4542-BCE2-BCBD92202441}"/>
+              </a:ext>
+            </a:extLst>
+          </p:cNvPr>
+          <p:cNvSpPr>
+            <a:spLocks xmlns:a="http://schemas.openxmlformats.org/drawingml/2006/main" noGrp="1"/>
+          </p:cNvSpPr>
+          <p:nvPr/>
+        </p:nvSpPr>
+        <p:spPr>
+          <a:xfrm xmlns:a="http://schemas.openxmlformats.org/drawingml/2006/main">
+            <a:off x="9620250" y="4171950"/>
+            <a:ext cx="1047750" cy="209550"/>
           </a:xfrm>
           <a:prstGeom xmlns:a="http://schemas.openxmlformats.org/drawingml/2006/main" prst="rect">
             <a:avLst/>
@@ -11268,10 +14623,10 @@
           <a:bodyPr xmlns:a="http://schemas.openxmlformats.org/drawingml/2006/main" lIns="0" tIns="0" rIns="0" bIns="0" anchor="t"/>
           <a:lstStyle xmlns:a="http://schemas.openxmlformats.org/drawingml/2006/main"/>
           <a:p xmlns:a="http://schemas.openxmlformats.org/drawingml/2006/main">
-            <a:pPr algn="l">
-              <a:defRPr sz="975" b="1">
-                <a:solidFill>
-                  <a:srgbClr val="111827"/>
+            <a:pPr algn="ctr">
+              <a:defRPr sz="900" b="1">
+                <a:solidFill>
+                  <a:srgbClr val="16A34A"/>
                 </a:solidFill>
                 <a:latin typeface="Aptos"/>
                 <a:ea typeface="Aptos"/>
@@ -11279,37 +14634,136 @@
               </a:defRPr>
             </a:pPr>
             <a:r>
-              <a:rPr sz="975" b="1">
-                <a:solidFill>
-                  <a:srgbClr val="111827"/>
+              <a:rPr sz="900" b="1">
+                <a:solidFill>
+                  <a:srgbClr val="16A34A"/>
                 </a:solidFill>
                 <a:latin typeface="Aptos"/>
                 <a:ea typeface="Aptos"/>
                 <a:cs typeface="Aptos"/>
               </a:rPr>
-              <a:t>Flask</a:t>
+              <a:t>PASS</a:t>
             </a:r>
           </a:p>
         </p:txBody>
       </p:sp>
       <p:sp>
         <p:nvSpPr>
-          <p:cNvPr id="14" name="">
-            <a:extLst xmlns:a="http://schemas.openxmlformats.org/drawingml/2006/main">
-              <a:ext uri="{FF2B5EF4-FFF2-40B4-BE49-F238E27FC236}">
-                <a16:creationId xmlns:a16="http://schemas.microsoft.com/office/drawing/2014/main" id="{9AE8C2D3-BACD-4672-93ED-F752FEDD8C0E}"/>
-              </a:ext>
-            </a:extLst>
-          </p:cNvPr>
-          <p:cNvSpPr>
-            <a:spLocks xmlns:a="http://schemas.openxmlformats.org/drawingml/2006/main" noGrp="1"/>
-          </p:cNvSpPr>
-          <p:nvPr/>
-        </p:nvSpPr>
-        <p:spPr>
-          <a:xfrm xmlns:a="http://schemas.openxmlformats.org/drawingml/2006/main">
-            <a:off x="2724150" y="2724150"/>
-            <a:ext cx="3714750" cy="228600"/>
+          <p:cNvPr id="36" name="">
+            <a:extLst xmlns:a="http://schemas.openxmlformats.org/drawingml/2006/main">
+              <a:ext uri="{FF2B5EF4-FFF2-40B4-BE49-F238E27FC236}">
+                <a16:creationId xmlns:a16="http://schemas.microsoft.com/office/drawing/2014/main" id="{63414B08-1209-48D5-9382-D13AE7427229}"/>
+              </a:ext>
+            </a:extLst>
+          </p:cNvPr>
+          <p:cNvSpPr>
+            <a:spLocks xmlns:a="http://schemas.openxmlformats.org/drawingml/2006/main" noGrp="1"/>
+          </p:cNvSpPr>
+          <p:nvPr/>
+        </p:nvSpPr>
+        <p:spPr>
+          <a:xfrm xmlns:a="http://schemas.openxmlformats.org/drawingml/2006/main">
+            <a:off x="685800" y="4476750"/>
+            <a:ext cx="10191750" cy="9525"/>
+          </a:xfrm>
+          <a:prstGeom xmlns:a="http://schemas.openxmlformats.org/drawingml/2006/main" prst="rect">
+            <a:avLst/>
+          </a:prstGeom>
+          <a:solidFill xmlns:a="http://schemas.openxmlformats.org/drawingml/2006/main">
+            <a:srgbClr val="E2E8F0"/>
+          </a:solidFill>
+          <a:ln xmlns:a="http://schemas.openxmlformats.org/drawingml/2006/main" w="0">
+            <a:solidFill>
+              <a:srgbClr val="000000">
+                <a:alpha val="0"/>
+              </a:srgbClr>
+            </a:solidFill>
+            <a:prstDash val="solid"/>
+          </a:ln>
+        </p:spPr>
+      </p:sp>
+      <p:sp>
+        <p:nvSpPr>
+          <p:cNvPr id="37" name="">
+            <a:extLst xmlns:a="http://schemas.openxmlformats.org/drawingml/2006/main">
+              <a:ext uri="{FF2B5EF4-FFF2-40B4-BE49-F238E27FC236}">
+                <a16:creationId xmlns:a16="http://schemas.microsoft.com/office/drawing/2014/main" id="{D36097B7-1FC4-42DD-A1F9-93471715BDD7}"/>
+              </a:ext>
+            </a:extLst>
+          </p:cNvPr>
+          <p:cNvSpPr>
+            <a:spLocks xmlns:a="http://schemas.openxmlformats.org/drawingml/2006/main" noGrp="1"/>
+          </p:cNvSpPr>
+          <p:nvPr/>
+        </p:nvSpPr>
+        <p:spPr>
+          <a:xfrm xmlns:a="http://schemas.openxmlformats.org/drawingml/2006/main">
+            <a:off x="819150" y="4667250"/>
+            <a:ext cx="2476500" cy="209550"/>
+          </a:xfrm>
+          <a:prstGeom xmlns:a="http://schemas.openxmlformats.org/drawingml/2006/main" prst="rect">
+            <a:avLst/>
+          </a:prstGeom>
+          <a:solidFill xmlns:a="http://schemas.openxmlformats.org/drawingml/2006/main">
+            <a:srgbClr val="000000">
+              <a:alpha val="0"/>
+            </a:srgbClr>
+          </a:solidFill>
+          <a:ln xmlns:a="http://schemas.openxmlformats.org/drawingml/2006/main" w="0">
+            <a:solidFill>
+              <a:srgbClr val="000000">
+                <a:alpha val="0"/>
+              </a:srgbClr>
+            </a:solidFill>
+            <a:prstDash val="solid"/>
+          </a:ln>
+        </p:spPr>
+        <p:txBody>
+          <a:bodyPr xmlns:a="http://schemas.openxmlformats.org/drawingml/2006/main" lIns="0" tIns="0" rIns="0" bIns="0" anchor="t"/>
+          <a:lstStyle xmlns:a="http://schemas.openxmlformats.org/drawingml/2006/main"/>
+          <a:p xmlns:a="http://schemas.openxmlformats.org/drawingml/2006/main">
+            <a:pPr algn="l">
+              <a:defRPr sz="900" b="1">
+                <a:solidFill>
+                  <a:srgbClr val="111827"/>
+                </a:solidFill>
+                <a:latin typeface="Aptos"/>
+                <a:ea typeface="Aptos"/>
+                <a:cs typeface="Aptos"/>
+              </a:defRPr>
+            </a:pPr>
+            <a:r>
+              <a:rPr sz="900" b="1">
+                <a:solidFill>
+                  <a:srgbClr val="111827"/>
+                </a:solidFill>
+                <a:latin typeface="Aptos"/>
+                <a:ea typeface="Aptos"/>
+                <a:cs typeface="Aptos"/>
+              </a:rPr>
+              <a:t>Flask 화면</a:t>
+            </a:r>
+          </a:p>
+        </p:txBody>
+      </p:sp>
+      <p:sp>
+        <p:nvSpPr>
+          <p:cNvPr id="38" name="">
+            <a:extLst xmlns:a="http://schemas.openxmlformats.org/drawingml/2006/main">
+              <a:ext uri="{FF2B5EF4-FFF2-40B4-BE49-F238E27FC236}">
+                <a16:creationId xmlns:a16="http://schemas.microsoft.com/office/drawing/2014/main" id="{25A48346-6BD7-47EE-BCE7-864C74477286}"/>
+              </a:ext>
+            </a:extLst>
+          </p:cNvPr>
+          <p:cNvSpPr>
+            <a:spLocks xmlns:a="http://schemas.openxmlformats.org/drawingml/2006/main" noGrp="1"/>
+          </p:cNvSpPr>
+          <p:nvPr/>
+        </p:nvSpPr>
+        <p:spPr>
+          <a:xfrm xmlns:a="http://schemas.openxmlformats.org/drawingml/2006/main">
+            <a:off x="3505200" y="4667250"/>
+            <a:ext cx="4953000" cy="209550"/>
           </a:xfrm>
           <a:prstGeom xmlns:a="http://schemas.openxmlformats.org/drawingml/2006/main" prst="rect">
             <a:avLst/>
@@ -11351,29 +14805,29 @@
                 <a:ea typeface="Aptos"/>
                 <a:cs typeface="Aptos"/>
               </a:rPr>
-              <a:t>실시간/이력/이벤트/모듈/레시피/AI 탭 구현</a:t>
+              <a:t>원본 etch_dashboard.html 기반 실시간/모듈/레시피/AI 탭 캡처</a:t>
             </a:r>
           </a:p>
         </p:txBody>
       </p:sp>
       <p:sp>
         <p:nvSpPr>
-          <p:cNvPr id="15" name="">
-            <a:extLst xmlns:a="http://schemas.openxmlformats.org/drawingml/2006/main">
-              <a:ext uri="{FF2B5EF4-FFF2-40B4-BE49-F238E27FC236}">
-                <a16:creationId xmlns:a16="http://schemas.microsoft.com/office/drawing/2014/main" id="{A10C5185-1305-4E4F-9972-7B323AC2A94C}"/>
-              </a:ext>
-            </a:extLst>
-          </p:cNvPr>
-          <p:cNvSpPr>
-            <a:spLocks xmlns:a="http://schemas.openxmlformats.org/drawingml/2006/main" noGrp="1"/>
-          </p:cNvSpPr>
-          <p:nvPr/>
-        </p:nvSpPr>
-        <p:spPr>
-          <a:xfrm xmlns:a="http://schemas.openxmlformats.org/drawingml/2006/main">
-            <a:off x="6819900" y="2724150"/>
-            <a:ext cx="4095750" cy="228600"/>
+          <p:cNvPr id="39" name="">
+            <a:extLst xmlns:a="http://schemas.openxmlformats.org/drawingml/2006/main">
+              <a:ext uri="{FF2B5EF4-FFF2-40B4-BE49-F238E27FC236}">
+                <a16:creationId xmlns:a16="http://schemas.microsoft.com/office/drawing/2014/main" id="{C0A89246-9888-4397-BD78-12BC09D53524}"/>
+              </a:ext>
+            </a:extLst>
+          </p:cNvPr>
+          <p:cNvSpPr>
+            <a:spLocks xmlns:a="http://schemas.openxmlformats.org/drawingml/2006/main" noGrp="1"/>
+          </p:cNvSpPr>
+          <p:nvPr/>
+        </p:nvSpPr>
+        <p:spPr>
+          <a:xfrm xmlns:a="http://schemas.openxmlformats.org/drawingml/2006/main">
+            <a:off x="9620250" y="4667250"/>
+            <a:ext cx="1047750" cy="209550"/>
           </a:xfrm>
           <a:prstGeom xmlns:a="http://schemas.openxmlformats.org/drawingml/2006/main" prst="rect">
             <a:avLst/>
@@ -11396,10 +14850,173 @@
           <a:bodyPr xmlns:a="http://schemas.openxmlformats.org/drawingml/2006/main" lIns="0" tIns="0" rIns="0" bIns="0" anchor="t"/>
           <a:lstStyle xmlns:a="http://schemas.openxmlformats.org/drawingml/2006/main"/>
           <a:p xmlns:a="http://schemas.openxmlformats.org/drawingml/2006/main">
+            <a:pPr algn="ctr">
+              <a:defRPr sz="900" b="1">
+                <a:solidFill>
+                  <a:srgbClr val="16A34A"/>
+                </a:solidFill>
+                <a:latin typeface="Aptos"/>
+                <a:ea typeface="Aptos"/>
+                <a:cs typeface="Aptos"/>
+              </a:defRPr>
+            </a:pPr>
+            <a:r>
+              <a:rPr sz="900" b="1">
+                <a:solidFill>
+                  <a:srgbClr val="16A34A"/>
+                </a:solidFill>
+                <a:latin typeface="Aptos"/>
+                <a:ea typeface="Aptos"/>
+                <a:cs typeface="Aptos"/>
+              </a:rPr>
+              <a:t>PASS</a:t>
+            </a:r>
+          </a:p>
+        </p:txBody>
+      </p:sp>
+      <p:sp>
+        <p:nvSpPr>
+          <p:cNvPr id="40" name="">
+            <a:extLst xmlns:a="http://schemas.openxmlformats.org/drawingml/2006/main">
+              <a:ext uri="{FF2B5EF4-FFF2-40B4-BE49-F238E27FC236}">
+                <a16:creationId xmlns:a16="http://schemas.microsoft.com/office/drawing/2014/main" id="{1D837BCA-4AB3-48C1-A7F1-DB26E4C34DA0}"/>
+              </a:ext>
+            </a:extLst>
+          </p:cNvPr>
+          <p:cNvSpPr>
+            <a:spLocks xmlns:a="http://schemas.openxmlformats.org/drawingml/2006/main" noGrp="1"/>
+          </p:cNvSpPr>
+          <p:nvPr/>
+        </p:nvSpPr>
+        <p:spPr>
+          <a:xfrm xmlns:a="http://schemas.openxmlformats.org/drawingml/2006/main">
+            <a:off x="685800" y="4972050"/>
+            <a:ext cx="10191750" cy="9525"/>
+          </a:xfrm>
+          <a:prstGeom xmlns:a="http://schemas.openxmlformats.org/drawingml/2006/main" prst="rect">
+            <a:avLst/>
+          </a:prstGeom>
+          <a:solidFill xmlns:a="http://schemas.openxmlformats.org/drawingml/2006/main">
+            <a:srgbClr val="E2E8F0"/>
+          </a:solidFill>
+          <a:ln xmlns:a="http://schemas.openxmlformats.org/drawingml/2006/main" w="0">
+            <a:solidFill>
+              <a:srgbClr val="000000">
+                <a:alpha val="0"/>
+              </a:srgbClr>
+            </a:solidFill>
+            <a:prstDash val="solid"/>
+          </a:ln>
+        </p:spPr>
+      </p:sp>
+      <p:sp>
+        <p:nvSpPr>
+          <p:cNvPr id="41" name="">
+            <a:extLst xmlns:a="http://schemas.openxmlformats.org/drawingml/2006/main">
+              <a:ext uri="{FF2B5EF4-FFF2-40B4-BE49-F238E27FC236}">
+                <a16:creationId xmlns:a16="http://schemas.microsoft.com/office/drawing/2014/main" id="{4C15353E-C948-4C81-80D6-D047C5D0C7A9}"/>
+              </a:ext>
+            </a:extLst>
+          </p:cNvPr>
+          <p:cNvSpPr>
+            <a:spLocks xmlns:a="http://schemas.openxmlformats.org/drawingml/2006/main" noGrp="1"/>
+          </p:cNvSpPr>
+          <p:nvPr/>
+        </p:nvSpPr>
+        <p:spPr>
+          <a:xfrm xmlns:a="http://schemas.openxmlformats.org/drawingml/2006/main">
+            <a:off x="819150" y="5162550"/>
+            <a:ext cx="2476500" cy="209550"/>
+          </a:xfrm>
+          <a:prstGeom xmlns:a="http://schemas.openxmlformats.org/drawingml/2006/main" prst="rect">
+            <a:avLst/>
+          </a:prstGeom>
+          <a:solidFill xmlns:a="http://schemas.openxmlformats.org/drawingml/2006/main">
+            <a:srgbClr val="000000">
+              <a:alpha val="0"/>
+            </a:srgbClr>
+          </a:solidFill>
+          <a:ln xmlns:a="http://schemas.openxmlformats.org/drawingml/2006/main" w="0">
+            <a:solidFill>
+              <a:srgbClr val="000000">
+                <a:alpha val="0"/>
+              </a:srgbClr>
+            </a:solidFill>
+            <a:prstDash val="solid"/>
+          </a:ln>
+        </p:spPr>
+        <p:txBody>
+          <a:bodyPr xmlns:a="http://schemas.openxmlformats.org/drawingml/2006/main" lIns="0" tIns="0" rIns="0" bIns="0" anchor="t"/>
+          <a:lstStyle xmlns:a="http://schemas.openxmlformats.org/drawingml/2006/main"/>
+          <a:p xmlns:a="http://schemas.openxmlformats.org/drawingml/2006/main">
+            <a:pPr algn="l">
+              <a:defRPr sz="900" b="1">
+                <a:solidFill>
+                  <a:srgbClr val="111827"/>
+                </a:solidFill>
+                <a:latin typeface="Aptos"/>
+                <a:ea typeface="Aptos"/>
+                <a:cs typeface="Aptos"/>
+              </a:defRPr>
+            </a:pPr>
+            <a:r>
+              <a:rPr sz="900" b="1">
+                <a:solidFill>
+                  <a:srgbClr val="111827"/>
+                </a:solidFill>
+                <a:latin typeface="Aptos"/>
+                <a:ea typeface="Aptos"/>
+                <a:cs typeface="Aptos"/>
+              </a:rPr>
+              <a:t>AI 진단</a:t>
+            </a:r>
+          </a:p>
+        </p:txBody>
+      </p:sp>
+      <p:sp>
+        <p:nvSpPr>
+          <p:cNvPr id="42" name="">
+            <a:extLst xmlns:a="http://schemas.openxmlformats.org/drawingml/2006/main">
+              <a:ext uri="{FF2B5EF4-FFF2-40B4-BE49-F238E27FC236}">
+                <a16:creationId xmlns:a16="http://schemas.microsoft.com/office/drawing/2014/main" id="{FFCEC2A2-A0BC-4939-8131-5CF5AB61AB38}"/>
+              </a:ext>
+            </a:extLst>
+          </p:cNvPr>
+          <p:cNvSpPr>
+            <a:spLocks xmlns:a="http://schemas.openxmlformats.org/drawingml/2006/main" noGrp="1"/>
+          </p:cNvSpPr>
+          <p:nvPr/>
+        </p:nvSpPr>
+        <p:spPr>
+          <a:xfrm xmlns:a="http://schemas.openxmlformats.org/drawingml/2006/main">
+            <a:off x="3505200" y="5162550"/>
+            <a:ext cx="4953000" cy="209550"/>
+          </a:xfrm>
+          <a:prstGeom xmlns:a="http://schemas.openxmlformats.org/drawingml/2006/main" prst="rect">
+            <a:avLst/>
+          </a:prstGeom>
+          <a:solidFill xmlns:a="http://schemas.openxmlformats.org/drawingml/2006/main">
+            <a:srgbClr val="000000">
+              <a:alpha val="0"/>
+            </a:srgbClr>
+          </a:solidFill>
+          <a:ln xmlns:a="http://schemas.openxmlformats.org/drawingml/2006/main" w="0">
+            <a:solidFill>
+              <a:srgbClr val="000000">
+                <a:alpha val="0"/>
+              </a:srgbClr>
+            </a:solidFill>
+            <a:prstDash val="solid"/>
+          </a:ln>
+        </p:spPr>
+        <p:txBody>
+          <a:bodyPr xmlns:a="http://schemas.openxmlformats.org/drawingml/2006/main" lIns="0" tIns="0" rIns="0" bIns="0" anchor="t"/>
+          <a:lstStyle xmlns:a="http://schemas.openxmlformats.org/drawingml/2006/main"/>
+          <a:p xmlns:a="http://schemas.openxmlformats.org/drawingml/2006/main">
             <a:pPr algn="l">
               <a:defRPr sz="900" b="0">
                 <a:solidFill>
-                  <a:srgbClr val="475569"/>
+                  <a:srgbClr val="334155"/>
                 </a:solidFill>
                 <a:latin typeface="Aptos"/>
                 <a:ea typeface="Aptos"/>
@@ -11409,70 +15026,35 @@
             <a:r>
               <a:rPr sz="900" b="0">
                 <a:solidFill>
-                  <a:srgbClr val="475569"/>
+                  <a:srgbClr val="334155"/>
                 </a:solidFill>
                 <a:latin typeface="Aptos"/>
                 <a:ea typeface="Aptos"/>
                 <a:cs typeface="Aptos"/>
               </a:rPr>
-              <a:t>서버 이력 차트 데이터 밀도와 장애 fallback 메시지 보강</a:t>
+              <a:t>ML ready, anomaly score 0.18, predicted alarm NONE 예시 표시</a:t>
             </a:r>
           </a:p>
         </p:txBody>
       </p:sp>
       <p:sp>
         <p:nvSpPr>
-          <p:cNvPr id="16" name="">
-            <a:extLst xmlns:a="http://schemas.openxmlformats.org/drawingml/2006/main">
-              <a:ext uri="{FF2B5EF4-FFF2-40B4-BE49-F238E27FC236}">
-                <a16:creationId xmlns:a16="http://schemas.microsoft.com/office/drawing/2014/main" id="{08F2DD42-31F9-4956-990F-E175CD67BBFE}"/>
-              </a:ext>
-            </a:extLst>
-          </p:cNvPr>
-          <p:cNvSpPr>
-            <a:spLocks xmlns:a="http://schemas.openxmlformats.org/drawingml/2006/main" noGrp="1"/>
-          </p:cNvSpPr>
-          <p:nvPr/>
-        </p:nvSpPr>
-        <p:spPr>
-          <a:xfrm xmlns:a="http://schemas.openxmlformats.org/drawingml/2006/main">
-            <a:off x="704850" y="3048000"/>
-            <a:ext cx="10287000" cy="9525"/>
-          </a:xfrm>
-          <a:prstGeom xmlns:a="http://schemas.openxmlformats.org/drawingml/2006/main" prst="rect">
-            <a:avLst/>
-          </a:prstGeom>
-          <a:solidFill xmlns:a="http://schemas.openxmlformats.org/drawingml/2006/main">
-            <a:srgbClr val="E2E8F0"/>
-          </a:solidFill>
-          <a:ln xmlns:a="http://schemas.openxmlformats.org/drawingml/2006/main" w="0">
-            <a:solidFill>
-              <a:srgbClr val="000000">
-                <a:alpha val="0"/>
-              </a:srgbClr>
-            </a:solidFill>
-            <a:prstDash val="solid"/>
-          </a:ln>
-        </p:spPr>
-      </p:sp>
-      <p:sp>
-        <p:nvSpPr>
-          <p:cNvPr id="17" name="">
-            <a:extLst xmlns:a="http://schemas.openxmlformats.org/drawingml/2006/main">
-              <a:ext uri="{FF2B5EF4-FFF2-40B4-BE49-F238E27FC236}">
-                <a16:creationId xmlns:a16="http://schemas.microsoft.com/office/drawing/2014/main" id="{49D86B50-4C5A-474C-A458-317B4CAB7200}"/>
-              </a:ext>
-            </a:extLst>
-          </p:cNvPr>
-          <p:cNvSpPr>
-            <a:spLocks xmlns:a="http://schemas.openxmlformats.org/drawingml/2006/main" noGrp="1"/>
-          </p:cNvSpPr>
-          <p:nvPr/>
-        </p:nvSpPr>
-        <p:spPr>
-          <a:xfrm xmlns:a="http://schemas.openxmlformats.org/drawingml/2006/main">
-            <a:off x="819150" y="3295650"/>
-            <a:ext cx="1714500" cy="228600"/>
+          <p:cNvPr id="43" name="">
+            <a:extLst xmlns:a="http://schemas.openxmlformats.org/drawingml/2006/main">
+              <a:ext uri="{FF2B5EF4-FFF2-40B4-BE49-F238E27FC236}">
+                <a16:creationId xmlns:a16="http://schemas.microsoft.com/office/drawing/2014/main" id="{5122D733-1FC9-4E78-B979-580A391F8AE3}"/>
+              </a:ext>
+            </a:extLst>
+          </p:cNvPr>
+          <p:cNvSpPr>
+            <a:spLocks xmlns:a="http://schemas.openxmlformats.org/drawingml/2006/main" noGrp="1"/>
+          </p:cNvSpPr>
+          <p:nvPr/>
+        </p:nvSpPr>
+        <p:spPr>
+          <a:xfrm xmlns:a="http://schemas.openxmlformats.org/drawingml/2006/main">
+            <a:off x="9620250" y="5162550"/>
+            <a:ext cx="1047750" cy="209550"/>
           </a:xfrm>
           <a:prstGeom xmlns:a="http://schemas.openxmlformats.org/drawingml/2006/main" prst="rect">
             <a:avLst/>
@@ -11495,10 +15077,10 @@
           <a:bodyPr xmlns:a="http://schemas.openxmlformats.org/drawingml/2006/main" lIns="0" tIns="0" rIns="0" bIns="0" anchor="t"/>
           <a:lstStyle xmlns:a="http://schemas.openxmlformats.org/drawingml/2006/main"/>
           <a:p xmlns:a="http://schemas.openxmlformats.org/drawingml/2006/main">
-            <a:pPr algn="l">
-              <a:defRPr sz="975" b="1">
-                <a:solidFill>
-                  <a:srgbClr val="111827"/>
+            <a:pPr algn="ctr">
+              <a:defRPr sz="900" b="1">
+                <a:solidFill>
+                  <a:srgbClr val="16A34A"/>
                 </a:solidFill>
                 <a:latin typeface="Aptos"/>
                 <a:ea typeface="Aptos"/>
@@ -11506,37 +15088,136 @@
               </a:defRPr>
             </a:pPr>
             <a:r>
-              <a:rPr sz="975" b="1">
-                <a:solidFill>
-                  <a:srgbClr val="111827"/>
+              <a:rPr sz="900" b="1">
+                <a:solidFill>
+                  <a:srgbClr val="16A34A"/>
                 </a:solidFill>
                 <a:latin typeface="Aptos"/>
                 <a:ea typeface="Aptos"/>
                 <a:cs typeface="Aptos"/>
               </a:rPr>
-              <a:t>AI</a:t>
+              <a:t>PASS</a:t>
             </a:r>
           </a:p>
         </p:txBody>
       </p:sp>
       <p:sp>
         <p:nvSpPr>
-          <p:cNvPr id="18" name="">
-            <a:extLst xmlns:a="http://schemas.openxmlformats.org/drawingml/2006/main">
-              <a:ext uri="{FF2B5EF4-FFF2-40B4-BE49-F238E27FC236}">
-                <a16:creationId xmlns:a16="http://schemas.microsoft.com/office/drawing/2014/main" id="{8B2A0C30-2EED-4A56-ABFD-ADEA45D0A1D7}"/>
-              </a:ext>
-            </a:extLst>
-          </p:cNvPr>
-          <p:cNvSpPr>
-            <a:spLocks xmlns:a="http://schemas.openxmlformats.org/drawingml/2006/main" noGrp="1"/>
-          </p:cNvSpPr>
-          <p:nvPr/>
-        </p:nvSpPr>
-        <p:spPr>
-          <a:xfrm xmlns:a="http://schemas.openxmlformats.org/drawingml/2006/main">
-            <a:off x="2724150" y="3295650"/>
-            <a:ext cx="3714750" cy="228600"/>
+          <p:cNvPr id="44" name="">
+            <a:extLst xmlns:a="http://schemas.openxmlformats.org/drawingml/2006/main">
+              <a:ext uri="{FF2B5EF4-FFF2-40B4-BE49-F238E27FC236}">
+                <a16:creationId xmlns:a16="http://schemas.microsoft.com/office/drawing/2014/main" id="{222C8394-852A-45CA-B3A3-9153E86417AF}"/>
+              </a:ext>
+            </a:extLst>
+          </p:cNvPr>
+          <p:cNvSpPr>
+            <a:spLocks xmlns:a="http://schemas.openxmlformats.org/drawingml/2006/main" noGrp="1"/>
+          </p:cNvSpPr>
+          <p:nvPr/>
+        </p:nvSpPr>
+        <p:spPr>
+          <a:xfrm xmlns:a="http://schemas.openxmlformats.org/drawingml/2006/main">
+            <a:off x="685800" y="5467350"/>
+            <a:ext cx="10191750" cy="9525"/>
+          </a:xfrm>
+          <a:prstGeom xmlns:a="http://schemas.openxmlformats.org/drawingml/2006/main" prst="rect">
+            <a:avLst/>
+          </a:prstGeom>
+          <a:solidFill xmlns:a="http://schemas.openxmlformats.org/drawingml/2006/main">
+            <a:srgbClr val="E2E8F0"/>
+          </a:solidFill>
+          <a:ln xmlns:a="http://schemas.openxmlformats.org/drawingml/2006/main" w="0">
+            <a:solidFill>
+              <a:srgbClr val="000000">
+                <a:alpha val="0"/>
+              </a:srgbClr>
+            </a:solidFill>
+            <a:prstDash val="solid"/>
+          </a:ln>
+        </p:spPr>
+      </p:sp>
+      <p:sp>
+        <p:nvSpPr>
+          <p:cNvPr id="45" name="">
+            <a:extLst xmlns:a="http://schemas.openxmlformats.org/drawingml/2006/main">
+              <a:ext uri="{FF2B5EF4-FFF2-40B4-BE49-F238E27FC236}">
+                <a16:creationId xmlns:a16="http://schemas.microsoft.com/office/drawing/2014/main" id="{365E70C0-4063-475A-AC87-36E6FB1D03F7}"/>
+              </a:ext>
+            </a:extLst>
+          </p:cNvPr>
+          <p:cNvSpPr>
+            <a:spLocks xmlns:a="http://schemas.openxmlformats.org/drawingml/2006/main" noGrp="1"/>
+          </p:cNvSpPr>
+          <p:nvPr/>
+        </p:nvSpPr>
+        <p:spPr>
+          <a:xfrm xmlns:a="http://schemas.openxmlformats.org/drawingml/2006/main">
+            <a:off x="819150" y="5657850"/>
+            <a:ext cx="2476500" cy="209550"/>
+          </a:xfrm>
+          <a:prstGeom xmlns:a="http://schemas.openxmlformats.org/drawingml/2006/main" prst="rect">
+            <a:avLst/>
+          </a:prstGeom>
+          <a:solidFill xmlns:a="http://schemas.openxmlformats.org/drawingml/2006/main">
+            <a:srgbClr val="000000">
+              <a:alpha val="0"/>
+            </a:srgbClr>
+          </a:solidFill>
+          <a:ln xmlns:a="http://schemas.openxmlformats.org/drawingml/2006/main" w="0">
+            <a:solidFill>
+              <a:srgbClr val="000000">
+                <a:alpha val="0"/>
+              </a:srgbClr>
+            </a:solidFill>
+            <a:prstDash val="solid"/>
+          </a:ln>
+        </p:spPr>
+        <p:txBody>
+          <a:bodyPr xmlns:a="http://schemas.openxmlformats.org/drawingml/2006/main" lIns="0" tIns="0" rIns="0" bIns="0" anchor="t"/>
+          <a:lstStyle xmlns:a="http://schemas.openxmlformats.org/drawingml/2006/main"/>
+          <a:p xmlns:a="http://schemas.openxmlformats.org/drawingml/2006/main">
+            <a:pPr algn="l">
+              <a:defRPr sz="900" b="1">
+                <a:solidFill>
+                  <a:srgbClr val="111827"/>
+                </a:solidFill>
+                <a:latin typeface="Aptos"/>
+                <a:ea typeface="Aptos"/>
+                <a:cs typeface="Aptos"/>
+              </a:defRPr>
+            </a:pPr>
+            <a:r>
+              <a:rPr sz="900" b="1">
+                <a:solidFill>
+                  <a:srgbClr val="111827"/>
+                </a:solidFill>
+                <a:latin typeface="Aptos"/>
+                <a:ea typeface="Aptos"/>
+                <a:cs typeface="Aptos"/>
+              </a:rPr>
+              <a:t>PPTX 구조</a:t>
+            </a:r>
+          </a:p>
+        </p:txBody>
+      </p:sp>
+      <p:sp>
+        <p:nvSpPr>
+          <p:cNvPr id="46" name="">
+            <a:extLst xmlns:a="http://schemas.openxmlformats.org/drawingml/2006/main">
+              <a:ext uri="{FF2B5EF4-FFF2-40B4-BE49-F238E27FC236}">
+                <a16:creationId xmlns:a16="http://schemas.microsoft.com/office/drawing/2014/main" id="{467DB32F-0990-4710-83A4-B6A2D842150C}"/>
+              </a:ext>
+            </a:extLst>
+          </p:cNvPr>
+          <p:cNvSpPr>
+            <a:spLocks xmlns:a="http://schemas.openxmlformats.org/drawingml/2006/main" noGrp="1"/>
+          </p:cNvSpPr>
+          <p:nvPr/>
+        </p:nvSpPr>
+        <p:spPr>
+          <a:xfrm xmlns:a="http://schemas.openxmlformats.org/drawingml/2006/main">
+            <a:off x="3505200" y="5657850"/>
+            <a:ext cx="4953000" cy="209550"/>
           </a:xfrm>
           <a:prstGeom xmlns:a="http://schemas.openxmlformats.org/drawingml/2006/main" prst="rect">
             <a:avLst/>
@@ -11578,29 +15259,29 @@
                 <a:ea typeface="Aptos"/>
                 <a:cs typeface="Aptos"/>
               </a:rPr>
-              <a:t>sklearn 모델 로드와 규칙 fallback, latest/status API 제공</a:t>
+              <a:t>8장 초안에서 10장으로 보강, PPTX archive 내 slide XML/media 검증</a:t>
             </a:r>
           </a:p>
         </p:txBody>
       </p:sp>
       <p:sp>
         <p:nvSpPr>
-          <p:cNvPr id="19" name="">
-            <a:extLst xmlns:a="http://schemas.openxmlformats.org/drawingml/2006/main">
-              <a:ext uri="{FF2B5EF4-FFF2-40B4-BE49-F238E27FC236}">
-                <a16:creationId xmlns:a16="http://schemas.microsoft.com/office/drawing/2014/main" id="{82A26345-4413-4B52-ACB3-6A0CE9D32FBF}"/>
-              </a:ext>
-            </a:extLst>
-          </p:cNvPr>
-          <p:cNvSpPr>
-            <a:spLocks xmlns:a="http://schemas.openxmlformats.org/drawingml/2006/main" noGrp="1"/>
-          </p:cNvSpPr>
-          <p:nvPr/>
-        </p:nvSpPr>
-        <p:spPr>
-          <a:xfrm xmlns:a="http://schemas.openxmlformats.org/drawingml/2006/main">
-            <a:off x="6819900" y="3295650"/>
-            <a:ext cx="4095750" cy="228600"/>
+          <p:cNvPr id="47" name="">
+            <a:extLst xmlns:a="http://schemas.openxmlformats.org/drawingml/2006/main">
+              <a:ext uri="{FF2B5EF4-FFF2-40B4-BE49-F238E27FC236}">
+                <a16:creationId xmlns:a16="http://schemas.microsoft.com/office/drawing/2014/main" id="{DF4577B1-AD3E-41F7-9AC9-B45E0530F8E0}"/>
+              </a:ext>
+            </a:extLst>
+          </p:cNvPr>
+          <p:cNvSpPr>
+            <a:spLocks xmlns:a="http://schemas.openxmlformats.org/drawingml/2006/main" noGrp="1"/>
+          </p:cNvSpPr>
+          <p:nvPr/>
+        </p:nvSpPr>
+        <p:spPr>
+          <a:xfrm xmlns:a="http://schemas.openxmlformats.org/drawingml/2006/main">
+            <a:off x="9620250" y="5657850"/>
+            <a:ext cx="1047750" cy="209550"/>
           </a:xfrm>
           <a:prstGeom xmlns:a="http://schemas.openxmlformats.org/drawingml/2006/main" prst="rect">
             <a:avLst/>
@@ -11623,10 +15304,10 @@
           <a:bodyPr xmlns:a="http://schemas.openxmlformats.org/drawingml/2006/main" lIns="0" tIns="0" rIns="0" bIns="0" anchor="t"/>
           <a:lstStyle xmlns:a="http://schemas.openxmlformats.org/drawingml/2006/main"/>
           <a:p xmlns:a="http://schemas.openxmlformats.org/drawingml/2006/main">
-            <a:pPr algn="l">
-              <a:defRPr sz="900" b="0">
-                <a:solidFill>
-                  <a:srgbClr val="475569"/>
+            <a:pPr algn="ctr">
+              <a:defRPr sz="900" b="1">
+                <a:solidFill>
+                  <a:srgbClr val="16A34A"/>
                 </a:solidFill>
                 <a:latin typeface="Aptos"/>
                 <a:ea typeface="Aptos"/>
@@ -11634,36 +15315,71 @@
               </a:defRPr>
             </a:pPr>
             <a:r>
-              <a:rPr sz="900" b="0">
-                <a:solidFill>
-                  <a:srgbClr val="475569"/>
+              <a:rPr sz="900" b="1">
+                <a:solidFill>
+                  <a:srgbClr val="16A34A"/>
                 </a:solidFill>
                 <a:latin typeface="Aptos"/>
                 <a:ea typeface="Aptos"/>
                 <a:cs typeface="Aptos"/>
               </a:rPr>
-              <a:t>실제 장비 데이터 수집 후 재학습 및 정확도 평가</a:t>
+              <a:t>PASS</a:t>
             </a:r>
           </a:p>
         </p:txBody>
       </p:sp>
       <p:sp>
         <p:nvSpPr>
-          <p:cNvPr id="20" name="">
-            <a:extLst xmlns:a="http://schemas.openxmlformats.org/drawingml/2006/main">
-              <a:ext uri="{FF2B5EF4-FFF2-40B4-BE49-F238E27FC236}">
-                <a16:creationId xmlns:a16="http://schemas.microsoft.com/office/drawing/2014/main" id="{C7DE70A4-CDE0-49C9-ACFB-D9DD0EB59A9D}"/>
-              </a:ext>
-            </a:extLst>
-          </p:cNvPr>
-          <p:cNvSpPr>
-            <a:spLocks xmlns:a="http://schemas.openxmlformats.org/drawingml/2006/main" noGrp="1"/>
-          </p:cNvSpPr>
-          <p:nvPr/>
-        </p:nvSpPr>
-        <p:spPr>
-          <a:xfrm xmlns:a="http://schemas.openxmlformats.org/drawingml/2006/main">
-            <a:off x="704850" y="3619500"/>
+          <p:cNvPr id="48" name="">
+            <a:extLst xmlns:a="http://schemas.openxmlformats.org/drawingml/2006/main">
+              <a:ext uri="{FF2B5EF4-FFF2-40B4-BE49-F238E27FC236}">
+                <a16:creationId xmlns:a16="http://schemas.microsoft.com/office/drawing/2014/main" id="{13EE7B48-BFFD-4B92-BDAD-D09D318773D1}"/>
+              </a:ext>
+            </a:extLst>
+          </p:cNvPr>
+          <p:cNvSpPr>
+            <a:spLocks xmlns:a="http://schemas.openxmlformats.org/drawingml/2006/main" noGrp="1"/>
+          </p:cNvSpPr>
+          <p:nvPr/>
+        </p:nvSpPr>
+        <p:spPr>
+          <a:xfrm xmlns:a="http://schemas.openxmlformats.org/drawingml/2006/main">
+            <a:off x="685800" y="5962650"/>
+            <a:ext cx="10191750" cy="9525"/>
+          </a:xfrm>
+          <a:prstGeom xmlns:a="http://schemas.openxmlformats.org/drawingml/2006/main" prst="rect">
+            <a:avLst/>
+          </a:prstGeom>
+          <a:solidFill xmlns:a="http://schemas.openxmlformats.org/drawingml/2006/main">
+            <a:srgbClr val="E2E8F0"/>
+          </a:solidFill>
+          <a:ln xmlns:a="http://schemas.openxmlformats.org/drawingml/2006/main" w="0">
+            <a:solidFill>
+              <a:srgbClr val="000000">
+                <a:alpha val="0"/>
+              </a:srgbClr>
+            </a:solidFill>
+            <a:prstDash val="solid"/>
+          </a:ln>
+        </p:spPr>
+      </p:sp>
+      <p:sp>
+        <p:nvSpPr>
+          <p:cNvPr id="49" name="">
+            <a:extLst xmlns:a="http://schemas.openxmlformats.org/drawingml/2006/main">
+              <a:ext uri="{FF2B5EF4-FFF2-40B4-BE49-F238E27FC236}">
+                <a16:creationId xmlns:a16="http://schemas.microsoft.com/office/drawing/2014/main" id="{40269E0E-B98B-4074-9F8C-489DC193A327}"/>
+              </a:ext>
+            </a:extLst>
+          </p:cNvPr>
+          <p:cNvSpPr>
+            <a:spLocks xmlns:a="http://schemas.openxmlformats.org/drawingml/2006/main" noGrp="1"/>
+          </p:cNvSpPr>
+          <p:nvPr/>
+        </p:nvSpPr>
+        <p:spPr>
+          <a:xfrm xmlns:a="http://schemas.openxmlformats.org/drawingml/2006/main">
+            <a:off x="666750" y="6153150"/>
             <a:ext cx="10287000" cy="9525"/>
           </a:xfrm>
           <a:prstGeom xmlns:a="http://schemas.openxmlformats.org/drawingml/2006/main" prst="rect">
@@ -11684,553 +15400,10 @@
       </p:sp>
       <p:sp>
         <p:nvSpPr>
-          <p:cNvPr id="21" name="">
-            <a:extLst xmlns:a="http://schemas.openxmlformats.org/drawingml/2006/main">
-              <a:ext uri="{FF2B5EF4-FFF2-40B4-BE49-F238E27FC236}">
-                <a16:creationId xmlns:a16="http://schemas.microsoft.com/office/drawing/2014/main" id="{E9E854D3-B82F-4CD0-AF87-03FB9975090C}"/>
-              </a:ext>
-            </a:extLst>
-          </p:cNvPr>
-          <p:cNvSpPr>
-            <a:spLocks xmlns:a="http://schemas.openxmlformats.org/drawingml/2006/main" noGrp="1"/>
-          </p:cNvSpPr>
-          <p:nvPr/>
-        </p:nvSpPr>
-        <p:spPr>
-          <a:xfrm xmlns:a="http://schemas.openxmlformats.org/drawingml/2006/main">
-            <a:off x="819150" y="3867150"/>
-            <a:ext cx="1714500" cy="228600"/>
-          </a:xfrm>
-          <a:prstGeom xmlns:a="http://schemas.openxmlformats.org/drawingml/2006/main" prst="rect">
-            <a:avLst/>
-          </a:prstGeom>
-          <a:solidFill xmlns:a="http://schemas.openxmlformats.org/drawingml/2006/main">
-            <a:srgbClr val="000000">
-              <a:alpha val="0"/>
-            </a:srgbClr>
-          </a:solidFill>
-          <a:ln xmlns:a="http://schemas.openxmlformats.org/drawingml/2006/main" w="0">
-            <a:solidFill>
-              <a:srgbClr val="000000">
-                <a:alpha val="0"/>
-              </a:srgbClr>
-            </a:solidFill>
-            <a:prstDash val="solid"/>
-          </a:ln>
-        </p:spPr>
-        <p:txBody>
-          <a:bodyPr xmlns:a="http://schemas.openxmlformats.org/drawingml/2006/main" lIns="0" tIns="0" rIns="0" bIns="0" anchor="t"/>
-          <a:lstStyle xmlns:a="http://schemas.openxmlformats.org/drawingml/2006/main"/>
-          <a:p xmlns:a="http://schemas.openxmlformats.org/drawingml/2006/main">
-            <a:pPr algn="l">
-              <a:defRPr sz="975" b="1">
-                <a:solidFill>
-                  <a:srgbClr val="111827"/>
-                </a:solidFill>
-                <a:latin typeface="Aptos"/>
-                <a:ea typeface="Aptos"/>
-                <a:cs typeface="Aptos"/>
-              </a:defRPr>
-            </a:pPr>
-            <a:r>
-              <a:rPr sz="975" b="1">
-                <a:solidFill>
-                  <a:srgbClr val="111827"/>
-                </a:solidFill>
-                <a:latin typeface="Aptos"/>
-                <a:ea typeface="Aptos"/>
-                <a:cs typeface="Aptos"/>
-              </a:rPr>
-              <a:t>데이터</a:t>
-            </a:r>
-          </a:p>
-        </p:txBody>
-      </p:sp>
-      <p:sp>
-        <p:nvSpPr>
-          <p:cNvPr id="22" name="">
-            <a:extLst xmlns:a="http://schemas.openxmlformats.org/drawingml/2006/main">
-              <a:ext uri="{FF2B5EF4-FFF2-40B4-BE49-F238E27FC236}">
-                <a16:creationId xmlns:a16="http://schemas.microsoft.com/office/drawing/2014/main" id="{78C8A06A-0C32-4EC4-A851-61C89D13A288}"/>
-              </a:ext>
-            </a:extLst>
-          </p:cNvPr>
-          <p:cNvSpPr>
-            <a:spLocks xmlns:a="http://schemas.openxmlformats.org/drawingml/2006/main" noGrp="1"/>
-          </p:cNvSpPr>
-          <p:nvPr/>
-        </p:nvSpPr>
-        <p:spPr>
-          <a:xfrm xmlns:a="http://schemas.openxmlformats.org/drawingml/2006/main">
-            <a:off x="2724150" y="3867150"/>
-            <a:ext cx="3714750" cy="228600"/>
-          </a:xfrm>
-          <a:prstGeom xmlns:a="http://schemas.openxmlformats.org/drawingml/2006/main" prst="rect">
-            <a:avLst/>
-          </a:prstGeom>
-          <a:solidFill xmlns:a="http://schemas.openxmlformats.org/drawingml/2006/main">
-            <a:srgbClr val="000000">
-              <a:alpha val="0"/>
-            </a:srgbClr>
-          </a:solidFill>
-          <a:ln xmlns:a="http://schemas.openxmlformats.org/drawingml/2006/main" w="0">
-            <a:solidFill>
-              <a:srgbClr val="000000">
-                <a:alpha val="0"/>
-              </a:srgbClr>
-            </a:solidFill>
-            <a:prstDash val="solid"/>
-          </a:ln>
-        </p:spPr>
-        <p:txBody>
-          <a:bodyPr xmlns:a="http://schemas.openxmlformats.org/drawingml/2006/main" lIns="0" tIns="0" rIns="0" bIns="0" anchor="t"/>
-          <a:lstStyle xmlns:a="http://schemas.openxmlformats.org/drawingml/2006/main"/>
-          <a:p xmlns:a="http://schemas.openxmlformats.org/drawingml/2006/main">
-            <a:pPr algn="l">
-              <a:defRPr sz="900" b="0">
-                <a:solidFill>
-                  <a:srgbClr val="334155"/>
-                </a:solidFill>
-                <a:latin typeface="Aptos"/>
-                <a:ea typeface="Aptos"/>
-                <a:cs typeface="Aptos"/>
-              </a:defRPr>
-            </a:pPr>
-            <a:r>
-              <a:rPr sz="900" b="0">
-                <a:solidFill>
-                  <a:srgbClr val="334155"/>
-                </a:solidFill>
-                <a:latin typeface="Aptos"/>
-                <a:ea typeface="Aptos"/>
-                <a:cs typeface="Aptos"/>
-              </a:rPr>
-              <a:t>SQLite 이벤트/알람 이력과 JSONL 학습 데이터 흐름 마련</a:t>
-            </a:r>
-          </a:p>
-        </p:txBody>
-      </p:sp>
-      <p:sp>
-        <p:nvSpPr>
-          <p:cNvPr id="23" name="">
-            <a:extLst xmlns:a="http://schemas.openxmlformats.org/drawingml/2006/main">
-              <a:ext uri="{FF2B5EF4-FFF2-40B4-BE49-F238E27FC236}">
-                <a16:creationId xmlns:a16="http://schemas.microsoft.com/office/drawing/2014/main" id="{F19C417D-7941-4B6A-B1F8-029E9349A0C5}"/>
-              </a:ext>
-            </a:extLst>
-          </p:cNvPr>
-          <p:cNvSpPr>
-            <a:spLocks xmlns:a="http://schemas.openxmlformats.org/drawingml/2006/main" noGrp="1"/>
-          </p:cNvSpPr>
-          <p:nvPr/>
-        </p:nvSpPr>
-        <p:spPr>
-          <a:xfrm xmlns:a="http://schemas.openxmlformats.org/drawingml/2006/main">
-            <a:off x="6819900" y="3867150"/>
-            <a:ext cx="4095750" cy="228600"/>
-          </a:xfrm>
-          <a:prstGeom xmlns:a="http://schemas.openxmlformats.org/drawingml/2006/main" prst="rect">
-            <a:avLst/>
-          </a:prstGeom>
-          <a:solidFill xmlns:a="http://schemas.openxmlformats.org/drawingml/2006/main">
-            <a:srgbClr val="000000">
-              <a:alpha val="0"/>
-            </a:srgbClr>
-          </a:solidFill>
-          <a:ln xmlns:a="http://schemas.openxmlformats.org/drawingml/2006/main" w="0">
-            <a:solidFill>
-              <a:srgbClr val="000000">
-                <a:alpha val="0"/>
-              </a:srgbClr>
-            </a:solidFill>
-            <a:prstDash val="solid"/>
-          </a:ln>
-        </p:spPr>
-        <p:txBody>
-          <a:bodyPr xmlns:a="http://schemas.openxmlformats.org/drawingml/2006/main" lIns="0" tIns="0" rIns="0" bIns="0" anchor="t"/>
-          <a:lstStyle xmlns:a="http://schemas.openxmlformats.org/drawingml/2006/main"/>
-          <a:p xmlns:a="http://schemas.openxmlformats.org/drawingml/2006/main">
-            <a:pPr algn="l">
-              <a:defRPr sz="900" b="0">
-                <a:solidFill>
-                  <a:srgbClr val="475569"/>
-                </a:solidFill>
-                <a:latin typeface="Aptos"/>
-                <a:ea typeface="Aptos"/>
-                <a:cs typeface="Aptos"/>
-              </a:defRPr>
-            </a:pPr>
-            <a:r>
-              <a:rPr sz="900" b="0">
-                <a:solidFill>
-                  <a:srgbClr val="475569"/>
-                </a:solidFill>
-                <a:latin typeface="Aptos"/>
-                <a:ea typeface="Aptos"/>
-                <a:cs typeface="Aptos"/>
-              </a:rPr>
-              <a:t>운영 로그 보존 정책과 데이터 정합성 검증 자동화</a:t>
-            </a:r>
-          </a:p>
-        </p:txBody>
-      </p:sp>
-      <p:sp>
-        <p:nvSpPr>
-          <p:cNvPr id="24" name="">
-            <a:extLst xmlns:a="http://schemas.openxmlformats.org/drawingml/2006/main">
-              <a:ext uri="{FF2B5EF4-FFF2-40B4-BE49-F238E27FC236}">
-                <a16:creationId xmlns:a16="http://schemas.microsoft.com/office/drawing/2014/main" id="{FE56C609-373B-48C0-89B0-107B5C5B8AF2}"/>
-              </a:ext>
-            </a:extLst>
-          </p:cNvPr>
-          <p:cNvSpPr>
-            <a:spLocks xmlns:a="http://schemas.openxmlformats.org/drawingml/2006/main" noGrp="1"/>
-          </p:cNvSpPr>
-          <p:nvPr/>
-        </p:nvSpPr>
-        <p:spPr>
-          <a:xfrm xmlns:a="http://schemas.openxmlformats.org/drawingml/2006/main">
-            <a:off x="704850" y="4191000"/>
-            <a:ext cx="10287000" cy="9525"/>
-          </a:xfrm>
-          <a:prstGeom xmlns:a="http://schemas.openxmlformats.org/drawingml/2006/main" prst="rect">
-            <a:avLst/>
-          </a:prstGeom>
-          <a:solidFill xmlns:a="http://schemas.openxmlformats.org/drawingml/2006/main">
-            <a:srgbClr val="E2E8F0"/>
-          </a:solidFill>
-          <a:ln xmlns:a="http://schemas.openxmlformats.org/drawingml/2006/main" w="0">
-            <a:solidFill>
-              <a:srgbClr val="000000">
-                <a:alpha val="0"/>
-              </a:srgbClr>
-            </a:solidFill>
-            <a:prstDash val="solid"/>
-          </a:ln>
-        </p:spPr>
-      </p:sp>
-      <p:sp>
-        <p:nvSpPr>
-          <p:cNvPr id="25" name="">
-            <a:extLst xmlns:a="http://schemas.openxmlformats.org/drawingml/2006/main">
-              <a:ext uri="{FF2B5EF4-FFF2-40B4-BE49-F238E27FC236}">
-                <a16:creationId xmlns:a16="http://schemas.microsoft.com/office/drawing/2014/main" id="{0BC29AFF-9BB5-427B-8F72-FACF9D2A48A2}"/>
-              </a:ext>
-            </a:extLst>
-          </p:cNvPr>
-          <p:cNvSpPr>
-            <a:spLocks xmlns:a="http://schemas.openxmlformats.org/drawingml/2006/main" noGrp="1"/>
-          </p:cNvSpPr>
-          <p:nvPr/>
-        </p:nvSpPr>
-        <p:spPr>
-          <a:xfrm xmlns:a="http://schemas.openxmlformats.org/drawingml/2006/main">
-            <a:off x="819150" y="4438650"/>
-            <a:ext cx="1714500" cy="228600"/>
-          </a:xfrm>
-          <a:prstGeom xmlns:a="http://schemas.openxmlformats.org/drawingml/2006/main" prst="rect">
-            <a:avLst/>
-          </a:prstGeom>
-          <a:solidFill xmlns:a="http://schemas.openxmlformats.org/drawingml/2006/main">
-            <a:srgbClr val="000000">
-              <a:alpha val="0"/>
-            </a:srgbClr>
-          </a:solidFill>
-          <a:ln xmlns:a="http://schemas.openxmlformats.org/drawingml/2006/main" w="0">
-            <a:solidFill>
-              <a:srgbClr val="000000">
-                <a:alpha val="0"/>
-              </a:srgbClr>
-            </a:solidFill>
-            <a:prstDash val="solid"/>
-          </a:ln>
-        </p:spPr>
-        <p:txBody>
-          <a:bodyPr xmlns:a="http://schemas.openxmlformats.org/drawingml/2006/main" lIns="0" tIns="0" rIns="0" bIns="0" anchor="t"/>
-          <a:lstStyle xmlns:a="http://schemas.openxmlformats.org/drawingml/2006/main"/>
-          <a:p xmlns:a="http://schemas.openxmlformats.org/drawingml/2006/main">
-            <a:pPr algn="l">
-              <a:defRPr sz="975" b="1">
-                <a:solidFill>
-                  <a:srgbClr val="111827"/>
-                </a:solidFill>
-                <a:latin typeface="Aptos"/>
-                <a:ea typeface="Aptos"/>
-                <a:cs typeface="Aptos"/>
-              </a:defRPr>
-            </a:pPr>
-            <a:r>
-              <a:rPr sz="975" b="1">
-                <a:solidFill>
-                  <a:srgbClr val="111827"/>
-                </a:solidFill>
-                <a:latin typeface="Aptos"/>
-                <a:ea typeface="Aptos"/>
-                <a:cs typeface="Aptos"/>
-              </a:rPr>
-              <a:t>실장비 연동</a:t>
-            </a:r>
-          </a:p>
-        </p:txBody>
-      </p:sp>
-      <p:sp>
-        <p:nvSpPr>
-          <p:cNvPr id="26" name="">
-            <a:extLst xmlns:a="http://schemas.openxmlformats.org/drawingml/2006/main">
-              <a:ext uri="{FF2B5EF4-FFF2-40B4-BE49-F238E27FC236}">
-                <a16:creationId xmlns:a16="http://schemas.microsoft.com/office/drawing/2014/main" id="{37794855-ACB7-4429-BBA7-E22377AAA8A3}"/>
-              </a:ext>
-            </a:extLst>
-          </p:cNvPr>
-          <p:cNvSpPr>
-            <a:spLocks xmlns:a="http://schemas.openxmlformats.org/drawingml/2006/main" noGrp="1"/>
-          </p:cNvSpPr>
-          <p:nvPr/>
-        </p:nvSpPr>
-        <p:spPr>
-          <a:xfrm xmlns:a="http://schemas.openxmlformats.org/drawingml/2006/main">
-            <a:off x="2724150" y="4438650"/>
-            <a:ext cx="3714750" cy="228600"/>
-          </a:xfrm>
-          <a:prstGeom xmlns:a="http://schemas.openxmlformats.org/drawingml/2006/main" prst="rect">
-            <a:avLst/>
-          </a:prstGeom>
-          <a:solidFill xmlns:a="http://schemas.openxmlformats.org/drawingml/2006/main">
-            <a:srgbClr val="000000">
-              <a:alpha val="0"/>
-            </a:srgbClr>
-          </a:solidFill>
-          <a:ln xmlns:a="http://schemas.openxmlformats.org/drawingml/2006/main" w="0">
-            <a:solidFill>
-              <a:srgbClr val="000000">
-                <a:alpha val="0"/>
-              </a:srgbClr>
-            </a:solidFill>
-            <a:prstDash val="solid"/>
-          </a:ln>
-        </p:spPr>
-        <p:txBody>
-          <a:bodyPr xmlns:a="http://schemas.openxmlformats.org/drawingml/2006/main" lIns="0" tIns="0" rIns="0" bIns="0" anchor="t"/>
-          <a:lstStyle xmlns:a="http://schemas.openxmlformats.org/drawingml/2006/main"/>
-          <a:p xmlns:a="http://schemas.openxmlformats.org/drawingml/2006/main">
-            <a:pPr algn="l">
-              <a:defRPr sz="900" b="0">
-                <a:solidFill>
-                  <a:srgbClr val="334155"/>
-                </a:solidFill>
-                <a:latin typeface="Aptos"/>
-                <a:ea typeface="Aptos"/>
-                <a:cs typeface="Aptos"/>
-              </a:defRPr>
-            </a:pPr>
-            <a:r>
-              <a:rPr sz="900" b="0">
-                <a:solidFill>
-                  <a:srgbClr val="334155"/>
-                </a:solidFill>
-                <a:latin typeface="Aptos"/>
-                <a:ea typeface="Aptos"/>
-                <a:cs typeface="Aptos"/>
-              </a:rPr>
-              <a:t>TwinCAT 없이도 데모 가능한 시뮬레이션 흐름 확보</a:t>
-            </a:r>
-          </a:p>
-        </p:txBody>
-      </p:sp>
-      <p:sp>
-        <p:nvSpPr>
-          <p:cNvPr id="27" name="">
-            <a:extLst xmlns:a="http://schemas.openxmlformats.org/drawingml/2006/main">
-              <a:ext uri="{FF2B5EF4-FFF2-40B4-BE49-F238E27FC236}">
-                <a16:creationId xmlns:a16="http://schemas.microsoft.com/office/drawing/2014/main" id="{801CB40C-03DA-4A9F-9507-9F0941D63AA3}"/>
-              </a:ext>
-            </a:extLst>
-          </p:cNvPr>
-          <p:cNvSpPr>
-            <a:spLocks xmlns:a="http://schemas.openxmlformats.org/drawingml/2006/main" noGrp="1"/>
-          </p:cNvSpPr>
-          <p:nvPr/>
-        </p:nvSpPr>
-        <p:spPr>
-          <a:xfrm xmlns:a="http://schemas.openxmlformats.org/drawingml/2006/main">
-            <a:off x="6819900" y="4438650"/>
-            <a:ext cx="4095750" cy="228600"/>
-          </a:xfrm>
-          <a:prstGeom xmlns:a="http://schemas.openxmlformats.org/drawingml/2006/main" prst="rect">
-            <a:avLst/>
-          </a:prstGeom>
-          <a:solidFill xmlns:a="http://schemas.openxmlformats.org/drawingml/2006/main">
-            <a:srgbClr val="000000">
-              <a:alpha val="0"/>
-            </a:srgbClr>
-          </a:solidFill>
-          <a:ln xmlns:a="http://schemas.openxmlformats.org/drawingml/2006/main" w="0">
-            <a:solidFill>
-              <a:srgbClr val="000000">
-                <a:alpha val="0"/>
-              </a:srgbClr>
-            </a:solidFill>
-            <a:prstDash val="solid"/>
-          </a:ln>
-        </p:spPr>
-        <p:txBody>
-          <a:bodyPr xmlns:a="http://schemas.openxmlformats.org/drawingml/2006/main" lIns="0" tIns="0" rIns="0" bIns="0" anchor="t"/>
-          <a:lstStyle xmlns:a="http://schemas.openxmlformats.org/drawingml/2006/main"/>
-          <a:p xmlns:a="http://schemas.openxmlformats.org/drawingml/2006/main">
-            <a:pPr algn="l">
-              <a:defRPr sz="900" b="0">
-                <a:solidFill>
-                  <a:srgbClr val="475569"/>
-                </a:solidFill>
-                <a:latin typeface="Aptos"/>
-                <a:ea typeface="Aptos"/>
-                <a:cs typeface="Aptos"/>
-              </a:defRPr>
-            </a:pPr>
-            <a:r>
-              <a:rPr sz="900" b="0">
-                <a:solidFill>
-                  <a:srgbClr val="475569"/>
-                </a:solidFill>
-                <a:latin typeface="Aptos"/>
-                <a:ea typeface="Aptos"/>
-                <a:cs typeface="Aptos"/>
-              </a:rPr>
-              <a:t>EtherCAT 현장 연결, 인터락 임계값, DO 출력 검증</a:t>
-            </a:r>
-          </a:p>
-        </p:txBody>
-      </p:sp>
-      <p:sp>
-        <p:nvSpPr>
-          <p:cNvPr id="28" name="">
-            <a:extLst xmlns:a="http://schemas.openxmlformats.org/drawingml/2006/main">
-              <a:ext uri="{FF2B5EF4-FFF2-40B4-BE49-F238E27FC236}">
-                <a16:creationId xmlns:a16="http://schemas.microsoft.com/office/drawing/2014/main" id="{3E629028-8AB6-4DC9-9DD6-1FA053D86F5C}"/>
-              </a:ext>
-            </a:extLst>
-          </p:cNvPr>
-          <p:cNvSpPr>
-            <a:spLocks xmlns:a="http://schemas.openxmlformats.org/drawingml/2006/main" noGrp="1"/>
-          </p:cNvSpPr>
-          <p:nvPr/>
-        </p:nvSpPr>
-        <p:spPr>
-          <a:xfrm xmlns:a="http://schemas.openxmlformats.org/drawingml/2006/main">
-            <a:off x="704850" y="4762500"/>
-            <a:ext cx="10287000" cy="9525"/>
-          </a:xfrm>
-          <a:prstGeom xmlns:a="http://schemas.openxmlformats.org/drawingml/2006/main" prst="rect">
-            <a:avLst/>
-          </a:prstGeom>
-          <a:solidFill xmlns:a="http://schemas.openxmlformats.org/drawingml/2006/main">
-            <a:srgbClr val="E2E8F0"/>
-          </a:solidFill>
-          <a:ln xmlns:a="http://schemas.openxmlformats.org/drawingml/2006/main" w="0">
-            <a:solidFill>
-              <a:srgbClr val="000000">
-                <a:alpha val="0"/>
-              </a:srgbClr>
-            </a:solidFill>
-            <a:prstDash val="solid"/>
-          </a:ln>
-        </p:spPr>
-      </p:sp>
-      <p:pic>
-        <p:nvPicPr>
-          <p:cNvPr id="29" name=""/>
-          <p:cNvPicPr>
-            <a:picLocks xmlns:a="http://schemas.openxmlformats.org/drawingml/2006/main" noChangeAspect="1"/>
-          </p:cNvPicPr>
-          <p:nvPr/>
-        </p:nvPicPr>
-        <p:blipFill>
-          <a:blip xmlns:r="http://schemas.openxmlformats.org/officeDocument/2006/relationships" xmlns:a="http://schemas.openxmlformats.org/drawingml/2006/main" r:embed="R18d42464e0364c04"/>
-          <a:srcRect xmlns:a="http://schemas.openxmlformats.org/drawingml/2006/main" l="0" t="16400" r="0" b="16400"/>
-          <a:stretch xmlns:a="http://schemas.openxmlformats.org/drawingml/2006/main">
-            <a:fillRect l="0" t="0" r="0" b="0"/>
-          </a:stretch>
-        </p:blipFill>
-        <p:spPr>
-          <a:xfrm xmlns:a="http://schemas.openxmlformats.org/drawingml/2006/main">
-            <a:off x="704850" y="5219700"/>
-            <a:ext cx="2381250" cy="1000125"/>
-          </a:xfrm>
-          <a:prstGeom xmlns:a="http://schemas.openxmlformats.org/drawingml/2006/main" prst="rect">
-            <a:avLst/>
-          </a:prstGeom>
-        </p:spPr>
-      </p:pic>
-      <p:sp>
-        <p:nvSpPr>
-          <p:cNvPr id="30" name="">
-            <a:extLst xmlns:a="http://schemas.openxmlformats.org/drawingml/2006/main">
-              <a:ext uri="{FF2B5EF4-FFF2-40B4-BE49-F238E27FC236}">
-                <a16:creationId xmlns:a16="http://schemas.microsoft.com/office/drawing/2014/main" id="{FB4B30D2-0E9B-4491-88E5-33E127930719}"/>
-              </a:ext>
-            </a:extLst>
-          </p:cNvPr>
-          <p:cNvSpPr>
-            <a:spLocks xmlns:a="http://schemas.openxmlformats.org/drawingml/2006/main" noGrp="1"/>
-          </p:cNvSpPr>
-          <p:nvPr/>
-        </p:nvSpPr>
-        <p:spPr>
-          <a:xfrm xmlns:a="http://schemas.openxmlformats.org/drawingml/2006/main">
-            <a:off x="3390900" y="5391150"/>
-            <a:ext cx="7429500" cy="457200"/>
-          </a:xfrm>
-          <a:prstGeom xmlns:a="http://schemas.openxmlformats.org/drawingml/2006/main" prst="rect">
-            <a:avLst/>
-          </a:prstGeom>
-          <a:solidFill xmlns:a="http://schemas.openxmlformats.org/drawingml/2006/main">
-            <a:srgbClr val="000000">
-              <a:alpha val="0"/>
-            </a:srgbClr>
-          </a:solidFill>
-          <a:ln xmlns:a="http://schemas.openxmlformats.org/drawingml/2006/main" w="0">
-            <a:solidFill>
-              <a:srgbClr val="000000">
-                <a:alpha val="0"/>
-              </a:srgbClr>
-            </a:solidFill>
-            <a:prstDash val="solid"/>
-          </a:ln>
-        </p:spPr>
-        <p:txBody>
-          <a:bodyPr xmlns:a="http://schemas.openxmlformats.org/drawingml/2006/main" lIns="0" tIns="0" rIns="0" bIns="0" anchor="t"/>
-          <a:lstStyle xmlns:a="http://schemas.openxmlformats.org/drawingml/2006/main"/>
-          <a:p xmlns:a="http://schemas.openxmlformats.org/drawingml/2006/main">
-            <a:pPr algn="l">
-              <a:defRPr sz="1275" b="1">
-                <a:solidFill>
-                  <a:srgbClr val="111827"/>
-                </a:solidFill>
-                <a:latin typeface="Aptos"/>
-                <a:ea typeface="Aptos"/>
-                <a:cs typeface="Aptos"/>
-              </a:defRPr>
-            </a:pPr>
-            <a:r>
-              <a:rPr sz="1275" b="1">
-                <a:solidFill>
-                  <a:srgbClr val="111827"/>
-                </a:solidFill>
-                <a:latin typeface="Aptos"/>
-                <a:ea typeface="Aptos"/>
-                <a:cs typeface="Aptos"/>
-              </a:rPr>
-              <a:t>최종 산출물은 발표에서 바로 보여줄 수 있는 실제 실행 화면 중심으로 구성했습니다. WPF는 제어/운전, Flask는 원격 조회, AI는 조언 레이어라는 역할 분리가 명확합니다.</a:t>
-            </a:r>
-          </a:p>
-        </p:txBody>
-      </p:sp>
-      <p:sp>
-        <p:nvSpPr>
-          <p:cNvPr id="31" name="">
-            <a:extLst xmlns:a="http://schemas.openxmlformats.org/drawingml/2006/main">
-              <a:ext uri="{FF2B5EF4-FFF2-40B4-BE49-F238E27FC236}">
-                <a16:creationId xmlns:a16="http://schemas.microsoft.com/office/drawing/2014/main" id="{D5B8555B-DCF4-4C8B-A660-05715E34A2B4}"/>
+          <p:cNvPr id="50" name="">
+            <a:extLst xmlns:a="http://schemas.openxmlformats.org/drawingml/2006/main">
+              <a:ext uri="{FF2B5EF4-FFF2-40B4-BE49-F238E27FC236}">
+                <a16:creationId xmlns:a16="http://schemas.microsoft.com/office/drawing/2014/main" id="{949FB676-DB79-4F78-AD40-BA67BBB336A6}"/>
               </a:ext>
             </a:extLst>
           </p:cNvPr>
@@ -12291,10 +15464,10 @@
       </p:sp>
       <p:sp>
         <p:nvSpPr>
-          <p:cNvPr id="32" name="">
-            <a:extLst xmlns:a="http://schemas.openxmlformats.org/drawingml/2006/main">
-              <a:ext uri="{FF2B5EF4-FFF2-40B4-BE49-F238E27FC236}">
-                <a16:creationId xmlns:a16="http://schemas.microsoft.com/office/drawing/2014/main" id="{34C68A3D-3234-4812-AF16-497F49AD6D37}"/>
+          <p:cNvPr id="51" name="">
+            <a:extLst xmlns:a="http://schemas.openxmlformats.org/drawingml/2006/main">
+              <a:ext uri="{FF2B5EF4-FFF2-40B4-BE49-F238E27FC236}">
+                <a16:creationId xmlns:a16="http://schemas.microsoft.com/office/drawing/2014/main" id="{8FF1D9F4-842A-4E00-9C06-B0B66F46220B}"/>
               </a:ext>
             </a:extLst>
           </p:cNvPr>
@@ -12348,7 +15521,7 @@
                 <a:ea typeface="Aptos"/>
                 <a:cs typeface="Aptos"/>
               </a:rPr>
-              <a:t>08</a:t>
+              <a:t>09</a:t>
             </a:r>
           </a:p>
         </p:txBody>
@@ -12356,7 +15529,7 @@
     </p:spTree>
     <p:extLst>
       <p:ext uri="{BB962C8B-B14F-4D97-AF65-F5344CB8AC3E}">
-        <p14:creationId xmlns:p14="http://schemas.microsoft.com/office/powerpoint/2010/main" val="166228418"/>
+        <p14:creationId xmlns:p14="http://schemas.microsoft.com/office/powerpoint/2010/main" val="1381071751"/>
       </p:ext>
     </p:extLst>
   </p:cSld>
